--- a/lesson3 car race/שיעור מרוץ המכוניות.pptx
+++ b/lesson3 car race/שיעור מרוץ המכוניות.pptx
@@ -5,7 +5,7 @@
     <p:sldMasterId id="2147483648" r:id="rId1"/>
   </p:sldMasterIdLst>
   <p:notesMasterIdLst>
-    <p:notesMasterId r:id="rId32"/>
+    <p:notesMasterId r:id="rId33"/>
   </p:notesMasterIdLst>
   <p:sldIdLst>
     <p:sldId id="256" r:id="rId2"/>
@@ -32,12 +32,13 @@
     <p:sldId id="275" r:id="rId23"/>
     <p:sldId id="276" r:id="rId24"/>
     <p:sldId id="277" r:id="rId25"/>
-    <p:sldId id="278" r:id="rId26"/>
-    <p:sldId id="279" r:id="rId27"/>
-    <p:sldId id="280" r:id="rId28"/>
-    <p:sldId id="281" r:id="rId29"/>
-    <p:sldId id="282" r:id="rId30"/>
+    <p:sldId id="286" r:id="rId26"/>
+    <p:sldId id="278" r:id="rId27"/>
+    <p:sldId id="279" r:id="rId28"/>
+    <p:sldId id="280" r:id="rId29"/>
+    <p:sldId id="281" r:id="rId30"/>
     <p:sldId id="283" r:id="rId31"/>
+    <p:sldId id="282" r:id="rId32"/>
   </p:sldIdLst>
   <p:sldSz cx="12192000" cy="6858000"/>
   <p:notesSz cx="6858000" cy="9144000"/>
@@ -1548,7 +1549,13 @@
   <p:cSld>
     <p:spTree>
       <p:nvGrpSpPr>
-        <p:cNvPr id="1" name=""/>
+        <p:cNvPr id="1" name="">
+          <a:extLst>
+            <a:ext uri="{FF2B5EF4-FFF2-40B4-BE49-F238E27FC236}">
+              <a16:creationId xmlns:a16="http://schemas.microsoft.com/office/drawing/2014/main" id="{74A010B7-458E-CE1A-5D25-233113008603}"/>
+            </a:ext>
+          </a:extLst>
+        </p:cNvPr>
         <p:cNvGrpSpPr/>
         <p:nvPr/>
       </p:nvGrpSpPr>
@@ -1562,7 +1569,13 @@
       </p:grpSpPr>
       <p:sp>
         <p:nvSpPr>
-          <p:cNvPr id="2" name="Slide Image Placeholder 1"/>
+          <p:cNvPr id="2" name="Slide Image Placeholder 1">
+            <a:extLst>
+              <a:ext uri="{FF2B5EF4-FFF2-40B4-BE49-F238E27FC236}">
+                <a16:creationId xmlns:a16="http://schemas.microsoft.com/office/drawing/2014/main" id="{217B6847-D80D-7FB2-EAB4-BDCA3D65D2FD}"/>
+              </a:ext>
+            </a:extLst>
+          </p:cNvPr>
           <p:cNvSpPr>
             <a:spLocks noGrp="1" noRot="1" noChangeAspect="1"/>
           </p:cNvSpPr>
@@ -1574,7 +1587,13 @@
       </p:sp>
       <p:sp>
         <p:nvSpPr>
-          <p:cNvPr id="3" name="Notes Placeholder 2"/>
+          <p:cNvPr id="3" name="Notes Placeholder 2">
+            <a:extLst>
+              <a:ext uri="{FF2B5EF4-FFF2-40B4-BE49-F238E27FC236}">
+                <a16:creationId xmlns:a16="http://schemas.microsoft.com/office/drawing/2014/main" id="{EAD197D7-0DF8-66D4-31F6-BC04898B11F2}"/>
+              </a:ext>
+            </a:extLst>
+          </p:cNvPr>
           <p:cNvSpPr>
             <a:spLocks noGrp="1"/>
           </p:cNvSpPr>
@@ -1595,7 +1614,13 @@
       </p:sp>
       <p:sp>
         <p:nvSpPr>
-          <p:cNvPr id="4" name="Slide Number Placeholder 3"/>
+          <p:cNvPr id="4" name="Slide Number Placeholder 3">
+            <a:extLst>
+              <a:ext uri="{FF2B5EF4-FFF2-40B4-BE49-F238E27FC236}">
+                <a16:creationId xmlns:a16="http://schemas.microsoft.com/office/drawing/2014/main" id="{448BAC0A-4826-D48C-3B3E-6CA729D36396}"/>
+              </a:ext>
+            </a:extLst>
+          </p:cNvPr>
           <p:cNvSpPr>
             <a:spLocks noGrp="1"/>
           </p:cNvSpPr>
@@ -1606,6 +1631,11 @@
         <p:spPr/>
       </p:sp>
     </p:spTree>
+    <p:extLst>
+      <p:ext uri="{BB962C8B-B14F-4D97-AF65-F5344CB8AC3E}">
+        <p14:creationId xmlns:p14="http://schemas.microsoft.com/office/powerpoint/2010/main" val="588834573"/>
+      </p:ext>
+    </p:extLst>
   </p:cSld>
   <p:clrMapOvr>
     <a:masterClrMapping/>
@@ -1658,7 +1688,7 @@
           <a:lstStyle/>
           <a:p>
             <a:r>
-              <a:t>10 דק'. זה הרעיון הכי חשוב במשחקים: לולאת משחק. game_loop קוראת לעצמה דרך ontimer כל 20 אלפיות שנייה - כמו tick בתפסו את הצב, רק הרבה יותר מהר. הכביש לא באמת זז - הקווים זזים למטה וחוזרים למעלה (move_lines עם for על רשימת הקווים). move_enemy: כשהמכונית יוצאת למטה היא חוזרת למעלה בנתיב אקראי - random.choice(LANES).</a:t>
+              <a:t>8 דק'. lane הוא משתנה גלובלי - לכן global בתוך הפונקציה. move_right בודקת lane &lt; len(LANES) - 1, כלומר 'לא באינדקס האחרון'. שאלו: למה לא כתבנו פשוט lane &lt; 2? (כי אם נוסיף נתיב לרשימה, הקוד ימשיך לעבוד). screen.listen() חובה - אחרת המסך לא שומע את המקלדת.</a:t>
             </a:r>
           </a:p>
         </p:txBody>
@@ -1728,7 +1758,7 @@
           <a:lstStyle/>
           <a:p>
             <a:r>
-              <a:t>8 דק'. abs מחזירה ערך מוחלט: abs(-5) = 5. שתי מכוניות נוגעות אם המרחק ביניהן ב-x קטן מרוחב מכונית (36) וגם ב-y קטן מאורך מכונית (64). שימו לב: crashed מחזירה ערך בוליאני - וזה מה שה-if בודק. אם התנגשנו - לא קוראים שוב ל-ontimer, ולכן הלולאה נעצרת. פשוט וחכם.</a:t>
+              <a:t>10 דק'. זה הרעיון הכי חשוב במשחקים: לולאת משחק. game_loop קוראת לעצמה דרך ontimer כל 20 אלפיות שנייה - כמו tick בתפסו את הצב, רק הרבה יותר מהר. הכביש לא באמת זז - הקווים זזים למטה וחוזרים למעלה (move_lines עם for על רשימת הקווים). move_enemy: כשהמכונית יוצאת למטה היא חוזרת למעלה בנתיב אקראי - random.choice(LANES).</a:t>
             </a:r>
           </a:p>
         </p:txBody>
@@ -1798,7 +1828,7 @@
           <a:lstStyle/>
           <a:p>
             <a:r>
-              <a:t>10 דק'. כאן הכול מתחבר: רשימת מכוניות (enemies), לולאת for שעוברת על כולן, פונקציות (reset_enemy, crashed), ומשתנים גלובליים (score, speed, game_over). שאלו: מה צריך לשנות כדי שיהיו 5 מכוניות? (רק range(5)). זה הכוח של רשימות.</a:t>
+              <a:t>8 דק'. abs מחזירה ערך מוחלט: abs(-5) = 5. שתי מכוניות נוגעות אם המרחק ביניהן ב-x קטן מרוחב מכונית (36) וגם ב-y קטן מאורך מכונית (64). שימו לב: crashed מחזירה ערך בוליאני - וזה מה שה-if בודק. אם התנגשנו - לא קוראים שוב ל-ontimer, ולכן הלולאה נעצרת. פשוט וחכם.</a:t>
             </a:r>
           </a:p>
         </p:txBody>
@@ -1868,7 +1898,7 @@
           <a:lstStyle/>
           <a:p>
             <a:r>
-              <a:t>זמן שנשאר. כל תלמיד בוחר רמה. אתגר החיים: משתנה lives = 3, ובהתנגשות lives = lives - 1 ו-reset_enemy(enemy) כדי שהמכונית תיעלם; game_over רק כש-lives == 0.</a:t>
+              <a:t>10 דק'. כאן הכול מתחבר: רשימת מכוניות (enemies), לולאת for שעוברת על כולן, פונקציות (reset_enemy, crashed), ומשתנים גלובליים (score, speed, game_over). שאלו: מה צריך לשנות כדי שיהיו 5 מכוניות? (רק range(5)). זה הכוח של רשימות.</a:t>
             </a:r>
           </a:p>
         </p:txBody>
@@ -2009,6 +2039,76 @@
           <a:p>
             <a:r>
               <a:t>2 דק'. שאלו כל תלמיד: מה הדבר הכי מגניב שלמדתם היום? שיעורי בית: לבחור אתגר אחד מהשקף הקודם ולהגיש את car5.py המשודרג.</a:t>
+            </a:r>
+          </a:p>
+        </p:txBody>
+      </p:sp>
+      <p:sp>
+        <p:nvSpPr>
+          <p:cNvPr id="4" name="Slide Number Placeholder 3"/>
+          <p:cNvSpPr>
+            <a:spLocks noGrp="1"/>
+          </p:cNvSpPr>
+          <p:nvPr>
+            <p:ph type="sldNum" sz="quarter" idx="5"/>
+          </p:nvPr>
+        </p:nvSpPr>
+        <p:spPr/>
+      </p:sp>
+    </p:spTree>
+  </p:cSld>
+  <p:clrMapOvr>
+    <a:masterClrMapping/>
+  </p:clrMapOvr>
+</p:notes>
+</file>
+
+<file path=ppt/notesSlides/notesSlide31.xml><?xml version="1.0" encoding="utf-8"?>
+<p:notes xmlns:a="http://schemas.openxmlformats.org/drawingml/2006/main" xmlns:r="http://schemas.openxmlformats.org/officeDocument/2006/relationships" xmlns:p="http://schemas.openxmlformats.org/presentationml/2006/main">
+  <p:cSld>
+    <p:spTree>
+      <p:nvGrpSpPr>
+        <p:cNvPr id="1" name=""/>
+        <p:cNvGrpSpPr/>
+        <p:nvPr/>
+      </p:nvGrpSpPr>
+      <p:grpSpPr>
+        <a:xfrm>
+          <a:off x="0" y="0"/>
+          <a:ext cx="0" cy="0"/>
+          <a:chOff x="0" y="0"/>
+          <a:chExt cx="0" cy="0"/>
+        </a:xfrm>
+      </p:grpSpPr>
+      <p:sp>
+        <p:nvSpPr>
+          <p:cNvPr id="2" name="Slide Image Placeholder 1"/>
+          <p:cNvSpPr>
+            <a:spLocks noGrp="1" noRot="1" noChangeAspect="1"/>
+          </p:cNvSpPr>
+          <p:nvPr>
+            <p:ph type="sldImg" idx="2"/>
+          </p:nvPr>
+        </p:nvSpPr>
+        <p:spPr/>
+      </p:sp>
+      <p:sp>
+        <p:nvSpPr>
+          <p:cNvPr id="3" name="Notes Placeholder 2"/>
+          <p:cNvSpPr>
+            <a:spLocks noGrp="1"/>
+          </p:cNvSpPr>
+          <p:nvPr>
+            <p:ph type="body" sz="quarter" idx="3"/>
+          </p:nvPr>
+        </p:nvSpPr>
+        <p:spPr/>
+        <p:txBody>
+          <a:bodyPr/>
+          <a:lstStyle/>
+          <a:p>
+            <a:r>
+              <a:t>זמן שנשאר. כל תלמיד בוחר רמה. אתגר החיים: משתנה lives = 3, ובהתנגשות lives = lives - 1 ו-reset_enemy(enemy) כדי שהמכונית תיעלם; game_over רק כש-lives == 0.</a:t>
             </a:r>
           </a:p>
         </p:txBody>
@@ -15486,7 +15586,7 @@
         </p:nvSpPr>
         <p:spPr>
           <a:xfrm>
-            <a:off x="548640" y="385494"/>
+            <a:off x="437997" y="676424"/>
             <a:ext cx="11091672" cy="646331"/>
           </a:xfrm>
           <a:prstGeom prst="rect">
@@ -15506,14 +15606,14 @@
               </a:spcAft>
             </a:pPr>
             <a:r>
-              <a:rPr lang="he-IL" sz="3600" b="1" i="0" dirty="0">
-                <a:solidFill>
-                  <a:srgbClr val="1B4332"/>
+              <a:rPr lang="he-IL" sz="3600" dirty="0">
+                <a:solidFill>
+                  <a:srgbClr val="5F6F78"/>
                 </a:solidFill>
                 <a:latin typeface="Arial"/>
                 <a:cs typeface="Arial"/>
               </a:rPr>
-              <a:t>תזכורת: מה למדנו</a:t>
+              <a:t>ארבעה דברים שנצטרך היום במשחק:</a:t>
             </a:r>
           </a:p>
         </p:txBody>
@@ -15553,46 +15653,6 @@
                 <a:latin typeface="Arial"/>
               </a:rPr>
               <a:t>2</a:t>
-            </a:r>
-          </a:p>
-        </p:txBody>
-      </p:sp>
-      <p:sp>
-        <p:nvSpPr>
-          <p:cNvPr id="4" name="TextBox 3"/>
-          <p:cNvSpPr txBox="1"/>
-          <p:nvPr/>
-        </p:nvSpPr>
-        <p:spPr>
-          <a:xfrm>
-            <a:off x="548640" y="1097280"/>
-            <a:ext cx="11091672" cy="400110"/>
-          </a:xfrm>
-          <a:prstGeom prst="rect">
-            <a:avLst/>
-          </a:prstGeom>
-          <a:noFill/>
-        </p:spPr>
-        <p:txBody>
-          <a:bodyPr wrap="square" lIns="45720" rIns="45720" anchor="t">
-            <a:spAutoFit/>
-          </a:bodyPr>
-          <a:lstStyle/>
-          <a:p>
-            <a:pPr algn="r" rtl="1">
-              <a:spcAft>
-                <a:spcPts val="400"/>
-              </a:spcAft>
-            </a:pPr>
-            <a:r>
-              <a:rPr lang="he-IL" sz="2000" b="0" i="0" dirty="0">
-                <a:solidFill>
-                  <a:srgbClr val="5F6F78"/>
-                </a:solidFill>
-                <a:latin typeface="Arial"/>
-                <a:cs typeface="Arial"/>
-              </a:rPr>
-              <a:t>ארבעה דברים שנצטרך היום במשחק:</a:t>
             </a:r>
           </a:p>
         </p:txBody>
@@ -20966,8 +21026,8 @@
         </p:nvSpPr>
         <p:spPr>
           <a:xfrm>
-            <a:off x="5349240" y="1440180"/>
-            <a:ext cx="6062472" cy="2377440"/>
+            <a:off x="5349240" y="1319871"/>
+            <a:ext cx="4937249" cy="2642070"/>
           </a:xfrm>
           <a:prstGeom prst="rect">
             <a:avLst/>
@@ -20986,7 +21046,7 @@
               </a:lnSpc>
             </a:pPr>
             <a:r>
-              <a:rPr sz="1600" dirty="0" err="1">
+              <a:rPr sz="2000" dirty="0" err="1">
                 <a:solidFill>
                   <a:srgbClr val="E6E6E6"/>
                 </a:solidFill>
@@ -20995,7 +21055,7 @@
               <a:t>screen.</a:t>
             </a:r>
             <a:r>
-              <a:rPr sz="1600" dirty="0" err="1">
+              <a:rPr sz="2000" dirty="0" err="1">
                 <a:solidFill>
                   <a:srgbClr val="7FDBFF"/>
                 </a:solidFill>
@@ -21004,7 +21064,7 @@
               <a:t>register_shape</a:t>
             </a:r>
             <a:r>
-              <a:rPr sz="1600" dirty="0">
+              <a:rPr sz="2000" dirty="0">
                 <a:solidFill>
                   <a:srgbClr val="E6E6E6"/>
                 </a:solidFill>
@@ -21013,7 +21073,7 @@
               <a:t>(</a:t>
             </a:r>
             <a:r>
-              <a:rPr sz="1600" dirty="0">
+              <a:rPr sz="2000" dirty="0">
                 <a:solidFill>
                   <a:srgbClr val="A6E22E"/>
                 </a:solidFill>
@@ -21022,7 +21082,7 @@
               <a:t>"player.gif"</a:t>
             </a:r>
             <a:r>
-              <a:rPr sz="1600" dirty="0">
+              <a:rPr sz="2000" dirty="0">
                 <a:solidFill>
                   <a:srgbClr val="E6E6E6"/>
                 </a:solidFill>
@@ -21038,7 +21098,7 @@
               </a:lnSpc>
             </a:pPr>
             <a:r>
-              <a:rPr sz="1600" dirty="0">
+              <a:rPr sz="2000" dirty="0">
                 <a:latin typeface="Consolas"/>
               </a:rPr>
               <a:t> </a:t>
@@ -21051,7 +21111,7 @@
               </a:lnSpc>
             </a:pPr>
             <a:r>
-              <a:rPr sz="1600" dirty="0">
+              <a:rPr sz="2000" dirty="0">
                 <a:solidFill>
                   <a:srgbClr val="FF9F1C"/>
                 </a:solidFill>
@@ -21060,7 +21120,7 @@
               <a:t>def</a:t>
             </a:r>
             <a:r>
-              <a:rPr sz="1600" dirty="0">
+              <a:rPr sz="2000" dirty="0">
                 <a:solidFill>
                   <a:srgbClr val="E6E6E6"/>
                 </a:solidFill>
@@ -21069,7 +21129,7 @@
               <a:t> </a:t>
             </a:r>
             <a:r>
-              <a:rPr sz="1600" dirty="0" err="1">
+              <a:rPr sz="2000" dirty="0" err="1">
                 <a:solidFill>
                   <a:srgbClr val="7FDBFF"/>
                 </a:solidFill>
@@ -21078,7 +21138,7 @@
               <a:t>make_car</a:t>
             </a:r>
             <a:r>
-              <a:rPr sz="1600" dirty="0">
+              <a:rPr sz="2000" dirty="0">
                 <a:solidFill>
                   <a:srgbClr val="E6E6E6"/>
                 </a:solidFill>
@@ -21087,7 +21147,7 @@
               <a:t>(</a:t>
             </a:r>
             <a:r>
-              <a:rPr sz="1600" b="1" dirty="0">
+              <a:rPr sz="2000" b="1" dirty="0">
                 <a:solidFill>
                   <a:srgbClr val="FF6B9A"/>
                 </a:solidFill>
@@ -21096,7 +21156,7 @@
               <a:t>image</a:t>
             </a:r>
             <a:r>
-              <a:rPr sz="1600" dirty="0">
+              <a:rPr sz="2000" dirty="0">
                 <a:solidFill>
                   <a:srgbClr val="E6E6E6"/>
                 </a:solidFill>
@@ -21112,7 +21172,7 @@
               </a:lnSpc>
             </a:pPr>
             <a:r>
-              <a:rPr sz="1600" dirty="0">
+              <a:rPr sz="2000" dirty="0">
                 <a:solidFill>
                   <a:srgbClr val="E6E6E6"/>
                 </a:solidFill>
@@ -21121,7 +21181,7 @@
               <a:t>    car = </a:t>
             </a:r>
             <a:r>
-              <a:rPr sz="1600" dirty="0" err="1">
+              <a:rPr sz="2000" dirty="0" err="1">
                 <a:solidFill>
                   <a:srgbClr val="E6E6E6"/>
                 </a:solidFill>
@@ -21130,7 +21190,7 @@
               <a:t>turtle.</a:t>
             </a:r>
             <a:r>
-              <a:rPr sz="1600" dirty="0" err="1">
+              <a:rPr sz="2000" dirty="0" err="1">
                 <a:solidFill>
                   <a:srgbClr val="7FDBFF"/>
                 </a:solidFill>
@@ -21139,7 +21199,7 @@
               <a:t>Turtle</a:t>
             </a:r>
             <a:r>
-              <a:rPr sz="1600" dirty="0">
+              <a:rPr sz="2000" dirty="0">
                 <a:solidFill>
                   <a:srgbClr val="E6E6E6"/>
                 </a:solidFill>
@@ -21155,7 +21215,7 @@
               </a:lnSpc>
             </a:pPr>
             <a:r>
-              <a:rPr sz="1600" dirty="0">
+              <a:rPr sz="2000" dirty="0">
                 <a:solidFill>
                   <a:srgbClr val="E6E6E6"/>
                 </a:solidFill>
@@ -21164,7 +21224,7 @@
               <a:t>    </a:t>
             </a:r>
             <a:r>
-              <a:rPr sz="1600" dirty="0" err="1">
+              <a:rPr sz="2000" dirty="0" err="1">
                 <a:solidFill>
                   <a:srgbClr val="E6E6E6"/>
                 </a:solidFill>
@@ -21173,7 +21233,7 @@
               <a:t>car.</a:t>
             </a:r>
             <a:r>
-              <a:rPr sz="1600" dirty="0" err="1">
+              <a:rPr sz="2000" dirty="0" err="1">
                 <a:solidFill>
                   <a:srgbClr val="7FDBFF"/>
                 </a:solidFill>
@@ -21182,7 +21242,7 @@
               <a:t>shape</a:t>
             </a:r>
             <a:r>
-              <a:rPr sz="1600" dirty="0">
+              <a:rPr sz="2000" dirty="0">
                 <a:solidFill>
                   <a:srgbClr val="E6E6E6"/>
                 </a:solidFill>
@@ -21191,7 +21251,7 @@
               <a:t>(</a:t>
             </a:r>
             <a:r>
-              <a:rPr sz="1600" b="1" dirty="0">
+              <a:rPr sz="2000" b="1" dirty="0">
                 <a:solidFill>
                   <a:srgbClr val="FF6B9A"/>
                 </a:solidFill>
@@ -21200,7 +21260,7 @@
               <a:t>image</a:t>
             </a:r>
             <a:r>
-              <a:rPr sz="1600" dirty="0">
+              <a:rPr sz="2000" dirty="0">
                 <a:solidFill>
                   <a:srgbClr val="E6E6E6"/>
                 </a:solidFill>
@@ -21216,7 +21276,7 @@
               </a:lnSpc>
             </a:pPr>
             <a:r>
-              <a:rPr sz="1600" dirty="0">
+              <a:rPr sz="2000" dirty="0">
                 <a:solidFill>
                   <a:srgbClr val="E6E6E6"/>
                 </a:solidFill>
@@ -21225,7 +21285,7 @@
               <a:t>    </a:t>
             </a:r>
             <a:r>
-              <a:rPr sz="1600" dirty="0" err="1">
+              <a:rPr sz="2000" dirty="0" err="1">
                 <a:solidFill>
                   <a:srgbClr val="E6E6E6"/>
                 </a:solidFill>
@@ -21234,7 +21294,7 @@
               <a:t>car.</a:t>
             </a:r>
             <a:r>
-              <a:rPr sz="1600" dirty="0" err="1">
+              <a:rPr sz="2000" dirty="0" err="1">
                 <a:solidFill>
                   <a:srgbClr val="7FDBFF"/>
                 </a:solidFill>
@@ -21243,7 +21303,7 @@
               <a:t>penup</a:t>
             </a:r>
             <a:r>
-              <a:rPr sz="1600" dirty="0">
+              <a:rPr sz="2000" dirty="0">
                 <a:solidFill>
                   <a:srgbClr val="E6E6E6"/>
                 </a:solidFill>
@@ -21259,7 +21319,7 @@
               </a:lnSpc>
             </a:pPr>
             <a:r>
-              <a:rPr sz="1600" dirty="0">
+              <a:rPr sz="2000" dirty="0">
                 <a:solidFill>
                   <a:srgbClr val="E6E6E6"/>
                 </a:solidFill>
@@ -21268,7 +21328,7 @@
               <a:t>    </a:t>
             </a:r>
             <a:r>
-              <a:rPr sz="1600" dirty="0" err="1">
+              <a:rPr sz="2000" dirty="0" err="1">
                 <a:solidFill>
                   <a:srgbClr val="E6E6E6"/>
                 </a:solidFill>
@@ -21277,7 +21337,7 @@
               <a:t>car.</a:t>
             </a:r>
             <a:r>
-              <a:rPr sz="1600" dirty="0" err="1">
+              <a:rPr sz="2000" dirty="0" err="1">
                 <a:solidFill>
                   <a:srgbClr val="7FDBFF"/>
                 </a:solidFill>
@@ -21286,7 +21346,7 @@
               <a:t>goto</a:t>
             </a:r>
             <a:r>
-              <a:rPr sz="1600" dirty="0">
+              <a:rPr sz="2000" dirty="0">
                 <a:solidFill>
                   <a:srgbClr val="E6E6E6"/>
                 </a:solidFill>
@@ -21302,7 +21362,7 @@
               </a:lnSpc>
             </a:pPr>
             <a:r>
-              <a:rPr sz="1600" dirty="0">
+              <a:rPr sz="2000" dirty="0">
                 <a:solidFill>
                   <a:srgbClr val="E6E6E6"/>
                 </a:solidFill>
@@ -21311,7 +21371,7 @@
               <a:t>    </a:t>
             </a:r>
             <a:r>
-              <a:rPr sz="1600" dirty="0">
+              <a:rPr sz="2000" dirty="0">
                 <a:solidFill>
                   <a:srgbClr val="FF9F1C"/>
                 </a:solidFill>
@@ -21320,7 +21380,7 @@
               <a:t>return</a:t>
             </a:r>
             <a:r>
-              <a:rPr sz="1600" dirty="0">
+              <a:rPr sz="2000" dirty="0">
                 <a:solidFill>
                   <a:srgbClr val="E6E6E6"/>
                 </a:solidFill>
@@ -21391,8 +21451,8 @@
         </p:nvSpPr>
         <p:spPr>
           <a:xfrm>
-            <a:off x="5285231" y="4230014"/>
-            <a:ext cx="6190488" cy="409651"/>
+            <a:off x="5285231" y="4292941"/>
+            <a:ext cx="5951950" cy="283796"/>
           </a:xfrm>
           <a:prstGeom prst="rect">
             <a:avLst/>
@@ -21411,7 +21471,7 @@
               </a:lnSpc>
             </a:pPr>
             <a:r>
-              <a:rPr sz="1600">
+              <a:rPr dirty="0">
                 <a:solidFill>
                   <a:srgbClr val="E6E6E6"/>
                 </a:solidFill>
@@ -21420,7 +21480,7 @@
               <a:t>player = </a:t>
             </a:r>
             <a:r>
-              <a:rPr sz="1600">
+              <a:rPr dirty="0" err="1">
                 <a:solidFill>
                   <a:srgbClr val="7FDBFF"/>
                 </a:solidFill>
@@ -21429,7 +21489,7 @@
               <a:t>make_car</a:t>
             </a:r>
             <a:r>
-              <a:rPr sz="1600">
+              <a:rPr dirty="0">
                 <a:solidFill>
                   <a:srgbClr val="E6E6E6"/>
                 </a:solidFill>
@@ -21438,7 +21498,7 @@
               <a:t>(</a:t>
             </a:r>
             <a:r>
-              <a:rPr sz="1600">
+              <a:rPr dirty="0">
                 <a:solidFill>
                   <a:srgbClr val="A6E22E"/>
                 </a:solidFill>
@@ -21447,7 +21507,7 @@
               <a:t>"player.gif"</a:t>
             </a:r>
             <a:r>
-              <a:rPr sz="1600">
+              <a:rPr dirty="0">
                 <a:solidFill>
                   <a:srgbClr val="E6E6E6"/>
                 </a:solidFill>
@@ -21456,7 +21516,7 @@
               <a:t>, </a:t>
             </a:r>
             <a:r>
-              <a:rPr sz="1600" b="1">
+              <a:rPr b="1" dirty="0">
                 <a:solidFill>
                   <a:srgbClr val="FF6B9A"/>
                 </a:solidFill>
@@ -21465,7 +21525,7 @@
               <a:t>LANES</a:t>
             </a:r>
             <a:r>
-              <a:rPr sz="1600">
+              <a:rPr dirty="0">
                 <a:solidFill>
                   <a:srgbClr val="E6E6E6"/>
                 </a:solidFill>
@@ -21474,7 +21534,7 @@
               <a:t>[</a:t>
             </a:r>
             <a:r>
-              <a:rPr sz="1600">
+              <a:rPr dirty="0">
                 <a:solidFill>
                   <a:srgbClr val="FFD166"/>
                 </a:solidFill>
@@ -21483,7 +21543,7 @@
               <a:t>1</a:t>
             </a:r>
             <a:r>
-              <a:rPr sz="1600">
+              <a:rPr dirty="0">
                 <a:solidFill>
                   <a:srgbClr val="E6E6E6"/>
                 </a:solidFill>
@@ -21492,7 +21552,7 @@
               <a:t>], -</a:t>
             </a:r>
             <a:r>
-              <a:rPr sz="1600">
+              <a:rPr dirty="0">
                 <a:solidFill>
                   <a:srgbClr val="FFD166"/>
                 </a:solidFill>
@@ -21501,7 +21561,7 @@
               <a:t>250</a:t>
             </a:r>
             <a:r>
-              <a:rPr sz="1600">
+              <a:rPr dirty="0">
                 <a:solidFill>
                   <a:srgbClr val="E6E6E6"/>
                 </a:solidFill>
@@ -22411,8 +22471,8 @@
         </p:nvSpPr>
         <p:spPr>
           <a:xfrm>
-            <a:off x="777240" y="4000500"/>
-            <a:ext cx="4800600" cy="822960"/>
+            <a:off x="777240" y="3921943"/>
+            <a:ext cx="3244478" cy="980076"/>
           </a:xfrm>
           <a:prstGeom prst="rect">
             <a:avLst/>
@@ -22431,7 +22491,7 @@
               </a:lnSpc>
             </a:pPr>
             <a:r>
-              <a:rPr sz="1600" b="1">
+              <a:rPr sz="2000" b="1">
                 <a:solidFill>
                   <a:srgbClr val="FF6B9A"/>
                 </a:solidFill>
@@ -22440,7 +22500,7 @@
               <a:t>car</a:t>
             </a:r>
             <a:r>
-              <a:rPr sz="1600">
+              <a:rPr sz="2000">
                 <a:solidFill>
                   <a:srgbClr val="E6E6E6"/>
                 </a:solidFill>
@@ -22449,7 +22509,7 @@
               <a:t> = turtle.</a:t>
             </a:r>
             <a:r>
-              <a:rPr sz="1600">
+              <a:rPr sz="2000">
                 <a:solidFill>
                   <a:srgbClr val="7FDBFF"/>
                 </a:solidFill>
@@ -22458,7 +22518,7 @@
               <a:t>Turtle</a:t>
             </a:r>
             <a:r>
-              <a:rPr sz="1600">
+              <a:rPr sz="2000">
                 <a:solidFill>
                   <a:srgbClr val="E6E6E6"/>
                 </a:solidFill>
@@ -22474,7 +22534,7 @@
               </a:lnSpc>
             </a:pPr>
             <a:r>
-              <a:rPr sz="1600" b="1">
+              <a:rPr sz="2000" b="1">
                 <a:solidFill>
                   <a:srgbClr val="FF6B9A"/>
                 </a:solidFill>
@@ -22483,7 +22543,7 @@
               <a:t>car</a:t>
             </a:r>
             <a:r>
-              <a:rPr sz="1600">
+              <a:rPr sz="2000">
                 <a:solidFill>
                   <a:srgbClr val="E6E6E6"/>
                 </a:solidFill>
@@ -22492,7 +22552,7 @@
               <a:t>.</a:t>
             </a:r>
             <a:r>
-              <a:rPr sz="1600">
+              <a:rPr sz="2000">
                 <a:solidFill>
                   <a:srgbClr val="7FDBFF"/>
                 </a:solidFill>
@@ -22501,7 +22561,7 @@
               <a:t>shape</a:t>
             </a:r>
             <a:r>
-              <a:rPr sz="1600">
+              <a:rPr sz="2000">
                 <a:solidFill>
                   <a:srgbClr val="E6E6E6"/>
                 </a:solidFill>
@@ -22510,7 +22570,7 @@
               <a:t>(</a:t>
             </a:r>
             <a:r>
-              <a:rPr sz="1600">
+              <a:rPr sz="2000">
                 <a:solidFill>
                   <a:srgbClr val="A6E22E"/>
                 </a:solidFill>
@@ -22519,7 +22579,7 @@
               <a:t>"player.gif"</a:t>
             </a:r>
             <a:r>
-              <a:rPr sz="1600">
+              <a:rPr sz="2000">
                 <a:solidFill>
                   <a:srgbClr val="E6E6E6"/>
                 </a:solidFill>
@@ -22535,7 +22595,7 @@
               </a:lnSpc>
             </a:pPr>
             <a:r>
-              <a:rPr sz="1600" b="1">
+              <a:rPr sz="2000" b="1">
                 <a:solidFill>
                   <a:srgbClr val="FF6B9A"/>
                 </a:solidFill>
@@ -22544,7 +22604,7 @@
               <a:t>car</a:t>
             </a:r>
             <a:r>
-              <a:rPr sz="1600">
+              <a:rPr sz="2000">
                 <a:solidFill>
                   <a:srgbClr val="E6E6E6"/>
                 </a:solidFill>
@@ -22553,7 +22613,7 @@
               <a:t>.</a:t>
             </a:r>
             <a:r>
-              <a:rPr sz="1600">
+              <a:rPr sz="2000">
                 <a:solidFill>
                   <a:srgbClr val="7FDBFF"/>
                 </a:solidFill>
@@ -22562,7 +22622,7 @@
               <a:t>goto</a:t>
             </a:r>
             <a:r>
-              <a:rPr sz="1600">
+              <a:rPr sz="2000">
                 <a:solidFill>
                   <a:srgbClr val="E6E6E6"/>
                 </a:solidFill>
@@ -22571,7 +22631,7 @@
               <a:t>(</a:t>
             </a:r>
             <a:r>
-              <a:rPr sz="1600">
+              <a:rPr sz="2000">
                 <a:solidFill>
                   <a:srgbClr val="FFD166"/>
                 </a:solidFill>
@@ -22580,7 +22640,7 @@
               <a:t>0</a:t>
             </a:r>
             <a:r>
-              <a:rPr sz="1600">
+              <a:rPr sz="2000">
                 <a:solidFill>
                   <a:srgbClr val="E6E6E6"/>
                 </a:solidFill>
@@ -22589,7 +22649,7 @@
               <a:t>, -</a:t>
             </a:r>
             <a:r>
-              <a:rPr sz="1600">
+              <a:rPr sz="2000">
                 <a:solidFill>
                   <a:srgbClr val="FFD166"/>
                 </a:solidFill>
@@ -22598,7 +22658,7 @@
               <a:t>250</a:t>
             </a:r>
             <a:r>
-              <a:rPr sz="1600">
+              <a:rPr sz="2000">
                 <a:solidFill>
                   <a:srgbClr val="E6E6E6"/>
                 </a:solidFill>
@@ -23331,17 +23391,15 @@
 <file path=ppt/slides/slide25.xml><?xml version="1.0" encoding="utf-8"?>
 <p:sld xmlns:a="http://schemas.openxmlformats.org/drawingml/2006/main" xmlns:r="http://schemas.openxmlformats.org/officeDocument/2006/relationships" xmlns:p="http://schemas.openxmlformats.org/presentationml/2006/main">
   <p:cSld>
-    <p:bg>
-      <p:bgPr>
-        <a:solidFill>
-          <a:srgbClr val="FFFFFF"/>
-        </a:solidFill>
-        <a:effectLst/>
-      </p:bgPr>
-    </p:bg>
     <p:spTree>
       <p:nvGrpSpPr>
-        <p:cNvPr id="1" name=""/>
+        <p:cNvPr id="1" name="">
+          <a:extLst>
+            <a:ext uri="{FF2B5EF4-FFF2-40B4-BE49-F238E27FC236}">
+              <a16:creationId xmlns:a16="http://schemas.microsoft.com/office/drawing/2014/main" id="{259093D5-63D2-3AA8-2BF6-716C9B361861}"/>
+            </a:ext>
+          </a:extLst>
+        </p:cNvPr>
         <p:cNvGrpSpPr/>
         <p:nvPr/>
       </p:nvGrpSpPr>
@@ -23355,7 +23413,13 @@
       </p:grpSpPr>
       <p:sp>
         <p:nvSpPr>
-          <p:cNvPr id="2" name="TextBox 1"/>
+          <p:cNvPr id="2" name="TextBox 1">
+            <a:extLst>
+              <a:ext uri="{FF2B5EF4-FFF2-40B4-BE49-F238E27FC236}">
+                <a16:creationId xmlns:a16="http://schemas.microsoft.com/office/drawing/2014/main" id="{91F5FE34-8A73-3C68-024B-A32B9E118E9B}"/>
+              </a:ext>
+            </a:extLst>
+          </p:cNvPr>
           <p:cNvSpPr txBox="1"/>
           <p:nvPr/>
         </p:nvSpPr>
@@ -23381,7 +23445,7 @@
               </a:spcAft>
             </a:pPr>
             <a:r>
-              <a:rPr lang="he-IL" sz="3600" b="1" i="0">
+              <a:rPr lang="he-IL" sz="3600" b="1" i="0" dirty="0">
                 <a:solidFill>
                   <a:srgbClr val="1B4332"/>
                 </a:solidFill>
@@ -23395,7 +23459,13 @@
       </p:sp>
       <p:sp>
         <p:nvSpPr>
-          <p:cNvPr id="3" name="TextBox 2"/>
+          <p:cNvPr id="3" name="TextBox 2">
+            <a:extLst>
+              <a:ext uri="{FF2B5EF4-FFF2-40B4-BE49-F238E27FC236}">
+                <a16:creationId xmlns:a16="http://schemas.microsoft.com/office/drawing/2014/main" id="{F0E79174-D16D-CC69-856E-CD39B2CC5A0F}"/>
+              </a:ext>
+            </a:extLst>
+          </p:cNvPr>
           <p:cNvSpPr txBox="1"/>
           <p:nvPr/>
         </p:nvSpPr>
@@ -23434,979 +23504,90 @@
       </p:sp>
       <p:sp>
         <p:nvSpPr>
-          <p:cNvPr id="4" name="pic-card"/>
-          <p:cNvSpPr/>
-          <p:nvPr/>
-        </p:nvSpPr>
-        <p:spPr>
-          <a:xfrm>
-            <a:off x="804672" y="1216152"/>
-            <a:ext cx="3213523" cy="4425696"/>
-          </a:xfrm>
-          <a:prstGeom prst="roundRect">
-            <a:avLst>
-              <a:gd name="adj" fmla="val 5000"/>
-            </a:avLst>
-          </a:prstGeom>
-          <a:solidFill>
-            <a:srgbClr val="FFFFFF"/>
-          </a:solidFill>
-          <a:ln w="9525">
-            <a:solidFill>
-              <a:srgbClr val="D5DDE0"/>
-            </a:solidFill>
-          </a:ln>
-          <a:effectLst>
-            <a:outerShdw blurRad="76200" dist="19050" dir="5400000" algn="t" rotWithShape="0">
-              <a:srgbClr val="000000">
-                <a:alpha val="16000"/>
-              </a:srgbClr>
-            </a:outerShdw>
-          </a:effectLst>
-        </p:spPr>
-        <p:style>
-          <a:lnRef idx="1">
-            <a:schemeClr val="accent1"/>
-          </a:lnRef>
-          <a:fillRef idx="3">
-            <a:schemeClr val="accent1"/>
-          </a:fillRef>
-          <a:effectRef idx="2">
-            <a:schemeClr val="accent1"/>
-          </a:effectRef>
-          <a:fontRef idx="minor">
-            <a:schemeClr val="lt1"/>
-          </a:fontRef>
-        </p:style>
-        <p:txBody>
-          <a:bodyPr rtlCol="0" anchor="ctr"/>
-          <a:lstStyle/>
-          <a:p>
-            <a:endParaRPr/>
-          </a:p>
-        </p:txBody>
-      </p:sp>
-      <p:pic>
-        <p:nvPicPr>
-          <p:cNvPr id="5" name="Picture 4" descr="car2.png"/>
-          <p:cNvPicPr>
-            <a:picLocks noChangeAspect="1"/>
-          </p:cNvPicPr>
-          <p:nvPr/>
-        </p:nvPicPr>
-        <p:blipFill>
-          <a:blip r:embed="rId3"/>
-          <a:stretch>
-            <a:fillRect/>
-          </a:stretch>
-        </p:blipFill>
-        <p:spPr>
-          <a:xfrm>
-            <a:off x="914400" y="1325880"/>
-            <a:ext cx="2994067" cy="4206240"/>
-          </a:xfrm>
-          <a:prstGeom prst="rect">
-            <a:avLst/>
-          </a:prstGeom>
-        </p:spPr>
-      </p:pic>
-      <p:sp>
-        <p:nvSpPr>
-          <p:cNvPr id="6" name="code-bg"/>
-          <p:cNvSpPr/>
-          <p:nvPr/>
-        </p:nvSpPr>
-        <p:spPr>
-          <a:xfrm>
-            <a:off x="5120640" y="1280160"/>
-            <a:ext cx="6519672" cy="2971800"/>
-          </a:xfrm>
-          <a:prstGeom prst="roundRect">
-            <a:avLst>
-              <a:gd name="adj" fmla="val 4000"/>
-            </a:avLst>
-          </a:prstGeom>
-          <a:solidFill>
-            <a:srgbClr val="1E1E2E"/>
-          </a:solidFill>
-          <a:ln>
-            <a:noFill/>
-          </a:ln>
-          <a:effectLst>
-            <a:outerShdw blurRad="76200" dist="19050" dir="5400000" algn="t" rotWithShape="0">
-              <a:srgbClr val="000000">
-                <a:alpha val="16000"/>
-              </a:srgbClr>
-            </a:outerShdw>
-          </a:effectLst>
-        </p:spPr>
-        <p:style>
-          <a:lnRef idx="1">
-            <a:schemeClr val="accent1"/>
-          </a:lnRef>
-          <a:fillRef idx="3">
-            <a:schemeClr val="accent1"/>
-          </a:fillRef>
-          <a:effectRef idx="2">
-            <a:schemeClr val="accent1"/>
-          </a:effectRef>
-          <a:fontRef idx="minor">
-            <a:schemeClr val="lt1"/>
-          </a:fontRef>
-        </p:style>
-        <p:txBody>
-          <a:bodyPr rtlCol="0" anchor="ctr"/>
-          <a:lstStyle/>
-          <a:p>
-            <a:endParaRPr/>
-          </a:p>
-        </p:txBody>
-      </p:sp>
-      <p:sp>
-        <p:nvSpPr>
-          <p:cNvPr id="7" name="code"/>
-          <p:cNvSpPr txBox="1"/>
-          <p:nvPr/>
-        </p:nvSpPr>
-        <p:spPr>
-          <a:xfrm>
-            <a:off x="5349240" y="1440180"/>
-            <a:ext cx="6062472" cy="2651760"/>
-          </a:xfrm>
-          <a:prstGeom prst="rect">
-            <a:avLst/>
-          </a:prstGeom>
-          <a:noFill/>
-        </p:spPr>
-        <p:txBody>
-          <a:bodyPr wrap="none" lIns="0" tIns="0" rIns="0" bIns="0" anchor="t">
-            <a:spAutoFit/>
-          </a:bodyPr>
-          <a:lstStyle/>
-          <a:p>
-            <a:pPr algn="l" rtl="0">
-              <a:lnSpc>
-                <a:spcPct val="108000"/>
-              </a:lnSpc>
-            </a:pPr>
-            <a:r>
-              <a:rPr sz="1600" b="1">
-                <a:solidFill>
-                  <a:srgbClr val="FF6B9A"/>
-                </a:solidFill>
-                <a:latin typeface="Consolas"/>
-              </a:rPr>
-              <a:t>lane</a:t>
-            </a:r>
-            <a:r>
-              <a:rPr sz="1600">
-                <a:solidFill>
-                  <a:srgbClr val="E6E6E6"/>
-                </a:solidFill>
-                <a:latin typeface="Consolas"/>
-              </a:rPr>
-              <a:t> = </a:t>
-            </a:r>
-            <a:r>
-              <a:rPr sz="1600">
-                <a:solidFill>
-                  <a:srgbClr val="FFD166"/>
-                </a:solidFill>
-                <a:latin typeface="Consolas"/>
-              </a:rPr>
-              <a:t>1</a:t>
-            </a:r>
-          </a:p>
-          <a:p>
-            <a:pPr algn="l" rtl="0">
-              <a:lnSpc>
-                <a:spcPct val="108000"/>
-              </a:lnSpc>
-            </a:pPr>
-            <a:r>
-              <a:rPr sz="1600">
-                <a:latin typeface="Consolas"/>
-              </a:rPr>
-              <a:t> </a:t>
-            </a:r>
-          </a:p>
-          <a:p>
-            <a:pPr algn="l" rtl="0">
-              <a:lnSpc>
-                <a:spcPct val="108000"/>
-              </a:lnSpc>
-            </a:pPr>
-            <a:r>
-              <a:rPr sz="1600">
-                <a:solidFill>
-                  <a:srgbClr val="FF9F1C"/>
-                </a:solidFill>
-                <a:latin typeface="Consolas"/>
-              </a:rPr>
-              <a:t>def</a:t>
-            </a:r>
-            <a:r>
-              <a:rPr sz="1600">
-                <a:solidFill>
-                  <a:srgbClr val="E6E6E6"/>
-                </a:solidFill>
-                <a:latin typeface="Consolas"/>
-              </a:rPr>
-              <a:t> </a:t>
-            </a:r>
-            <a:r>
-              <a:rPr sz="1600">
-                <a:solidFill>
-                  <a:srgbClr val="7FDBFF"/>
-                </a:solidFill>
-                <a:latin typeface="Consolas"/>
-              </a:rPr>
+          <p:cNvPr id="19" name="Content Placeholder 18">
+            <a:extLst>
+              <a:ext uri="{FF2B5EF4-FFF2-40B4-BE49-F238E27FC236}">
+                <a16:creationId xmlns:a16="http://schemas.microsoft.com/office/drawing/2014/main" id="{EEB54EAF-A6C4-E37B-BCE1-03C5316AB25A}"/>
+              </a:ext>
+            </a:extLst>
+          </p:cNvPr>
+          <p:cNvSpPr>
+            <a:spLocks noGrp="1"/>
+          </p:cNvSpPr>
+          <p:nvPr>
+            <p:ph idx="1"/>
+          </p:nvPr>
+        </p:nvSpPr>
+        <p:spPr>
+          <a:xfrm>
+            <a:off x="457200" y="1600200"/>
+            <a:ext cx="11183112" cy="4525963"/>
+          </a:xfrm>
+        </p:spPr>
+        <p:txBody>
+          <a:bodyPr/>
+          <a:lstStyle/>
+          <a:p>
+            <a:pPr marL="0" indent="0" algn="l">
+              <a:buNone/>
+            </a:pPr>
+            <a:r>
+              <a:rPr lang="en-US" dirty="0" err="1"/>
+              <a:t>screen.onkey</a:t>
+            </a:r>
+            <a:r>
+              <a:rPr lang="en-US" dirty="0"/>
+              <a:t>(</a:t>
+            </a:r>
+            <a:r>
+              <a:rPr lang="en-US" dirty="0" err="1"/>
               <a:t>move_left</a:t>
             </a:r>
             <a:r>
-              <a:rPr sz="1600">
-                <a:solidFill>
-                  <a:srgbClr val="E6E6E6"/>
-                </a:solidFill>
-                <a:latin typeface="Consolas"/>
-              </a:rPr>
-              <a:t>():</a:t>
-            </a:r>
-          </a:p>
-          <a:p>
-            <a:pPr algn="l" rtl="0">
-              <a:lnSpc>
-                <a:spcPct val="108000"/>
-              </a:lnSpc>
-            </a:pPr>
-            <a:r>
-              <a:rPr sz="1600">
-                <a:solidFill>
-                  <a:srgbClr val="E6E6E6"/>
-                </a:solidFill>
-                <a:latin typeface="Consolas"/>
-              </a:rPr>
-              <a:t>    </a:t>
-            </a:r>
-            <a:r>
-              <a:rPr sz="1600">
-                <a:solidFill>
-                  <a:srgbClr val="FF9F1C"/>
-                </a:solidFill>
-                <a:latin typeface="Consolas"/>
-              </a:rPr>
-              <a:t>global</a:t>
-            </a:r>
-            <a:r>
-              <a:rPr sz="1600">
-                <a:solidFill>
-                  <a:srgbClr val="E6E6E6"/>
-                </a:solidFill>
-                <a:latin typeface="Consolas"/>
-              </a:rPr>
-              <a:t> </a:t>
-            </a:r>
-            <a:r>
-              <a:rPr sz="1600" b="1">
-                <a:solidFill>
-                  <a:srgbClr val="FF6B9A"/>
-                </a:solidFill>
-                <a:latin typeface="Consolas"/>
-              </a:rPr>
-              <a:t>lane</a:t>
-            </a:r>
-          </a:p>
-          <a:p>
-            <a:pPr algn="l" rtl="0">
-              <a:lnSpc>
-                <a:spcPct val="108000"/>
-              </a:lnSpc>
-            </a:pPr>
-            <a:r>
-              <a:rPr sz="1600">
-                <a:solidFill>
-                  <a:srgbClr val="E6E6E6"/>
-                </a:solidFill>
-                <a:latin typeface="Consolas"/>
-              </a:rPr>
-              <a:t>    </a:t>
-            </a:r>
-            <a:r>
-              <a:rPr sz="1600">
-                <a:solidFill>
-                  <a:srgbClr val="FF9F1C"/>
-                </a:solidFill>
-                <a:latin typeface="Consolas"/>
-              </a:rPr>
-              <a:t>if</a:t>
-            </a:r>
-            <a:r>
-              <a:rPr sz="1600">
-                <a:solidFill>
-                  <a:srgbClr val="E6E6E6"/>
-                </a:solidFill>
-                <a:latin typeface="Consolas"/>
-              </a:rPr>
-              <a:t> </a:t>
-            </a:r>
-            <a:r>
-              <a:rPr sz="1600" b="1">
-                <a:solidFill>
-                  <a:srgbClr val="FF6B9A"/>
-                </a:solidFill>
-                <a:latin typeface="Consolas"/>
-              </a:rPr>
-              <a:t>lane</a:t>
-            </a:r>
-            <a:r>
-              <a:rPr sz="1600">
-                <a:solidFill>
-                  <a:srgbClr val="E6E6E6"/>
-                </a:solidFill>
-                <a:latin typeface="Consolas"/>
-              </a:rPr>
-              <a:t> &gt; </a:t>
-            </a:r>
-            <a:r>
-              <a:rPr sz="1600">
-                <a:solidFill>
-                  <a:srgbClr val="FFD166"/>
-                </a:solidFill>
-                <a:latin typeface="Consolas"/>
-              </a:rPr>
-              <a:t>0</a:t>
-            </a:r>
-            <a:r>
-              <a:rPr sz="1600">
-                <a:solidFill>
-                  <a:srgbClr val="E6E6E6"/>
-                </a:solidFill>
-                <a:latin typeface="Consolas"/>
-              </a:rPr>
-              <a:t>:</a:t>
-            </a:r>
-          </a:p>
-          <a:p>
-            <a:pPr algn="l" rtl="0">
-              <a:lnSpc>
-                <a:spcPct val="108000"/>
-              </a:lnSpc>
-            </a:pPr>
-            <a:r>
-              <a:rPr sz="1600">
-                <a:solidFill>
-                  <a:srgbClr val="E6E6E6"/>
-                </a:solidFill>
-                <a:latin typeface="Consolas"/>
-              </a:rPr>
-              <a:t>        </a:t>
-            </a:r>
-            <a:r>
-              <a:rPr sz="1600" b="1">
-                <a:solidFill>
-                  <a:srgbClr val="FF6B9A"/>
-                </a:solidFill>
-                <a:latin typeface="Consolas"/>
-              </a:rPr>
-              <a:t>lane</a:t>
-            </a:r>
-            <a:r>
-              <a:rPr sz="1600">
-                <a:solidFill>
-                  <a:srgbClr val="E6E6E6"/>
-                </a:solidFill>
-                <a:latin typeface="Consolas"/>
-              </a:rPr>
-              <a:t> = </a:t>
-            </a:r>
-            <a:r>
-              <a:rPr sz="1600" b="1">
-                <a:solidFill>
-                  <a:srgbClr val="FF6B9A"/>
-                </a:solidFill>
-                <a:latin typeface="Consolas"/>
-              </a:rPr>
-              <a:t>lane</a:t>
-            </a:r>
-            <a:r>
-              <a:rPr sz="1600">
-                <a:solidFill>
-                  <a:srgbClr val="E6E6E6"/>
-                </a:solidFill>
-                <a:latin typeface="Consolas"/>
-              </a:rPr>
-              <a:t> - </a:t>
-            </a:r>
-            <a:r>
-              <a:rPr sz="1600">
-                <a:solidFill>
-                  <a:srgbClr val="FFD166"/>
-                </a:solidFill>
-                <a:latin typeface="Consolas"/>
-              </a:rPr>
-              <a:t>1</a:t>
-            </a:r>
-          </a:p>
-          <a:p>
-            <a:pPr algn="l" rtl="0">
-              <a:lnSpc>
-                <a:spcPct val="108000"/>
-              </a:lnSpc>
-            </a:pPr>
-            <a:r>
-              <a:rPr sz="1600">
-                <a:solidFill>
-                  <a:srgbClr val="E6E6E6"/>
-                </a:solidFill>
-                <a:latin typeface="Consolas"/>
-              </a:rPr>
-              <a:t>        player.</a:t>
-            </a:r>
-            <a:r>
-              <a:rPr sz="1600">
-                <a:solidFill>
-                  <a:srgbClr val="7FDBFF"/>
-                </a:solidFill>
-                <a:latin typeface="Consolas"/>
-              </a:rPr>
-              <a:t>setx</a:t>
-            </a:r>
-            <a:r>
-              <a:rPr sz="1600">
-                <a:solidFill>
-                  <a:srgbClr val="E6E6E6"/>
-                </a:solidFill>
-                <a:latin typeface="Consolas"/>
-              </a:rPr>
-              <a:t>(LANES[</a:t>
-            </a:r>
-            <a:r>
-              <a:rPr sz="1600" b="1">
-                <a:solidFill>
-                  <a:srgbClr val="FF6B9A"/>
-                </a:solidFill>
-                <a:latin typeface="Consolas"/>
-              </a:rPr>
-              <a:t>lane</a:t>
-            </a:r>
-            <a:r>
-              <a:rPr sz="1600">
-                <a:solidFill>
-                  <a:srgbClr val="E6E6E6"/>
-                </a:solidFill>
-                <a:latin typeface="Consolas"/>
-              </a:rPr>
-              <a:t>])</a:t>
-            </a:r>
-          </a:p>
-          <a:p>
-            <a:pPr algn="l" rtl="0">
-              <a:lnSpc>
-                <a:spcPct val="108000"/>
-              </a:lnSpc>
-            </a:pPr>
-            <a:r>
-              <a:rPr sz="1600">
-                <a:latin typeface="Consolas"/>
-              </a:rPr>
-              <a:t> </a:t>
-            </a:r>
-          </a:p>
-          <a:p>
-            <a:pPr algn="l" rtl="0">
-              <a:lnSpc>
-                <a:spcPct val="108000"/>
-              </a:lnSpc>
-            </a:pPr>
-            <a:r>
-              <a:rPr sz="1600">
-                <a:solidFill>
-                  <a:srgbClr val="E6E6E6"/>
-                </a:solidFill>
-                <a:latin typeface="Consolas"/>
-              </a:rPr>
-              <a:t>screen.</a:t>
-            </a:r>
-            <a:r>
-              <a:rPr sz="1600">
-                <a:solidFill>
-                  <a:srgbClr val="7FDBFF"/>
-                </a:solidFill>
-                <a:latin typeface="Consolas"/>
-              </a:rPr>
-              <a:t>onkey</a:t>
-            </a:r>
-            <a:r>
-              <a:rPr sz="1600">
-                <a:solidFill>
-                  <a:srgbClr val="E6E6E6"/>
-                </a:solidFill>
-                <a:latin typeface="Consolas"/>
-              </a:rPr>
-              <a:t>(move_left, </a:t>
-            </a:r>
-            <a:r>
-              <a:rPr sz="1600">
-                <a:solidFill>
-                  <a:srgbClr val="A6E22E"/>
-                </a:solidFill>
-                <a:latin typeface="Consolas"/>
-              </a:rPr>
-              <a:t>"Left"</a:t>
-            </a:r>
-            <a:r>
-              <a:rPr sz="1600">
-                <a:solidFill>
-                  <a:srgbClr val="E6E6E6"/>
-                </a:solidFill>
-                <a:latin typeface="Consolas"/>
-              </a:rPr>
-              <a:t>)</a:t>
-            </a:r>
-          </a:p>
-        </p:txBody>
-      </p:sp>
-      <p:sp>
-        <p:nvSpPr>
-          <p:cNvPr id="8" name="Rounded Rectangle 7"/>
-          <p:cNvSpPr/>
-          <p:nvPr/>
-        </p:nvSpPr>
-        <p:spPr>
-          <a:xfrm>
-            <a:off x="5120640" y="4480560"/>
-            <a:ext cx="2057400" cy="640080"/>
-          </a:xfrm>
-          <a:prstGeom prst="roundRect">
-            <a:avLst>
-              <a:gd name="adj" fmla="val 15000"/>
-            </a:avLst>
-          </a:prstGeom>
-          <a:solidFill>
-            <a:srgbClr val="E9F7EF"/>
-          </a:solidFill>
-          <a:ln>
-            <a:noFill/>
-          </a:ln>
-        </p:spPr>
-        <p:style>
-          <a:lnRef idx="1">
-            <a:schemeClr val="accent1"/>
-          </a:lnRef>
-          <a:fillRef idx="3">
-            <a:schemeClr val="accent1"/>
-          </a:fillRef>
-          <a:effectRef idx="2">
-            <a:schemeClr val="accent1"/>
-          </a:effectRef>
-          <a:fontRef idx="minor">
-            <a:schemeClr val="lt1"/>
-          </a:fontRef>
-        </p:style>
-        <p:txBody>
-          <a:bodyPr rtlCol="0" anchor="ctr"/>
-          <a:lstStyle/>
-          <a:p>
-            <a:endParaRPr/>
-          </a:p>
-        </p:txBody>
-      </p:sp>
-      <p:sp>
-        <p:nvSpPr>
-          <p:cNvPr id="9" name="TextBox 8"/>
-          <p:cNvSpPr txBox="1"/>
-          <p:nvPr/>
-        </p:nvSpPr>
-        <p:spPr>
-          <a:xfrm>
-            <a:off x="5120640" y="4480560"/>
-            <a:ext cx="2057400" cy="640080"/>
-          </a:xfrm>
-          <a:prstGeom prst="rect">
-            <a:avLst/>
-          </a:prstGeom>
-          <a:noFill/>
-        </p:spPr>
-        <p:txBody>
-          <a:bodyPr wrap="square" lIns="45720" rIns="45720" anchor="ctr">
-            <a:spAutoFit/>
-          </a:bodyPr>
-          <a:lstStyle/>
-          <a:p>
-            <a:pPr algn="ctr" rtl="0">
-              <a:spcAft>
-                <a:spcPts val="400"/>
-              </a:spcAft>
-            </a:pPr>
-            <a:r>
-              <a:rPr sz="1500" b="1" i="0">
-                <a:solidFill>
-                  <a:srgbClr val="2D9F5C"/>
-                </a:solidFill>
-                <a:latin typeface="Consolas"/>
-              </a:rPr>
-              <a:t>lane = 0</a:t>
-            </a:r>
-          </a:p>
-        </p:txBody>
-      </p:sp>
-      <p:sp>
-        <p:nvSpPr>
-          <p:cNvPr id="10" name="Rounded Rectangle 9"/>
-          <p:cNvSpPr/>
-          <p:nvPr/>
-        </p:nvSpPr>
-        <p:spPr>
-          <a:xfrm>
-            <a:off x="7342631" y="4480560"/>
-            <a:ext cx="2057400" cy="640080"/>
-          </a:xfrm>
-          <a:prstGeom prst="roundRect">
-            <a:avLst>
-              <a:gd name="adj" fmla="val 15000"/>
-            </a:avLst>
-          </a:prstGeom>
-          <a:solidFill>
-            <a:srgbClr val="EF476F"/>
-          </a:solidFill>
-          <a:ln>
-            <a:noFill/>
-          </a:ln>
-        </p:spPr>
-        <p:style>
-          <a:lnRef idx="1">
-            <a:schemeClr val="accent1"/>
-          </a:lnRef>
-          <a:fillRef idx="3">
-            <a:schemeClr val="accent1"/>
-          </a:fillRef>
-          <a:effectRef idx="2">
-            <a:schemeClr val="accent1"/>
-          </a:effectRef>
-          <a:fontRef idx="minor">
-            <a:schemeClr val="lt1"/>
-          </a:fontRef>
-        </p:style>
-        <p:txBody>
-          <a:bodyPr rtlCol="0" anchor="ctr"/>
-          <a:lstStyle/>
-          <a:p>
-            <a:endParaRPr/>
-          </a:p>
-        </p:txBody>
-      </p:sp>
-      <p:sp>
-        <p:nvSpPr>
-          <p:cNvPr id="11" name="TextBox 10"/>
-          <p:cNvSpPr txBox="1"/>
-          <p:nvPr/>
-        </p:nvSpPr>
-        <p:spPr>
-          <a:xfrm>
-            <a:off x="7342631" y="4480560"/>
-            <a:ext cx="2057400" cy="640080"/>
-          </a:xfrm>
-          <a:prstGeom prst="rect">
-            <a:avLst/>
-          </a:prstGeom>
-          <a:noFill/>
-        </p:spPr>
-        <p:txBody>
-          <a:bodyPr wrap="square" lIns="45720" rIns="45720" anchor="ctr">
-            <a:spAutoFit/>
-          </a:bodyPr>
-          <a:lstStyle/>
-          <a:p>
-            <a:pPr algn="ctr" rtl="0">
-              <a:spcAft>
-                <a:spcPts val="400"/>
-              </a:spcAft>
-            </a:pPr>
-            <a:r>
-              <a:rPr sz="1500" b="1" i="0">
-                <a:solidFill>
-                  <a:srgbClr val="FFFFFF"/>
-                </a:solidFill>
-                <a:latin typeface="Consolas"/>
-              </a:rPr>
-              <a:t>lane = 1</a:t>
-            </a:r>
-          </a:p>
-        </p:txBody>
-      </p:sp>
-      <p:sp>
-        <p:nvSpPr>
-          <p:cNvPr id="12" name="Rounded Rectangle 11"/>
-          <p:cNvSpPr/>
-          <p:nvPr/>
-        </p:nvSpPr>
-        <p:spPr>
-          <a:xfrm>
-            <a:off x="9564624" y="4480560"/>
-            <a:ext cx="2057400" cy="640080"/>
-          </a:xfrm>
-          <a:prstGeom prst="roundRect">
-            <a:avLst>
-              <a:gd name="adj" fmla="val 15000"/>
-            </a:avLst>
-          </a:prstGeom>
-          <a:solidFill>
-            <a:srgbClr val="E9F7EF"/>
-          </a:solidFill>
-          <a:ln>
-            <a:noFill/>
-          </a:ln>
-        </p:spPr>
-        <p:style>
-          <a:lnRef idx="1">
-            <a:schemeClr val="accent1"/>
-          </a:lnRef>
-          <a:fillRef idx="3">
-            <a:schemeClr val="accent1"/>
-          </a:fillRef>
-          <a:effectRef idx="2">
-            <a:schemeClr val="accent1"/>
-          </a:effectRef>
-          <a:fontRef idx="minor">
-            <a:schemeClr val="lt1"/>
-          </a:fontRef>
-        </p:style>
-        <p:txBody>
-          <a:bodyPr rtlCol="0" anchor="ctr"/>
-          <a:lstStyle/>
-          <a:p>
-            <a:endParaRPr/>
-          </a:p>
-        </p:txBody>
-      </p:sp>
-      <p:sp>
-        <p:nvSpPr>
-          <p:cNvPr id="13" name="TextBox 12"/>
-          <p:cNvSpPr txBox="1"/>
-          <p:nvPr/>
-        </p:nvSpPr>
-        <p:spPr>
-          <a:xfrm>
-            <a:off x="9564624" y="4480560"/>
-            <a:ext cx="2057400" cy="640080"/>
-          </a:xfrm>
-          <a:prstGeom prst="rect">
-            <a:avLst/>
-          </a:prstGeom>
-          <a:noFill/>
-        </p:spPr>
-        <p:txBody>
-          <a:bodyPr wrap="square" lIns="45720" rIns="45720" anchor="ctr">
-            <a:spAutoFit/>
-          </a:bodyPr>
-          <a:lstStyle/>
-          <a:p>
-            <a:pPr algn="ctr" rtl="0">
-              <a:spcAft>
-                <a:spcPts val="400"/>
-              </a:spcAft>
-            </a:pPr>
-            <a:r>
-              <a:rPr sz="1500" b="1" i="0">
-                <a:solidFill>
-                  <a:srgbClr val="2D9F5C"/>
-                </a:solidFill>
-                <a:latin typeface="Consolas"/>
-              </a:rPr>
-              <a:t>lane = 2</a:t>
-            </a:r>
-          </a:p>
-        </p:txBody>
-      </p:sp>
-      <p:cxnSp>
-        <p:nvCxnSpPr>
-          <p:cNvPr id="14" name="Connector 13"/>
-          <p:cNvCxnSpPr/>
-          <p:nvPr/>
-        </p:nvCxnSpPr>
-        <p:spPr>
-          <a:xfrm flipH="1">
-            <a:off x="6172200" y="5349240"/>
-            <a:ext cx="914400" cy="0"/>
-          </a:xfrm>
-          <a:prstGeom prst="line">
-            <a:avLst/>
-          </a:prstGeom>
-          <a:ln w="31750">
-            <a:solidFill>
-              <a:srgbClr val="EF476F"/>
-            </a:solidFill>
-            <a:tailEnd type="triangle" w="med" len="med"/>
-          </a:ln>
-        </p:spPr>
-        <p:style>
-          <a:lnRef idx="2">
-            <a:schemeClr val="accent1"/>
-          </a:lnRef>
-          <a:fillRef idx="0">
-            <a:schemeClr val="accent1"/>
-          </a:fillRef>
-          <a:effectRef idx="1">
-            <a:schemeClr val="accent1"/>
-          </a:effectRef>
-          <a:fontRef idx="minor">
-            <a:schemeClr val="tx1"/>
-          </a:fontRef>
-        </p:style>
-      </p:cxnSp>
-      <p:cxnSp>
-        <p:nvCxnSpPr>
-          <p:cNvPr id="15" name="Connector 14"/>
-          <p:cNvCxnSpPr/>
-          <p:nvPr/>
-        </p:nvCxnSpPr>
-        <p:spPr>
-          <a:xfrm>
-            <a:off x="7863840" y="5349240"/>
-            <a:ext cx="914400" cy="0"/>
-          </a:xfrm>
-          <a:prstGeom prst="line">
-            <a:avLst/>
-          </a:prstGeom>
-          <a:ln w="31750">
-            <a:solidFill>
-              <a:srgbClr val="EF476F"/>
-            </a:solidFill>
-            <a:tailEnd type="triangle" w="med" len="med"/>
-          </a:ln>
-        </p:spPr>
-        <p:style>
-          <a:lnRef idx="2">
-            <a:schemeClr val="accent1"/>
-          </a:lnRef>
-          <a:fillRef idx="0">
-            <a:schemeClr val="accent1"/>
-          </a:fillRef>
-          <a:effectRef idx="1">
-            <a:schemeClr val="accent1"/>
-          </a:effectRef>
-          <a:fontRef idx="minor">
-            <a:schemeClr val="tx1"/>
-          </a:fontRef>
-        </p:style>
-      </p:cxnSp>
-      <p:sp>
-        <p:nvSpPr>
-          <p:cNvPr id="16" name="TextBox 15"/>
-          <p:cNvSpPr txBox="1"/>
-          <p:nvPr/>
-        </p:nvSpPr>
-        <p:spPr>
-          <a:xfrm>
-            <a:off x="5120640" y="5440680"/>
-            <a:ext cx="6519672" cy="457200"/>
-          </a:xfrm>
-          <a:prstGeom prst="rect">
-            <a:avLst/>
-          </a:prstGeom>
-          <a:noFill/>
-        </p:spPr>
-        <p:txBody>
-          <a:bodyPr wrap="square" lIns="45720" rIns="45720" anchor="t">
-            <a:spAutoFit/>
-          </a:bodyPr>
-          <a:lstStyle/>
-          <a:p>
-            <a:pPr algn="ctr" rtl="1">
-              <a:spcAft>
-                <a:spcPts val="400"/>
-              </a:spcAft>
-            </a:pPr>
-            <a:r>
-              <a:rPr sz="1500" b="1" i="0">
-                <a:solidFill>
-                  <a:srgbClr val="5F6F78"/>
-                </a:solidFill>
-                <a:latin typeface="Consolas"/>
-              </a:rPr>
-              <a:t>‎lane‎</a:t>
-            </a:r>
-            <a:r>
-              <a:rPr lang="he-IL" sz="1500" b="0" i="0">
-                <a:solidFill>
-                  <a:srgbClr val="5F6F78"/>
-                </a:solidFill>
-                <a:latin typeface="Arial"/>
-                <a:cs typeface="Arial"/>
-              </a:rPr>
-              <a:t> הוא האינדקס ברשימה. ה-if שומר שלא ניסע מחוץ לכביש</a:t>
-            </a:r>
-          </a:p>
-        </p:txBody>
-      </p:sp>
-      <p:sp>
-        <p:nvSpPr>
-          <p:cNvPr id="17" name="file-tag"/>
-          <p:cNvSpPr/>
-          <p:nvPr/>
-        </p:nvSpPr>
-        <p:spPr>
-          <a:xfrm>
-            <a:off x="1325880" y="5760720"/>
-            <a:ext cx="2377440" cy="502920"/>
-          </a:xfrm>
-          <a:prstGeom prst="roundRect">
-            <a:avLst>
-              <a:gd name="adj" fmla="val 50000"/>
-            </a:avLst>
-          </a:prstGeom>
-          <a:solidFill>
-            <a:srgbClr val="FF9F1C"/>
-          </a:solidFill>
-          <a:ln>
-            <a:noFill/>
-          </a:ln>
-        </p:spPr>
-        <p:style>
-          <a:lnRef idx="1">
-            <a:schemeClr val="accent1"/>
-          </a:lnRef>
-          <a:fillRef idx="3">
-            <a:schemeClr val="accent1"/>
-          </a:fillRef>
-          <a:effectRef idx="2">
-            <a:schemeClr val="accent1"/>
-          </a:effectRef>
-          <a:fontRef idx="minor">
-            <a:schemeClr val="lt1"/>
-          </a:fontRef>
-        </p:style>
-        <p:txBody>
-          <a:bodyPr wrap="square" lIns="0" tIns="0" rIns="0" bIns="0" rtlCol="0" anchor="ctr"/>
-          <a:lstStyle/>
-          <a:p>
-            <a:pPr algn="ctr" rtl="0">
-              <a:spcAft>
-                <a:spcPts val="0"/>
-              </a:spcAft>
-            </a:pPr>
-            <a:r>
-              <a:rPr sz="1700" b="1" i="0">
-                <a:solidFill>
-                  <a:srgbClr val="FFFFFF"/>
-                </a:solidFill>
-                <a:latin typeface="Consolas"/>
-              </a:rPr>
-              <a:t>&lt;/&gt;  </a:t>
-            </a:r>
-            <a:r>
-              <a:rPr sz="1700" b="1" i="0">
-                <a:solidFill>
-                  <a:srgbClr val="FFFFFF"/>
-                </a:solidFill>
-                <a:latin typeface="Arial"/>
-              </a:rPr>
-              <a:t>car2.py</a:t>
+              <a:rPr lang="en-US" dirty="0"/>
+              <a:t>, “left”)</a:t>
+            </a:r>
+          </a:p>
+          <a:p>
+            <a:pPr marL="0" indent="0" algn="l">
+              <a:buNone/>
+            </a:pPr>
+            <a:endParaRPr lang="he-IL" dirty="0"/>
+          </a:p>
+          <a:p>
+            <a:pPr algn="r" rtl="1"/>
+            <a:r>
+              <a:rPr lang="he-IL" dirty="0"/>
+              <a:t>קושר פונקציה ללחיצה על מקש במקלדת</a:t>
+            </a:r>
+          </a:p>
+          <a:p>
+            <a:pPr algn="r" rtl="1"/>
+            <a:r>
+              <a:rPr lang="he-IL" dirty="0"/>
+              <a:t>הפקודה מורה לתוכנית להריץ את הפונקציה `</a:t>
+            </a:r>
+            <a:r>
+              <a:rPr lang="en-US" dirty="0" err="1"/>
+              <a:t>move_left</a:t>
+            </a:r>
+            <a:r>
+              <a:rPr lang="en-US" dirty="0"/>
+              <a:t>` </a:t>
+            </a:r>
+            <a:r>
+              <a:rPr lang="he-IL" dirty="0"/>
+              <a:t> בכל פעם שהמשתמש לוחץ על מקש החץ השמאלי במקלדת</a:t>
             </a:r>
           </a:p>
         </p:txBody>
       </p:sp>
     </p:spTree>
+    <p:extLst>
+      <p:ext uri="{BB962C8B-B14F-4D97-AF65-F5344CB8AC3E}">
+        <p14:creationId xmlns:p14="http://schemas.microsoft.com/office/powerpoint/2010/main" val="1176140310"/>
+      </p:ext>
+    </p:extLst>
   </p:cSld>
   <p:clrMapOvr>
     <a:masterClrMapping/>
@@ -24474,7 +23655,7 @@
                 <a:latin typeface="Arial"/>
                 <a:cs typeface="Arial"/>
               </a:rPr>
-              <a:t>שלב 3: לולאת המשחק - הכביש זז!</a:t>
+              <a:t>שלב 2: נוהגים עם החיצים</a:t>
             </a:r>
           </a:p>
         </p:txBody>
@@ -24513,7 +23694,7 @@
                 </a:solidFill>
                 <a:latin typeface="Arial"/>
               </a:rPr>
-              <a:t>24</a:t>
+              <a:t>23</a:t>
             </a:r>
           </a:p>
         </p:txBody>
@@ -24574,7 +23755,7 @@
       </p:sp>
       <p:pic>
         <p:nvPicPr>
-          <p:cNvPr id="5" name="Picture 4" descr="car3.png"/>
+          <p:cNvPr id="5" name="Picture 4" descr="car2.png"/>
           <p:cNvPicPr>
             <a:picLocks noChangeAspect="1"/>
           </p:cNvPicPr>
@@ -24604,8 +23785,8 @@
         </p:nvSpPr>
         <p:spPr>
           <a:xfrm>
-            <a:off x="5120640" y="1280160"/>
-            <a:ext cx="6519672" cy="1828800"/>
+            <a:off x="5102352" y="1325880"/>
+            <a:ext cx="6519672" cy="2971800"/>
           </a:xfrm>
           <a:prstGeom prst="roundRect">
             <a:avLst>
@@ -24656,8 +23837,8 @@
         </p:nvSpPr>
         <p:spPr>
           <a:xfrm>
-            <a:off x="5349240" y="1440180"/>
-            <a:ext cx="6062472" cy="1508760"/>
+            <a:off x="5349240" y="1342723"/>
+            <a:ext cx="4514056" cy="2974469"/>
           </a:xfrm>
           <a:prstGeom prst="rect">
             <a:avLst/>
@@ -24676,40 +23857,31 @@
               </a:lnSpc>
             </a:pPr>
             <a:r>
-              <a:rPr sz="1700">
-                <a:solidFill>
-                  <a:srgbClr val="FF9F1C"/>
-                </a:solidFill>
-                <a:latin typeface="Consolas"/>
-              </a:rPr>
-              <a:t>def</a:t>
-            </a:r>
-            <a:r>
-              <a:rPr sz="1700">
+              <a:rPr sz="2000" b="1" dirty="0">
+                <a:solidFill>
+                  <a:srgbClr val="FF6B9A"/>
+                </a:solidFill>
+                <a:latin typeface="Consolas"/>
+              </a:rPr>
+              <a:t>lane</a:t>
+            </a:r>
+            <a:r>
+              <a:rPr sz="2000" dirty="0">
                 <a:solidFill>
                   <a:srgbClr val="E6E6E6"/>
                 </a:solidFill>
                 <a:latin typeface="Consolas"/>
               </a:rPr>
-              <a:t> </a:t>
-            </a:r>
-            <a:r>
-              <a:rPr sz="1700" b="1">
-                <a:solidFill>
-                  <a:srgbClr val="FF6B9A"/>
-                </a:solidFill>
-                <a:latin typeface="Consolas"/>
-              </a:rPr>
-              <a:t>game_loop</a:t>
-            </a:r>
-            <a:r>
-              <a:rPr sz="1700">
-                <a:solidFill>
-                  <a:srgbClr val="E6E6E6"/>
-                </a:solidFill>
-                <a:latin typeface="Consolas"/>
-              </a:rPr>
-              <a:t>():</a:t>
+              <a:t> = </a:t>
+            </a:r>
+            <a:r>
+              <a:rPr sz="2000" dirty="0">
+                <a:solidFill>
+                  <a:srgbClr val="FFD166"/>
+                </a:solidFill>
+                <a:latin typeface="Consolas"/>
+              </a:rPr>
+              <a:t>1</a:t>
             </a:r>
           </a:p>
           <a:p>
@@ -24719,31 +23891,10 @@
               </a:lnSpc>
             </a:pPr>
             <a:r>
-              <a:rPr sz="1700">
-                <a:solidFill>
-                  <a:srgbClr val="E6E6E6"/>
-                </a:solidFill>
-                <a:latin typeface="Consolas"/>
-              </a:rPr>
-              <a:t>    </a:t>
-            </a:r>
-            <a:r>
-              <a:rPr sz="1700">
-                <a:solidFill>
-                  <a:srgbClr val="7FDBFF"/>
-                </a:solidFill>
-                <a:latin typeface="Consolas"/>
-              </a:rPr>
-              <a:t>move_lines</a:t>
-            </a:r>
-            <a:r>
-              <a:rPr sz="1700">
-                <a:solidFill>
-                  <a:srgbClr val="E6E6E6"/>
-                </a:solidFill>
-                <a:latin typeface="Consolas"/>
-              </a:rPr>
-              <a:t>()</a:t>
+              <a:rPr sz="2000" dirty="0">
+                <a:latin typeface="Consolas"/>
+              </a:rPr>
+              <a:t> </a:t>
             </a:r>
           </a:p>
           <a:p>
@@ -24753,31 +23904,40 @@
               </a:lnSpc>
             </a:pPr>
             <a:r>
-              <a:rPr sz="1700">
+              <a:rPr sz="2000" dirty="0">
+                <a:solidFill>
+                  <a:srgbClr val="FF9F1C"/>
+                </a:solidFill>
+                <a:latin typeface="Consolas"/>
+              </a:rPr>
+              <a:t>def</a:t>
+            </a:r>
+            <a:r>
+              <a:rPr sz="2000" dirty="0">
                 <a:solidFill>
                   <a:srgbClr val="E6E6E6"/>
                 </a:solidFill>
                 <a:latin typeface="Consolas"/>
               </a:rPr>
-              <a:t>    </a:t>
-            </a:r>
-            <a:r>
-              <a:rPr sz="1700">
+              <a:t> </a:t>
+            </a:r>
+            <a:r>
+              <a:rPr sz="2000" dirty="0" err="1">
                 <a:solidFill>
                   <a:srgbClr val="7FDBFF"/>
                 </a:solidFill>
                 <a:latin typeface="Consolas"/>
               </a:rPr>
-              <a:t>move_enemy</a:t>
-            </a:r>
-            <a:r>
-              <a:rPr sz="1700">
+              <a:t>move_left</a:t>
+            </a:r>
+            <a:r>
+              <a:rPr sz="2000" dirty="0">
                 <a:solidFill>
                   <a:srgbClr val="E6E6E6"/>
                 </a:solidFill>
                 <a:latin typeface="Consolas"/>
               </a:rPr>
-              <a:t>()</a:t>
+              <a:t>():</a:t>
             </a:r>
           </a:p>
           <a:p>
@@ -24787,31 +23947,40 @@
               </a:lnSpc>
             </a:pPr>
             <a:r>
-              <a:rPr sz="1700">
+              <a:rPr sz="2000" dirty="0">
                 <a:solidFill>
                   <a:srgbClr val="E6E6E6"/>
                 </a:solidFill>
                 <a:latin typeface="Consolas"/>
               </a:rPr>
-              <a:t>    screen.</a:t>
-            </a:r>
-            <a:r>
-              <a:rPr sz="1700">
-                <a:solidFill>
-                  <a:srgbClr val="7FDBFF"/>
-                </a:solidFill>
-                <a:latin typeface="Consolas"/>
-              </a:rPr>
-              <a:t>update</a:t>
-            </a:r>
-            <a:r>
-              <a:rPr sz="1700">
+              <a:t>    </a:t>
+            </a:r>
+            <a:r>
+              <a:rPr sz="2000" dirty="0">
+                <a:solidFill>
+                  <a:srgbClr val="FF9F1C"/>
+                </a:solidFill>
+                <a:latin typeface="Consolas"/>
+              </a:rPr>
+              <a:t>global</a:t>
+            </a:r>
+            <a:r>
+              <a:rPr sz="2000" dirty="0">
                 <a:solidFill>
                   <a:srgbClr val="E6E6E6"/>
                 </a:solidFill>
                 <a:latin typeface="Consolas"/>
               </a:rPr>
-              <a:t>()</a:t>
+              <a:t> </a:t>
+            </a:r>
+            <a:r>
+              <a:rPr sz="2000" b="1" dirty="0">
+                <a:solidFill>
+                  <a:srgbClr val="FF6B9A"/>
+                </a:solidFill>
+                <a:latin typeface="Consolas"/>
+              </a:rPr>
+              <a:t>lane</a:t>
             </a:r>
           </a:p>
           <a:p>
@@ -24821,61 +23990,266 @@
               </a:lnSpc>
             </a:pPr>
             <a:r>
-              <a:rPr sz="1700">
+              <a:rPr sz="2000" dirty="0">
                 <a:solidFill>
                   <a:srgbClr val="E6E6E6"/>
                 </a:solidFill>
                 <a:latin typeface="Consolas"/>
               </a:rPr>
-              <a:t>    screen.</a:t>
-            </a:r>
-            <a:r>
-              <a:rPr sz="1700">
+              <a:t>    </a:t>
+            </a:r>
+            <a:r>
+              <a:rPr sz="2000" dirty="0">
+                <a:solidFill>
+                  <a:srgbClr val="FF9F1C"/>
+                </a:solidFill>
+                <a:latin typeface="Consolas"/>
+              </a:rPr>
+              <a:t>if</a:t>
+            </a:r>
+            <a:r>
+              <a:rPr sz="2000" dirty="0">
+                <a:solidFill>
+                  <a:srgbClr val="E6E6E6"/>
+                </a:solidFill>
+                <a:latin typeface="Consolas"/>
+              </a:rPr>
+              <a:t> </a:t>
+            </a:r>
+            <a:r>
+              <a:rPr sz="2000" b="1" dirty="0">
+                <a:solidFill>
+                  <a:srgbClr val="FF6B9A"/>
+                </a:solidFill>
+                <a:latin typeface="Consolas"/>
+              </a:rPr>
+              <a:t>lane</a:t>
+            </a:r>
+            <a:r>
+              <a:rPr sz="2000" dirty="0">
+                <a:solidFill>
+                  <a:srgbClr val="E6E6E6"/>
+                </a:solidFill>
+                <a:latin typeface="Consolas"/>
+              </a:rPr>
+              <a:t> &gt; </a:t>
+            </a:r>
+            <a:r>
+              <a:rPr sz="2000" dirty="0">
+                <a:solidFill>
+                  <a:srgbClr val="FFD166"/>
+                </a:solidFill>
+                <a:latin typeface="Consolas"/>
+              </a:rPr>
+              <a:t>0</a:t>
+            </a:r>
+            <a:r>
+              <a:rPr sz="2000" dirty="0">
+                <a:solidFill>
+                  <a:srgbClr val="E6E6E6"/>
+                </a:solidFill>
+                <a:latin typeface="Consolas"/>
+              </a:rPr>
+              <a:t>:</a:t>
+            </a:r>
+          </a:p>
+          <a:p>
+            <a:pPr algn="l" rtl="0">
+              <a:lnSpc>
+                <a:spcPct val="108000"/>
+              </a:lnSpc>
+            </a:pPr>
+            <a:r>
+              <a:rPr sz="2000" dirty="0">
+                <a:solidFill>
+                  <a:srgbClr val="E6E6E6"/>
+                </a:solidFill>
+                <a:latin typeface="Consolas"/>
+              </a:rPr>
+              <a:t>        </a:t>
+            </a:r>
+            <a:r>
+              <a:rPr sz="2000" b="1" dirty="0">
+                <a:solidFill>
+                  <a:srgbClr val="FF6B9A"/>
+                </a:solidFill>
+                <a:latin typeface="Consolas"/>
+              </a:rPr>
+              <a:t>lane</a:t>
+            </a:r>
+            <a:r>
+              <a:rPr sz="2000" dirty="0">
+                <a:solidFill>
+                  <a:srgbClr val="E6E6E6"/>
+                </a:solidFill>
+                <a:latin typeface="Consolas"/>
+              </a:rPr>
+              <a:t> = </a:t>
+            </a:r>
+            <a:r>
+              <a:rPr sz="2000" b="1" dirty="0">
+                <a:solidFill>
+                  <a:srgbClr val="FF6B9A"/>
+                </a:solidFill>
+                <a:latin typeface="Consolas"/>
+              </a:rPr>
+              <a:t>lane</a:t>
+            </a:r>
+            <a:r>
+              <a:rPr sz="2000" dirty="0">
+                <a:solidFill>
+                  <a:srgbClr val="E6E6E6"/>
+                </a:solidFill>
+                <a:latin typeface="Consolas"/>
+              </a:rPr>
+              <a:t> - </a:t>
+            </a:r>
+            <a:r>
+              <a:rPr sz="2000" dirty="0">
+                <a:solidFill>
+                  <a:srgbClr val="FFD166"/>
+                </a:solidFill>
+                <a:latin typeface="Consolas"/>
+              </a:rPr>
+              <a:t>1</a:t>
+            </a:r>
+          </a:p>
+          <a:p>
+            <a:pPr algn="l" rtl="0">
+              <a:lnSpc>
+                <a:spcPct val="108000"/>
+              </a:lnSpc>
+            </a:pPr>
+            <a:r>
+              <a:rPr sz="2000" dirty="0">
+                <a:solidFill>
+                  <a:srgbClr val="E6E6E6"/>
+                </a:solidFill>
+                <a:latin typeface="Consolas"/>
+              </a:rPr>
+              <a:t>        </a:t>
+            </a:r>
+            <a:r>
+              <a:rPr sz="2000" dirty="0" err="1">
+                <a:solidFill>
+                  <a:srgbClr val="E6E6E6"/>
+                </a:solidFill>
+                <a:latin typeface="Consolas"/>
+              </a:rPr>
+              <a:t>player.</a:t>
+            </a:r>
+            <a:r>
+              <a:rPr sz="2000" dirty="0" err="1">
                 <a:solidFill>
                   <a:srgbClr val="7FDBFF"/>
                 </a:solidFill>
                 <a:latin typeface="Consolas"/>
               </a:rPr>
-              <a:t>ontimer</a:t>
-            </a:r>
-            <a:r>
-              <a:rPr sz="1700">
+              <a:t>setx</a:t>
+            </a:r>
+            <a:r>
+              <a:rPr sz="2000" dirty="0">
                 <a:solidFill>
                   <a:srgbClr val="E6E6E6"/>
                 </a:solidFill>
                 <a:latin typeface="Consolas"/>
               </a:rPr>
+              <a:t>(LANES[</a:t>
+            </a:r>
+            <a:r>
+              <a:rPr sz="2000" b="1" dirty="0">
+                <a:solidFill>
+                  <a:srgbClr val="FF6B9A"/>
+                </a:solidFill>
+                <a:latin typeface="Consolas"/>
+              </a:rPr>
+              <a:t>lane</a:t>
+            </a:r>
+            <a:r>
+              <a:rPr sz="2000" dirty="0">
+                <a:solidFill>
+                  <a:srgbClr val="E6E6E6"/>
+                </a:solidFill>
+                <a:latin typeface="Consolas"/>
+              </a:rPr>
+              <a:t>])</a:t>
+            </a:r>
+          </a:p>
+          <a:p>
+            <a:pPr algn="l" rtl="0">
+              <a:lnSpc>
+                <a:spcPct val="108000"/>
+              </a:lnSpc>
+            </a:pPr>
+            <a:r>
+              <a:rPr sz="2000" dirty="0">
+                <a:latin typeface="Consolas"/>
+              </a:rPr>
+              <a:t> </a:t>
+            </a:r>
+          </a:p>
+          <a:p>
+            <a:pPr algn="l" rtl="0">
+              <a:lnSpc>
+                <a:spcPct val="108000"/>
+              </a:lnSpc>
+            </a:pPr>
+            <a:r>
+              <a:rPr sz="2000" dirty="0" err="1">
+                <a:solidFill>
+                  <a:srgbClr val="E6E6E6"/>
+                </a:solidFill>
+                <a:latin typeface="Consolas"/>
+              </a:rPr>
+              <a:t>screen.</a:t>
+            </a:r>
+            <a:r>
+              <a:rPr sz="2000" dirty="0" err="1">
+                <a:solidFill>
+                  <a:srgbClr val="7FDBFF"/>
+                </a:solidFill>
+                <a:latin typeface="Consolas"/>
+              </a:rPr>
+              <a:t>onkey</a:t>
+            </a:r>
+            <a:r>
+              <a:rPr sz="2000" dirty="0">
+                <a:solidFill>
+                  <a:srgbClr val="E6E6E6"/>
+                </a:solidFill>
+                <a:latin typeface="Consolas"/>
+              </a:rPr>
               <a:t>(</a:t>
             </a:r>
             <a:r>
-              <a:rPr sz="1700" b="1">
-                <a:solidFill>
-                  <a:srgbClr val="FF6B9A"/>
-                </a:solidFill>
-                <a:latin typeface="Consolas"/>
-              </a:rPr>
-              <a:t>game_loop</a:t>
-            </a:r>
-            <a:r>
-              <a:rPr sz="1700">
+              <a:rPr sz="2000" dirty="0" err="1">
                 <a:solidFill>
                   <a:srgbClr val="E6E6E6"/>
                 </a:solidFill>
                 <a:latin typeface="Consolas"/>
               </a:rPr>
+              <a:t>move_left</a:t>
+            </a:r>
+            <a:r>
+              <a:rPr sz="2000" dirty="0">
+                <a:solidFill>
+                  <a:srgbClr val="E6E6E6"/>
+                </a:solidFill>
+                <a:latin typeface="Consolas"/>
+              </a:rPr>
               <a:t>, </a:t>
             </a:r>
             <a:r>
-              <a:rPr sz="1700">
-                <a:solidFill>
-                  <a:srgbClr val="FFD166"/>
-                </a:solidFill>
-                <a:latin typeface="Consolas"/>
-              </a:rPr>
-              <a:t>20</a:t>
-            </a:r>
-            <a:r>
-              <a:rPr sz="1700">
+              <a:rPr sz="2000" dirty="0">
+                <a:solidFill>
+                  <a:srgbClr val="A6E22E"/>
+                </a:solidFill>
+                <a:latin typeface="Consolas"/>
+              </a:rPr>
+              <a:t>"Left"</a:t>
+            </a:r>
+            <a:r>
+              <a:rPr sz="2000" dirty="0">
                 <a:solidFill>
                   <a:srgbClr val="E6E6E6"/>
                 </a:solidFill>
@@ -24894,27 +24268,20 @@
         </p:nvSpPr>
         <p:spPr>
           <a:xfrm>
-            <a:off x="9628632" y="3429000"/>
-            <a:ext cx="2011680" cy="822960"/>
+            <a:off x="5120640" y="4480560"/>
+            <a:ext cx="2057400" cy="640080"/>
           </a:xfrm>
           <a:prstGeom prst="roundRect">
             <a:avLst>
-              <a:gd name="adj" fmla="val 20000"/>
+              <a:gd name="adj" fmla="val 15000"/>
             </a:avLst>
           </a:prstGeom>
           <a:solidFill>
-            <a:srgbClr val="2D9F5C"/>
+            <a:srgbClr val="E9F7EF"/>
           </a:solidFill>
           <a:ln>
             <a:noFill/>
           </a:ln>
-          <a:effectLst>
-            <a:outerShdw blurRad="76200" dist="19050" dir="5400000" algn="t" rotWithShape="0">
-              <a:srgbClr val="000000">
-                <a:alpha val="16000"/>
-              </a:srgbClr>
-            </a:outerShdw>
-          </a:effectLst>
         </p:spPr>
         <p:style>
           <a:lnRef idx="1">
@@ -24946,8 +24313,8 @@
         </p:nvSpPr>
         <p:spPr>
           <a:xfrm>
-            <a:off x="9628632" y="3429000"/>
-            <a:ext cx="2011680" cy="822960"/>
+            <a:off x="5120640" y="4480560"/>
+            <a:ext cx="2057400" cy="640080"/>
           </a:xfrm>
           <a:prstGeom prst="rect">
             <a:avLst/>
@@ -24960,89 +24327,45 @@
           </a:bodyPr>
           <a:lstStyle/>
           <a:p>
-            <a:pPr algn="ctr" rtl="1">
+            <a:pPr algn="ctr" rtl="0">
               <a:spcAft>
                 <a:spcPts val="400"/>
               </a:spcAft>
             </a:pPr>
             <a:r>
-              <a:rPr lang="he-IL" sz="1500" b="1" i="0">
-                <a:solidFill>
-                  <a:srgbClr val="FFFFFF"/>
-                </a:solidFill>
-                <a:latin typeface="Arial"/>
-                <a:cs typeface="Arial"/>
-              </a:rPr>
-              <a:t>מזיזים הכול קצת</a:t>
-            </a:r>
-          </a:p>
-        </p:txBody>
-      </p:sp>
-      <p:cxnSp>
-        <p:nvCxnSpPr>
-          <p:cNvPr id="10" name="Connector 9"/>
-          <p:cNvCxnSpPr/>
-          <p:nvPr/>
-        </p:nvCxnSpPr>
-        <p:spPr>
-          <a:xfrm flipH="1">
-            <a:off x="9400032" y="3840480"/>
-            <a:ext cx="210312" cy="0"/>
-          </a:xfrm>
-          <a:prstGeom prst="line">
-            <a:avLst/>
-          </a:prstGeom>
-          <a:ln w="25400">
-            <a:solidFill>
-              <a:srgbClr val="5F6F78"/>
-            </a:solidFill>
-            <a:tailEnd type="triangle" w="med" len="med"/>
-          </a:ln>
-        </p:spPr>
-        <p:style>
-          <a:lnRef idx="2">
-            <a:schemeClr val="accent1"/>
-          </a:lnRef>
-          <a:fillRef idx="0">
-            <a:schemeClr val="accent1"/>
-          </a:fillRef>
-          <a:effectRef idx="1">
-            <a:schemeClr val="accent1"/>
-          </a:effectRef>
-          <a:fontRef idx="minor">
-            <a:schemeClr val="tx1"/>
-          </a:fontRef>
-        </p:style>
-      </p:cxnSp>
-      <p:sp>
-        <p:nvSpPr>
-          <p:cNvPr id="11" name="Rounded Rectangle 10"/>
+              <a:rPr sz="1500" b="1" i="0">
+                <a:solidFill>
+                  <a:srgbClr val="2D9F5C"/>
+                </a:solidFill>
+                <a:latin typeface="Consolas"/>
+              </a:rPr>
+              <a:t>lane = 0</a:t>
+            </a:r>
+          </a:p>
+        </p:txBody>
+      </p:sp>
+      <p:sp>
+        <p:nvSpPr>
+          <p:cNvPr id="10" name="Rounded Rectangle 9"/>
           <p:cNvSpPr/>
           <p:nvPr/>
         </p:nvSpPr>
         <p:spPr>
           <a:xfrm>
-            <a:off x="7370064" y="3429000"/>
-            <a:ext cx="2011680" cy="822960"/>
+            <a:off x="7342631" y="4480560"/>
+            <a:ext cx="2057400" cy="640080"/>
           </a:xfrm>
           <a:prstGeom prst="roundRect">
             <a:avLst>
-              <a:gd name="adj" fmla="val 20000"/>
+              <a:gd name="adj" fmla="val 15000"/>
             </a:avLst>
           </a:prstGeom>
           <a:solidFill>
-            <a:srgbClr val="118AB2"/>
+            <a:srgbClr val="EF476F"/>
           </a:solidFill>
           <a:ln>
             <a:noFill/>
           </a:ln>
-          <a:effectLst>
-            <a:outerShdw blurRad="76200" dist="19050" dir="5400000" algn="t" rotWithShape="0">
-              <a:srgbClr val="000000">
-                <a:alpha val="16000"/>
-              </a:srgbClr>
-            </a:outerShdw>
-          </a:effectLst>
         </p:spPr>
         <p:style>
           <a:lnRef idx="1">
@@ -25068,14 +24391,14 @@
       </p:sp>
       <p:sp>
         <p:nvSpPr>
-          <p:cNvPr id="12" name="TextBox 11"/>
+          <p:cNvPr id="11" name="TextBox 10"/>
           <p:cNvSpPr txBox="1"/>
           <p:nvPr/>
         </p:nvSpPr>
         <p:spPr>
           <a:xfrm>
-            <a:off x="7370064" y="3429000"/>
-            <a:ext cx="2011680" cy="822960"/>
+            <a:off x="7342631" y="4480560"/>
+            <a:ext cx="2057400" cy="640080"/>
           </a:xfrm>
           <a:prstGeom prst="rect">
             <a:avLst/>
@@ -25088,89 +24411,45 @@
           </a:bodyPr>
           <a:lstStyle/>
           <a:p>
-            <a:pPr algn="ctr" rtl="1">
+            <a:pPr algn="ctr" rtl="0">
               <a:spcAft>
                 <a:spcPts val="400"/>
               </a:spcAft>
             </a:pPr>
             <a:r>
-              <a:rPr lang="he-IL" sz="1500" b="1" i="0">
+              <a:rPr sz="1500" b="1" i="0">
                 <a:solidFill>
                   <a:srgbClr val="FFFFFF"/>
                 </a:solidFill>
-                <a:latin typeface="Arial"/>
-                <a:cs typeface="Arial"/>
-              </a:rPr>
-              <a:t>מציירים את המסך</a:t>
-            </a:r>
-          </a:p>
-        </p:txBody>
-      </p:sp>
-      <p:cxnSp>
-        <p:nvCxnSpPr>
-          <p:cNvPr id="13" name="Connector 12"/>
-          <p:cNvCxnSpPr/>
-          <p:nvPr/>
-        </p:nvCxnSpPr>
-        <p:spPr>
-          <a:xfrm flipH="1">
-            <a:off x="7141464" y="3840480"/>
-            <a:ext cx="210312" cy="0"/>
-          </a:xfrm>
-          <a:prstGeom prst="line">
-            <a:avLst/>
-          </a:prstGeom>
-          <a:ln w="25400">
-            <a:solidFill>
-              <a:srgbClr val="5F6F78"/>
-            </a:solidFill>
-            <a:tailEnd type="triangle" w="med" len="med"/>
-          </a:ln>
-        </p:spPr>
-        <p:style>
-          <a:lnRef idx="2">
-            <a:schemeClr val="accent1"/>
-          </a:lnRef>
-          <a:fillRef idx="0">
-            <a:schemeClr val="accent1"/>
-          </a:fillRef>
-          <a:effectRef idx="1">
-            <a:schemeClr val="accent1"/>
-          </a:effectRef>
-          <a:fontRef idx="minor">
-            <a:schemeClr val="tx1"/>
-          </a:fontRef>
-        </p:style>
-      </p:cxnSp>
-      <p:sp>
-        <p:nvSpPr>
-          <p:cNvPr id="14" name="Rounded Rectangle 13"/>
+                <a:latin typeface="Consolas"/>
+              </a:rPr>
+              <a:t>lane = 1</a:t>
+            </a:r>
+          </a:p>
+        </p:txBody>
+      </p:sp>
+      <p:sp>
+        <p:nvSpPr>
+          <p:cNvPr id="12" name="Rounded Rectangle 11"/>
           <p:cNvSpPr/>
           <p:nvPr/>
         </p:nvSpPr>
         <p:spPr>
           <a:xfrm>
-            <a:off x="5111496" y="3429000"/>
-            <a:ext cx="2011680" cy="822960"/>
+            <a:off x="9564624" y="4480560"/>
+            <a:ext cx="2057400" cy="640080"/>
           </a:xfrm>
           <a:prstGeom prst="roundRect">
             <a:avLst>
-              <a:gd name="adj" fmla="val 20000"/>
+              <a:gd name="adj" fmla="val 15000"/>
             </a:avLst>
           </a:prstGeom>
           <a:solidFill>
-            <a:srgbClr val="FF9F1C"/>
+            <a:srgbClr val="E9F7EF"/>
           </a:solidFill>
           <a:ln>
             <a:noFill/>
           </a:ln>
-          <a:effectLst>
-            <a:outerShdw blurRad="76200" dist="19050" dir="5400000" algn="t" rotWithShape="0">
-              <a:srgbClr val="000000">
-                <a:alpha val="16000"/>
-              </a:srgbClr>
-            </a:outerShdw>
-          </a:effectLst>
         </p:spPr>
         <p:style>
           <a:lnRef idx="1">
@@ -25196,14 +24475,14 @@
       </p:sp>
       <p:sp>
         <p:nvSpPr>
-          <p:cNvPr id="15" name="TextBox 14"/>
+          <p:cNvPr id="13" name="TextBox 12"/>
           <p:cNvSpPr txBox="1"/>
           <p:nvPr/>
         </p:nvSpPr>
         <p:spPr>
           <a:xfrm>
-            <a:off x="5111496" y="3429000"/>
-            <a:ext cx="2011680" cy="822960"/>
+            <a:off x="9564624" y="4480560"/>
+            <a:ext cx="2057400" cy="640080"/>
           </a:xfrm>
           <a:prstGeom prst="rect">
             <a:avLst/>
@@ -25216,42 +24495,42 @@
           </a:bodyPr>
           <a:lstStyle/>
           <a:p>
-            <a:pPr algn="ctr" rtl="1">
+            <a:pPr algn="ctr" rtl="0">
               <a:spcAft>
                 <a:spcPts val="400"/>
               </a:spcAft>
             </a:pPr>
             <a:r>
-              <a:rPr lang="he-IL" sz="1500" b="1" i="0">
-                <a:solidFill>
-                  <a:srgbClr val="FFFFFF"/>
-                </a:solidFill>
-                <a:latin typeface="Arial"/>
-                <a:cs typeface="Arial"/>
-              </a:rPr>
-              <a:t>מחכים 20 אלפיות</a:t>
+              <a:rPr sz="1500" b="1" i="0">
+                <a:solidFill>
+                  <a:srgbClr val="2D9F5C"/>
+                </a:solidFill>
+                <a:latin typeface="Consolas"/>
+              </a:rPr>
+              <a:t>lane = 2</a:t>
             </a:r>
           </a:p>
         </p:txBody>
       </p:sp>
       <p:cxnSp>
         <p:nvCxnSpPr>
-          <p:cNvPr id="16" name="Connector 15"/>
+          <p:cNvPr id="14" name="Connector 13"/>
           <p:cNvCxnSpPr/>
           <p:nvPr/>
         </p:nvCxnSpPr>
         <p:spPr>
-          <a:xfrm>
-            <a:off x="5349240" y="4270248"/>
-            <a:ext cx="0" cy="256032"/>
+          <a:xfrm flipH="1">
+            <a:off x="6172200" y="5349240"/>
+            <a:ext cx="914400" cy="0"/>
           </a:xfrm>
           <a:prstGeom prst="line">
             <a:avLst/>
           </a:prstGeom>
-          <a:ln w="25400">
+          <a:ln w="31750">
             <a:solidFill>
-              <a:srgbClr val="5F6F78"/>
+              <a:srgbClr val="EF476F"/>
             </a:solidFill>
+            <a:tailEnd type="triangle" w="med" len="med"/>
           </a:ln>
         </p:spPr>
         <p:style>
@@ -25271,22 +24550,23 @@
       </p:cxnSp>
       <p:cxnSp>
         <p:nvCxnSpPr>
-          <p:cNvPr id="17" name="Connector 16"/>
+          <p:cNvPr id="15" name="Connector 14"/>
           <p:cNvCxnSpPr/>
           <p:nvPr/>
         </p:nvCxnSpPr>
         <p:spPr>
           <a:xfrm>
-            <a:off x="5349240" y="4526280"/>
-            <a:ext cx="5285232" cy="0"/>
+            <a:off x="7863840" y="5349240"/>
+            <a:ext cx="914400" cy="0"/>
           </a:xfrm>
           <a:prstGeom prst="line">
             <a:avLst/>
           </a:prstGeom>
-          <a:ln w="25400">
+          <a:ln w="31750">
             <a:solidFill>
-              <a:srgbClr val="5F6F78"/>
+              <a:srgbClr val="EF476F"/>
             </a:solidFill>
+            <a:tailEnd type="triangle" w="med" len="med"/>
           </a:ln>
         </p:spPr>
         <p:style>
@@ -25304,52 +24584,16 @@
           </a:fontRef>
         </p:style>
       </p:cxnSp>
-      <p:cxnSp>
-        <p:nvCxnSpPr>
-          <p:cNvPr id="18" name="Connector 17"/>
-          <p:cNvCxnSpPr/>
-          <p:nvPr/>
-        </p:nvCxnSpPr>
-        <p:spPr>
-          <a:xfrm flipV="1">
-            <a:off x="10634472" y="4279392"/>
-            <a:ext cx="0" cy="246888"/>
-          </a:xfrm>
-          <a:prstGeom prst="line">
-            <a:avLst/>
-          </a:prstGeom>
-          <a:ln w="25400">
-            <a:solidFill>
-              <a:srgbClr val="5F6F78"/>
-            </a:solidFill>
-            <a:tailEnd type="triangle" w="med" len="med"/>
-          </a:ln>
-        </p:spPr>
-        <p:style>
-          <a:lnRef idx="2">
-            <a:schemeClr val="accent1"/>
-          </a:lnRef>
-          <a:fillRef idx="0">
-            <a:schemeClr val="accent1"/>
-          </a:fillRef>
-          <a:effectRef idx="1">
-            <a:schemeClr val="accent1"/>
-          </a:effectRef>
-          <a:fontRef idx="minor">
-            <a:schemeClr val="tx1"/>
-          </a:fontRef>
-        </p:style>
-      </p:cxnSp>
-      <p:sp>
-        <p:nvSpPr>
-          <p:cNvPr id="19" name="TextBox 18"/>
+      <p:sp>
+        <p:nvSpPr>
+          <p:cNvPr id="16" name="TextBox 15"/>
           <p:cNvSpPr txBox="1"/>
           <p:nvPr/>
         </p:nvSpPr>
         <p:spPr>
           <a:xfrm>
-            <a:off x="5120640" y="4663440"/>
-            <a:ext cx="6519672" cy="685800"/>
+            <a:off x="5120640" y="5440680"/>
+            <a:ext cx="6519672" cy="400110"/>
           </a:xfrm>
           <a:prstGeom prst="rect">
             <a:avLst/>
@@ -25368,21 +24612,30 @@
               </a:spcAft>
             </a:pPr>
             <a:r>
-              <a:rPr lang="he-IL" sz="1600" b="0" i="0">
+              <a:rPr sz="2000" b="1" i="0" dirty="0">
+                <a:solidFill>
+                  <a:srgbClr val="5F6F78"/>
+                </a:solidFill>
+                <a:latin typeface="Consolas"/>
+              </a:rPr>
+              <a:t>‎lane‎</a:t>
+            </a:r>
+            <a:r>
+              <a:rPr lang="he-IL" sz="2000" b="0" i="0" dirty="0">
                 <a:solidFill>
                   <a:srgbClr val="5F6F78"/>
                 </a:solidFill>
                 <a:latin typeface="Arial"/>
                 <a:cs typeface="Arial"/>
               </a:rPr>
-              <a:t>50 תמונות בשנייה = תנועה חלקה, כמו ספר דפדוף</a:t>
-            </a:r>
-          </a:p>
-        </p:txBody>
-      </p:sp>
-      <p:sp>
-        <p:nvSpPr>
-          <p:cNvPr id="20" name="file-tag"/>
+              <a:t> הוא האינדקס ברשימה. ה-if שומר שלא ניסע מחוץ לכביש</a:t>
+            </a:r>
+          </a:p>
+        </p:txBody>
+      </p:sp>
+      <p:sp>
+        <p:nvSpPr>
+          <p:cNvPr id="17" name="file-tag"/>
           <p:cNvSpPr/>
           <p:nvPr/>
         </p:nvSpPr>
@@ -25442,7 +24695,7 @@
                 </a:solidFill>
                 <a:latin typeface="Arial"/>
               </a:rPr>
-              <a:t>car3.py</a:t>
+              <a:t>car2.py</a:t>
             </a:r>
           </a:p>
         </p:txBody>
@@ -25515,7 +24768,7 @@
                 <a:latin typeface="Arial"/>
                 <a:cs typeface="Arial"/>
               </a:rPr>
-              <a:t>שלב 4: זיהוי התנגשות 💥</a:t>
+              <a:t>שלב 3: לולאת המשחק - הכביש זז!</a:t>
             </a:r>
           </a:p>
         </p:txBody>
@@ -25554,7 +24807,7 @@
                 </a:solidFill>
                 <a:latin typeface="Arial"/>
               </a:rPr>
-              <a:t>25</a:t>
+              <a:t>24</a:t>
             </a:r>
           </a:p>
         </p:txBody>
@@ -25613,30 +24866,6 @@
           </a:p>
         </p:txBody>
       </p:sp>
-      <p:pic>
-        <p:nvPicPr>
-          <p:cNvPr id="5" name="Picture 4" descr="car4.png"/>
-          <p:cNvPicPr>
-            <a:picLocks noChangeAspect="1"/>
-          </p:cNvPicPr>
-          <p:nvPr/>
-        </p:nvPicPr>
-        <p:blipFill>
-          <a:blip r:embed="rId3"/>
-          <a:stretch>
-            <a:fillRect/>
-          </a:stretch>
-        </p:blipFill>
-        <p:spPr>
-          <a:xfrm>
-            <a:off x="914400" y="1325880"/>
-            <a:ext cx="2994067" cy="4206240"/>
-          </a:xfrm>
-          <a:prstGeom prst="rect">
-            <a:avLst/>
-          </a:prstGeom>
-        </p:spPr>
-      </p:pic>
       <p:sp>
         <p:nvSpPr>
           <p:cNvPr id="6" name="code-bg"/>
@@ -25697,8 +24926,8 @@
         </p:nvSpPr>
         <p:spPr>
           <a:xfrm>
-            <a:off x="5349240" y="1440180"/>
-            <a:ext cx="6062472" cy="1508760"/>
+            <a:off x="5349240" y="1372646"/>
+            <a:ext cx="4655121" cy="1644874"/>
           </a:xfrm>
           <a:prstGeom prst="rect">
             <a:avLst/>
@@ -25717,7 +24946,7 @@
               </a:lnSpc>
             </a:pPr>
             <a:r>
-              <a:rPr sz="1400">
+              <a:rPr sz="2000" dirty="0">
                 <a:solidFill>
                   <a:srgbClr val="FF9F1C"/>
                 </a:solidFill>
@@ -25726,7 +24955,7 @@
               <a:t>def</a:t>
             </a:r>
             <a:r>
-              <a:rPr sz="1400">
+              <a:rPr sz="2000" dirty="0">
                 <a:solidFill>
                   <a:srgbClr val="E6E6E6"/>
                 </a:solidFill>
@@ -25735,22 +24964,22 @@
               <a:t> </a:t>
             </a:r>
             <a:r>
-              <a:rPr sz="1400">
-                <a:solidFill>
-                  <a:srgbClr val="7FDBFF"/>
-                </a:solidFill>
-                <a:latin typeface="Consolas"/>
-              </a:rPr>
-              <a:t>crashed</a:t>
-            </a:r>
-            <a:r>
-              <a:rPr sz="1400">
+              <a:rPr sz="2000" b="1" dirty="0" err="1">
+                <a:solidFill>
+                  <a:srgbClr val="FF6B9A"/>
+                </a:solidFill>
+                <a:latin typeface="Consolas"/>
+              </a:rPr>
+              <a:t>game_loop</a:t>
+            </a:r>
+            <a:r>
+              <a:rPr sz="2000" dirty="0">
                 <a:solidFill>
                   <a:srgbClr val="E6E6E6"/>
                 </a:solidFill>
                 <a:latin typeface="Consolas"/>
               </a:rPr>
-              <a:t>(car1, car2):</a:t>
+              <a:t>():</a:t>
             </a:r>
           </a:p>
           <a:p>
@@ -25760,76 +24989,31 @@
               </a:lnSpc>
             </a:pPr>
             <a:r>
-              <a:rPr sz="1400">
+              <a:rPr sz="2000" dirty="0">
                 <a:solidFill>
                   <a:srgbClr val="E6E6E6"/>
                 </a:solidFill>
                 <a:latin typeface="Consolas"/>
               </a:rPr>
-              <a:t>    close_x = </a:t>
-            </a:r>
-            <a:r>
-              <a:rPr sz="1400">
+              <a:t>    </a:t>
+            </a:r>
+            <a:r>
+              <a:rPr sz="2000" dirty="0" err="1">
                 <a:solidFill>
                   <a:srgbClr val="7FDBFF"/>
                 </a:solidFill>
                 <a:latin typeface="Consolas"/>
               </a:rPr>
-              <a:t>abs</a:t>
-            </a:r>
-            <a:r>
-              <a:rPr sz="1400">
+              <a:t>move_lines</a:t>
+            </a:r>
+            <a:r>
+              <a:rPr sz="2000" dirty="0">
                 <a:solidFill>
                   <a:srgbClr val="E6E6E6"/>
                 </a:solidFill>
                 <a:latin typeface="Consolas"/>
               </a:rPr>
-              <a:t>(car1.</a:t>
-            </a:r>
-            <a:r>
-              <a:rPr sz="1400">
-                <a:solidFill>
-                  <a:srgbClr val="7FDBFF"/>
-                </a:solidFill>
-                <a:latin typeface="Consolas"/>
-              </a:rPr>
-              <a:t>xcor</a:t>
-            </a:r>
-            <a:r>
-              <a:rPr sz="1400">
-                <a:solidFill>
-                  <a:srgbClr val="E6E6E6"/>
-                </a:solidFill>
-                <a:latin typeface="Consolas"/>
-              </a:rPr>
-              <a:t>() - car2.</a:t>
-            </a:r>
-            <a:r>
-              <a:rPr sz="1400">
-                <a:solidFill>
-                  <a:srgbClr val="7FDBFF"/>
-                </a:solidFill>
-                <a:latin typeface="Consolas"/>
-              </a:rPr>
-              <a:t>xcor</a:t>
-            </a:r>
-            <a:r>
-              <a:rPr sz="1400">
-                <a:solidFill>
-                  <a:srgbClr val="E6E6E6"/>
-                </a:solidFill>
-                <a:latin typeface="Consolas"/>
-              </a:rPr>
-              <a:t>()) &lt; </a:t>
-            </a:r>
-            <a:r>
-              <a:rPr sz="1400">
-                <a:solidFill>
-                  <a:srgbClr val="FFD166"/>
-                </a:solidFill>
-                <a:latin typeface="Consolas"/>
-              </a:rPr>
-              <a:t>36</a:t>
+              <a:t>()</a:t>
             </a:r>
           </a:p>
           <a:p>
@@ -25839,76 +25023,31 @@
               </a:lnSpc>
             </a:pPr>
             <a:r>
-              <a:rPr sz="1400">
+              <a:rPr sz="2000" dirty="0">
                 <a:solidFill>
                   <a:srgbClr val="E6E6E6"/>
                 </a:solidFill>
                 <a:latin typeface="Consolas"/>
               </a:rPr>
-              <a:t>    close_y = </a:t>
-            </a:r>
-            <a:r>
-              <a:rPr sz="1400">
+              <a:t>    </a:t>
+            </a:r>
+            <a:r>
+              <a:rPr sz="2000" dirty="0" err="1">
                 <a:solidFill>
                   <a:srgbClr val="7FDBFF"/>
                 </a:solidFill>
                 <a:latin typeface="Consolas"/>
               </a:rPr>
-              <a:t>abs</a:t>
-            </a:r>
-            <a:r>
-              <a:rPr sz="1400">
+              <a:t>move_enemy</a:t>
+            </a:r>
+            <a:r>
+              <a:rPr sz="2000" dirty="0">
                 <a:solidFill>
                   <a:srgbClr val="E6E6E6"/>
                 </a:solidFill>
                 <a:latin typeface="Consolas"/>
               </a:rPr>
-              <a:t>(car1.</a:t>
-            </a:r>
-            <a:r>
-              <a:rPr sz="1400">
-                <a:solidFill>
-                  <a:srgbClr val="7FDBFF"/>
-                </a:solidFill>
-                <a:latin typeface="Consolas"/>
-              </a:rPr>
-              <a:t>ycor</a:t>
-            </a:r>
-            <a:r>
-              <a:rPr sz="1400">
-                <a:solidFill>
-                  <a:srgbClr val="E6E6E6"/>
-                </a:solidFill>
-                <a:latin typeface="Consolas"/>
-              </a:rPr>
-              <a:t>() - car2.</a:t>
-            </a:r>
-            <a:r>
-              <a:rPr sz="1400">
-                <a:solidFill>
-                  <a:srgbClr val="7FDBFF"/>
-                </a:solidFill>
-                <a:latin typeface="Consolas"/>
-              </a:rPr>
-              <a:t>ycor</a:t>
-            </a:r>
-            <a:r>
-              <a:rPr sz="1400">
-                <a:solidFill>
-                  <a:srgbClr val="E6E6E6"/>
-                </a:solidFill>
-                <a:latin typeface="Consolas"/>
-              </a:rPr>
-              <a:t>()) &lt; </a:t>
-            </a:r>
-            <a:r>
-              <a:rPr sz="1400">
-                <a:solidFill>
-                  <a:srgbClr val="FFD166"/>
-                </a:solidFill>
-                <a:latin typeface="Consolas"/>
-              </a:rPr>
-              <a:t>64</a:t>
+              <a:t>()</a:t>
             </a:r>
           </a:p>
           <a:p>
@@ -25918,7 +25057,7 @@
               </a:lnSpc>
             </a:pPr>
             <a:r>
-              <a:rPr sz="1400">
+              <a:rPr sz="2000" dirty="0">
                 <a:solidFill>
                   <a:srgbClr val="E6E6E6"/>
                 </a:solidFill>
@@ -25927,62 +25066,132 @@
               <a:t>    </a:t>
             </a:r>
             <a:r>
-              <a:rPr sz="1400" b="1">
+              <a:rPr sz="2000" dirty="0" err="1">
+                <a:solidFill>
+                  <a:srgbClr val="E6E6E6"/>
+                </a:solidFill>
+                <a:latin typeface="Consolas"/>
+              </a:rPr>
+              <a:t>screen.</a:t>
+            </a:r>
+            <a:r>
+              <a:rPr sz="2000" dirty="0" err="1">
+                <a:solidFill>
+                  <a:srgbClr val="7FDBFF"/>
+                </a:solidFill>
+                <a:latin typeface="Consolas"/>
+              </a:rPr>
+              <a:t>update</a:t>
+            </a:r>
+            <a:r>
+              <a:rPr sz="2000" dirty="0">
+                <a:solidFill>
+                  <a:srgbClr val="E6E6E6"/>
+                </a:solidFill>
+                <a:latin typeface="Consolas"/>
+              </a:rPr>
+              <a:t>()</a:t>
+            </a:r>
+          </a:p>
+          <a:p>
+            <a:pPr algn="l" rtl="0">
+              <a:lnSpc>
+                <a:spcPct val="108000"/>
+              </a:lnSpc>
+            </a:pPr>
+            <a:r>
+              <a:rPr sz="2000" dirty="0">
+                <a:solidFill>
+                  <a:srgbClr val="E6E6E6"/>
+                </a:solidFill>
+                <a:latin typeface="Consolas"/>
+              </a:rPr>
+              <a:t>    </a:t>
+            </a:r>
+            <a:r>
+              <a:rPr sz="2000" dirty="0" err="1">
+                <a:solidFill>
+                  <a:srgbClr val="E6E6E6"/>
+                </a:solidFill>
+                <a:latin typeface="Consolas"/>
+              </a:rPr>
+              <a:t>screen.</a:t>
+            </a:r>
+            <a:r>
+              <a:rPr sz="2000" dirty="0" err="1">
+                <a:solidFill>
+                  <a:srgbClr val="7FDBFF"/>
+                </a:solidFill>
+                <a:latin typeface="Consolas"/>
+              </a:rPr>
+              <a:t>ontimer</a:t>
+            </a:r>
+            <a:r>
+              <a:rPr sz="2000" dirty="0">
+                <a:solidFill>
+                  <a:srgbClr val="E6E6E6"/>
+                </a:solidFill>
+                <a:latin typeface="Consolas"/>
+              </a:rPr>
+              <a:t>(</a:t>
+            </a:r>
+            <a:r>
+              <a:rPr sz="2000" b="1" dirty="0" err="1">
                 <a:solidFill>
                   <a:srgbClr val="FF6B9A"/>
                 </a:solidFill>
                 <a:latin typeface="Consolas"/>
               </a:rPr>
-              <a:t>return</a:t>
-            </a:r>
-            <a:r>
-              <a:rPr sz="1400">
+              <a:t>game_loop</a:t>
+            </a:r>
+            <a:r>
+              <a:rPr sz="2000" dirty="0">
                 <a:solidFill>
                   <a:srgbClr val="E6E6E6"/>
                 </a:solidFill>
                 <a:latin typeface="Consolas"/>
               </a:rPr>
-              <a:t> close_x </a:t>
-            </a:r>
-            <a:r>
-              <a:rPr sz="1400">
-                <a:solidFill>
-                  <a:srgbClr val="FF9F1C"/>
-                </a:solidFill>
-                <a:latin typeface="Consolas"/>
-              </a:rPr>
-              <a:t>and</a:t>
-            </a:r>
-            <a:r>
-              <a:rPr sz="1400">
+              <a:t>, </a:t>
+            </a:r>
+            <a:r>
+              <a:rPr sz="2000" dirty="0">
+                <a:solidFill>
+                  <a:srgbClr val="FFD166"/>
+                </a:solidFill>
+                <a:latin typeface="Consolas"/>
+              </a:rPr>
+              <a:t>20</a:t>
+            </a:r>
+            <a:r>
+              <a:rPr sz="2000" dirty="0">
                 <a:solidFill>
                   <a:srgbClr val="E6E6E6"/>
                 </a:solidFill>
                 <a:latin typeface="Consolas"/>
               </a:rPr>
-              <a:t> close_y</a:t>
-            </a:r>
-          </a:p>
-        </p:txBody>
-      </p:sp>
-      <p:sp>
-        <p:nvSpPr>
-          <p:cNvPr id="8" name="code-bg"/>
+              <a:t>)</a:t>
+            </a:r>
+          </a:p>
+        </p:txBody>
+      </p:sp>
+      <p:sp>
+        <p:nvSpPr>
+          <p:cNvPr id="8" name="Rounded Rectangle 7"/>
           <p:cNvSpPr/>
           <p:nvPr/>
         </p:nvSpPr>
         <p:spPr>
           <a:xfrm>
-            <a:off x="5120640" y="3291840"/>
-            <a:ext cx="6519672" cy="1143000"/>
+            <a:off x="9628632" y="3429000"/>
+            <a:ext cx="2011680" cy="822960"/>
           </a:xfrm>
           <a:prstGeom prst="roundRect">
             <a:avLst>
-              <a:gd name="adj" fmla="val 4000"/>
+              <a:gd name="adj" fmla="val 20000"/>
             </a:avLst>
           </a:prstGeom>
           <a:solidFill>
-            <a:srgbClr val="1E1E2E"/>
+            <a:srgbClr val="2D9F5C"/>
           </a:solidFill>
           <a:ln>
             <a:noFill/>
@@ -26019,14 +25228,14 @@
       </p:sp>
       <p:sp>
         <p:nvSpPr>
-          <p:cNvPr id="9" name="code"/>
+          <p:cNvPr id="9" name="TextBox 8"/>
           <p:cNvSpPr txBox="1"/>
           <p:nvPr/>
         </p:nvSpPr>
         <p:spPr>
           <a:xfrm>
-            <a:off x="5349240" y="3451860"/>
-            <a:ext cx="6062472" cy="822960"/>
+            <a:off x="9628632" y="3429000"/>
+            <a:ext cx="2011680" cy="822960"/>
           </a:xfrm>
           <a:prstGeom prst="rect">
             <a:avLst/>
@@ -26034,198 +25243,79 @@
           <a:noFill/>
         </p:spPr>
         <p:txBody>
-          <a:bodyPr wrap="none" lIns="0" tIns="0" rIns="0" bIns="0" anchor="t">
+          <a:bodyPr wrap="square" lIns="45720" rIns="45720" anchor="ctr">
             <a:spAutoFit/>
           </a:bodyPr>
           <a:lstStyle/>
           <a:p>
-            <a:pPr algn="l" rtl="0">
-              <a:lnSpc>
-                <a:spcPct val="108000"/>
-              </a:lnSpc>
-            </a:pPr>
-            <a:r>
-              <a:rPr sz="1400">
-                <a:solidFill>
-                  <a:srgbClr val="FF9F1C"/>
-                </a:solidFill>
-                <a:latin typeface="Consolas"/>
-              </a:rPr>
-              <a:t>if</a:t>
-            </a:r>
-            <a:r>
-              <a:rPr sz="1400">
-                <a:solidFill>
-                  <a:srgbClr val="E6E6E6"/>
-                </a:solidFill>
-                <a:latin typeface="Consolas"/>
-              </a:rPr>
-              <a:t> </a:t>
-            </a:r>
-            <a:r>
-              <a:rPr sz="1400">
-                <a:solidFill>
-                  <a:srgbClr val="7FDBFF"/>
-                </a:solidFill>
-                <a:latin typeface="Consolas"/>
-              </a:rPr>
-              <a:t>crashed</a:t>
-            </a:r>
-            <a:r>
-              <a:rPr sz="1400">
-                <a:solidFill>
-                  <a:srgbClr val="E6E6E6"/>
-                </a:solidFill>
-                <a:latin typeface="Consolas"/>
-              </a:rPr>
-              <a:t>(player, enemy):</a:t>
-            </a:r>
-          </a:p>
-          <a:p>
-            <a:pPr algn="l" rtl="0">
-              <a:lnSpc>
-                <a:spcPct val="108000"/>
-              </a:lnSpc>
-            </a:pPr>
-            <a:r>
-              <a:rPr sz="1400">
-                <a:solidFill>
-                  <a:srgbClr val="E6E6E6"/>
-                </a:solidFill>
-                <a:latin typeface="Consolas"/>
-              </a:rPr>
-              <a:t>    writer.</a:t>
-            </a:r>
-            <a:r>
-              <a:rPr sz="1400">
-                <a:solidFill>
-                  <a:srgbClr val="7FDBFF"/>
-                </a:solidFill>
-                <a:latin typeface="Consolas"/>
-              </a:rPr>
-              <a:t>write</a:t>
-            </a:r>
-            <a:r>
-              <a:rPr sz="1400">
-                <a:solidFill>
-                  <a:srgbClr val="E6E6E6"/>
-                </a:solidFill>
-                <a:latin typeface="Consolas"/>
-              </a:rPr>
-              <a:t>(</a:t>
-            </a:r>
-            <a:r>
-              <a:rPr sz="1400">
-                <a:solidFill>
-                  <a:srgbClr val="A6E22E"/>
-                </a:solidFill>
-                <a:latin typeface="Consolas"/>
-              </a:rPr>
-              <a:t>"CRASH!"</a:t>
-            </a:r>
-            <a:r>
-              <a:rPr sz="1400">
-                <a:solidFill>
-                  <a:srgbClr val="E6E6E6"/>
-                </a:solidFill>
-                <a:latin typeface="Consolas"/>
-              </a:rPr>
-              <a:t>, ...)</a:t>
-            </a:r>
-          </a:p>
-          <a:p>
-            <a:pPr algn="l" rtl="0">
-              <a:lnSpc>
-                <a:spcPct val="108000"/>
-              </a:lnSpc>
-            </a:pPr>
-            <a:r>
-              <a:rPr sz="1400">
-                <a:solidFill>
-                  <a:srgbClr val="FF9F1C"/>
-                </a:solidFill>
-                <a:latin typeface="Consolas"/>
-              </a:rPr>
-              <a:t>else</a:t>
-            </a:r>
-            <a:r>
-              <a:rPr sz="1400">
-                <a:solidFill>
-                  <a:srgbClr val="E6E6E6"/>
-                </a:solidFill>
-                <a:latin typeface="Consolas"/>
-              </a:rPr>
-              <a:t>:</a:t>
-            </a:r>
-          </a:p>
-          <a:p>
-            <a:pPr algn="l" rtl="0">
-              <a:lnSpc>
-                <a:spcPct val="108000"/>
-              </a:lnSpc>
-            </a:pPr>
-            <a:r>
-              <a:rPr sz="1400">
-                <a:solidFill>
-                  <a:srgbClr val="E6E6E6"/>
-                </a:solidFill>
-                <a:latin typeface="Consolas"/>
-              </a:rPr>
-              <a:t>    screen.</a:t>
-            </a:r>
-            <a:r>
-              <a:rPr sz="1400">
-                <a:solidFill>
-                  <a:srgbClr val="7FDBFF"/>
-                </a:solidFill>
-                <a:latin typeface="Consolas"/>
-              </a:rPr>
-              <a:t>ontimer</a:t>
-            </a:r>
-            <a:r>
-              <a:rPr sz="1400">
-                <a:solidFill>
-                  <a:srgbClr val="E6E6E6"/>
-                </a:solidFill>
-                <a:latin typeface="Consolas"/>
-              </a:rPr>
-              <a:t>(game_loop, </a:t>
-            </a:r>
-            <a:r>
-              <a:rPr sz="1400">
-                <a:solidFill>
-                  <a:srgbClr val="FFD166"/>
-                </a:solidFill>
-                <a:latin typeface="Consolas"/>
-              </a:rPr>
-              <a:t>20</a:t>
-            </a:r>
-            <a:r>
-              <a:rPr sz="1400">
-                <a:solidFill>
-                  <a:srgbClr val="E6E6E6"/>
-                </a:solidFill>
-                <a:latin typeface="Consolas"/>
-              </a:rPr>
-              <a:t>)</a:t>
-            </a:r>
-          </a:p>
-        </p:txBody>
-      </p:sp>
-      <p:sp>
-        <p:nvSpPr>
-          <p:cNvPr id="10" name="Rounded Rectangle 9"/>
+            <a:pPr algn="ctr" rtl="1">
+              <a:spcAft>
+                <a:spcPts val="400"/>
+              </a:spcAft>
+            </a:pPr>
+            <a:r>
+              <a:rPr lang="he-IL" sz="1500" b="1" i="0">
+                <a:solidFill>
+                  <a:srgbClr val="FFFFFF"/>
+                </a:solidFill>
+                <a:latin typeface="Arial"/>
+                <a:cs typeface="Arial"/>
+              </a:rPr>
+              <a:t>מזיזים הכול קצת</a:t>
+            </a:r>
+          </a:p>
+        </p:txBody>
+      </p:sp>
+      <p:cxnSp>
+        <p:nvCxnSpPr>
+          <p:cNvPr id="10" name="Connector 9"/>
+          <p:cNvCxnSpPr/>
+          <p:nvPr/>
+        </p:nvCxnSpPr>
+        <p:spPr>
+          <a:xfrm flipH="1">
+            <a:off x="9400032" y="3840480"/>
+            <a:ext cx="210312" cy="0"/>
+          </a:xfrm>
+          <a:prstGeom prst="line">
+            <a:avLst/>
+          </a:prstGeom>
+          <a:ln w="25400">
+            <a:solidFill>
+              <a:srgbClr val="5F6F78"/>
+            </a:solidFill>
+            <a:tailEnd type="triangle" w="med" len="med"/>
+          </a:ln>
+        </p:spPr>
+        <p:style>
+          <a:lnRef idx="2">
+            <a:schemeClr val="accent1"/>
+          </a:lnRef>
+          <a:fillRef idx="0">
+            <a:schemeClr val="accent1"/>
+          </a:fillRef>
+          <a:effectRef idx="1">
+            <a:schemeClr val="accent1"/>
+          </a:effectRef>
+          <a:fontRef idx="minor">
+            <a:schemeClr val="tx1"/>
+          </a:fontRef>
+        </p:style>
+      </p:cxnSp>
+      <p:sp>
+        <p:nvSpPr>
+          <p:cNvPr id="11" name="Rounded Rectangle 10"/>
           <p:cNvSpPr/>
           <p:nvPr/>
         </p:nvSpPr>
         <p:spPr>
           <a:xfrm>
-            <a:off x="10195560" y="4617720"/>
-            <a:ext cx="548640" cy="960120"/>
+            <a:off x="7370064" y="3429000"/>
+            <a:ext cx="2011680" cy="822960"/>
           </a:xfrm>
           <a:prstGeom prst="roundRect">
             <a:avLst>
-              <a:gd name="adj" fmla="val 10000"/>
+              <a:gd name="adj" fmla="val 20000"/>
             </a:avLst>
           </a:prstGeom>
           <a:solidFill>
@@ -26234,6 +25324,13 @@
           <a:ln>
             <a:noFill/>
           </a:ln>
+          <a:effectLst>
+            <a:outerShdw blurRad="76200" dist="19050" dir="5400000" algn="t" rotWithShape="0">
+              <a:srgbClr val="000000">
+                <a:alpha val="16000"/>
+              </a:srgbClr>
+            </a:outerShdw>
+          </a:effectLst>
         </p:spPr>
         <p:style>
           <a:lnRef idx="1">
@@ -26259,174 +25356,94 @@
       </p:sp>
       <p:sp>
         <p:nvSpPr>
-          <p:cNvPr id="11" name="Rounded Rectangle 10"/>
+          <p:cNvPr id="12" name="TextBox 11"/>
+          <p:cNvSpPr txBox="1"/>
+          <p:nvPr/>
+        </p:nvSpPr>
+        <p:spPr>
+          <a:xfrm>
+            <a:off x="7370064" y="3429000"/>
+            <a:ext cx="2011680" cy="822960"/>
+          </a:xfrm>
+          <a:prstGeom prst="rect">
+            <a:avLst/>
+          </a:prstGeom>
+          <a:noFill/>
+        </p:spPr>
+        <p:txBody>
+          <a:bodyPr wrap="square" lIns="45720" rIns="45720" anchor="ctr">
+            <a:spAutoFit/>
+          </a:bodyPr>
+          <a:lstStyle/>
+          <a:p>
+            <a:pPr algn="ctr" rtl="1">
+              <a:spcAft>
+                <a:spcPts val="400"/>
+              </a:spcAft>
+            </a:pPr>
+            <a:r>
+              <a:rPr lang="he-IL" sz="1500" b="1" i="0">
+                <a:solidFill>
+                  <a:srgbClr val="FFFFFF"/>
+                </a:solidFill>
+                <a:latin typeface="Arial"/>
+                <a:cs typeface="Arial"/>
+              </a:rPr>
+              <a:t>מציירים את המסך</a:t>
+            </a:r>
+          </a:p>
+        </p:txBody>
+      </p:sp>
+      <p:cxnSp>
+        <p:nvCxnSpPr>
+          <p:cNvPr id="13" name="Connector 12"/>
+          <p:cNvCxnSpPr/>
+          <p:nvPr/>
+        </p:nvCxnSpPr>
+        <p:spPr>
+          <a:xfrm flipH="1">
+            <a:off x="7141464" y="3840480"/>
+            <a:ext cx="210312" cy="0"/>
+          </a:xfrm>
+          <a:prstGeom prst="line">
+            <a:avLst/>
+          </a:prstGeom>
+          <a:ln w="25400">
+            <a:solidFill>
+              <a:srgbClr val="5F6F78"/>
+            </a:solidFill>
+            <a:tailEnd type="triangle" w="med" len="med"/>
+          </a:ln>
+        </p:spPr>
+        <p:style>
+          <a:lnRef idx="2">
+            <a:schemeClr val="accent1"/>
+          </a:lnRef>
+          <a:fillRef idx="0">
+            <a:schemeClr val="accent1"/>
+          </a:fillRef>
+          <a:effectRef idx="1">
+            <a:schemeClr val="accent1"/>
+          </a:effectRef>
+          <a:fontRef idx="minor">
+            <a:schemeClr val="tx1"/>
+          </a:fontRef>
+        </p:style>
+      </p:cxnSp>
+      <p:sp>
+        <p:nvSpPr>
+          <p:cNvPr id="14" name="Rounded Rectangle 13"/>
           <p:cNvSpPr/>
           <p:nvPr/>
         </p:nvSpPr>
         <p:spPr>
           <a:xfrm>
-            <a:off x="10469880" y="5074920"/>
-            <a:ext cx="548640" cy="960120"/>
+            <a:off x="5111496" y="3429000"/>
+            <a:ext cx="2011680" cy="822960"/>
           </a:xfrm>
           <a:prstGeom prst="roundRect">
             <a:avLst>
-              <a:gd name="adj" fmla="val 10000"/>
-            </a:avLst>
-          </a:prstGeom>
-          <a:solidFill>
-            <a:srgbClr val="E74C3C"/>
-          </a:solidFill>
-          <a:ln>
-            <a:noFill/>
-          </a:ln>
-        </p:spPr>
-        <p:style>
-          <a:lnRef idx="1">
-            <a:schemeClr val="accent1"/>
-          </a:lnRef>
-          <a:fillRef idx="3">
-            <a:schemeClr val="accent1"/>
-          </a:fillRef>
-          <a:effectRef idx="2">
-            <a:schemeClr val="accent1"/>
-          </a:effectRef>
-          <a:fontRef idx="minor">
-            <a:schemeClr val="lt1"/>
-          </a:fontRef>
-        </p:style>
-        <p:txBody>
-          <a:bodyPr rtlCol="0" anchor="ctr"/>
-          <a:lstStyle/>
-          <a:p>
-            <a:endParaRPr/>
-          </a:p>
-        </p:txBody>
-      </p:sp>
-      <p:sp>
-        <p:nvSpPr>
-          <p:cNvPr id="12" name="TextBox 11"/>
-          <p:cNvSpPr txBox="1"/>
-          <p:nvPr/>
-        </p:nvSpPr>
-        <p:spPr>
-          <a:xfrm>
-            <a:off x="5120640" y="4617720"/>
-            <a:ext cx="4892040" cy="1463040"/>
-          </a:xfrm>
-          <a:prstGeom prst="rect">
-            <a:avLst/>
-          </a:prstGeom>
-          <a:noFill/>
-        </p:spPr>
-        <p:txBody>
-          <a:bodyPr wrap="square" lIns="45720" rIns="45720" anchor="t">
-            <a:spAutoFit/>
-          </a:bodyPr>
-          <a:lstStyle/>
-          <a:p>
-            <a:pPr algn="r" rtl="1">
-              <a:spcAft>
-                <a:spcPts val="300"/>
-              </a:spcAft>
-            </a:pPr>
-            <a:r>
-              <a:rPr sz="1500" b="1" i="0">
-                <a:solidFill>
-                  <a:srgbClr val="1B2B34"/>
-                </a:solidFill>
-                <a:latin typeface="Consolas"/>
-              </a:rPr>
-              <a:t>‎abs‎</a:t>
-            </a:r>
-            <a:r>
-              <a:rPr lang="he-IL" sz="1500" b="0" i="0">
-                <a:solidFill>
-                  <a:srgbClr val="1B2B34"/>
-                </a:solidFill>
-                <a:latin typeface="Arial"/>
-                <a:cs typeface="Arial"/>
-              </a:rPr>
-              <a:t> = מרחק בלי מינוס</a:t>
-            </a:r>
-          </a:p>
-          <a:p>
-            <a:pPr algn="r" rtl="1">
-              <a:spcAft>
-                <a:spcPts val="300"/>
-              </a:spcAft>
-            </a:pPr>
-            <a:r>
-              <a:rPr lang="he-IL" sz="1500" b="0" i="0">
-                <a:solidFill>
-                  <a:srgbClr val="1B2B34"/>
-                </a:solidFill>
-                <a:latin typeface="Arial"/>
-                <a:cs typeface="Arial"/>
-              </a:rPr>
-              <a:t>קרובות גם ב-x וגם ב-y? ← נגעו!</a:t>
-            </a:r>
-          </a:p>
-          <a:p>
-            <a:pPr algn="r" rtl="1">
-              <a:spcAft>
-                <a:spcPts val="300"/>
-              </a:spcAft>
-            </a:pPr>
-            <a:r>
-              <a:rPr lang="he-IL" sz="1500" b="0" i="0">
-                <a:solidFill>
-                  <a:srgbClr val="1B2B34"/>
-                </a:solidFill>
-                <a:latin typeface="Arial"/>
-                <a:cs typeface="Arial"/>
-              </a:rPr>
-              <a:t>הפונקציה מחזירה </a:t>
-            </a:r>
-            <a:r>
-              <a:rPr sz="1500" b="1" i="0">
-                <a:solidFill>
-                  <a:srgbClr val="2D9F5C"/>
-                </a:solidFill>
-                <a:latin typeface="Consolas"/>
-              </a:rPr>
-              <a:t>‎True‎</a:t>
-            </a:r>
-            <a:r>
-              <a:rPr lang="he-IL" sz="1500" b="0" i="0">
-                <a:solidFill>
-                  <a:srgbClr val="1B2B34"/>
-                </a:solidFill>
-                <a:latin typeface="Arial"/>
-                <a:cs typeface="Arial"/>
-              </a:rPr>
-              <a:t> או </a:t>
-            </a:r>
-            <a:r>
-              <a:rPr sz="1500" b="1" i="0">
-                <a:solidFill>
-                  <a:srgbClr val="EF476F"/>
-                </a:solidFill>
-                <a:latin typeface="Consolas"/>
-              </a:rPr>
-              <a:t>‎False‎</a:t>
-            </a:r>
-          </a:p>
-        </p:txBody>
-      </p:sp>
-      <p:sp>
-        <p:nvSpPr>
-          <p:cNvPr id="13" name="file-tag"/>
-          <p:cNvSpPr/>
-          <p:nvPr/>
-        </p:nvSpPr>
-        <p:spPr>
-          <a:xfrm>
-            <a:off x="1325880" y="5760720"/>
-            <a:ext cx="2377440" cy="502920"/>
-          </a:xfrm>
-          <a:prstGeom prst="roundRect">
-            <a:avLst>
-              <a:gd name="adj" fmla="val 50000"/>
+              <a:gd name="adj" fmla="val 20000"/>
             </a:avLst>
           </a:prstGeom>
           <a:solidFill>
@@ -26435,6 +25452,13 @@
           <a:ln>
             <a:noFill/>
           </a:ln>
+          <a:effectLst>
+            <a:outerShdw blurRad="76200" dist="19050" dir="5400000" algn="t" rotWithShape="0">
+              <a:srgbClr val="000000">
+                <a:alpha val="16000"/>
+              </a:srgbClr>
+            </a:outerShdw>
+          </a:effectLst>
         </p:spPr>
         <p:style>
           <a:lnRef idx="1">
@@ -26451,6 +25475,237 @@
           </a:fontRef>
         </p:style>
         <p:txBody>
+          <a:bodyPr rtlCol="0" anchor="ctr"/>
+          <a:lstStyle/>
+          <a:p>
+            <a:endParaRPr/>
+          </a:p>
+        </p:txBody>
+      </p:sp>
+      <p:sp>
+        <p:nvSpPr>
+          <p:cNvPr id="15" name="TextBox 14"/>
+          <p:cNvSpPr txBox="1"/>
+          <p:nvPr/>
+        </p:nvSpPr>
+        <p:spPr>
+          <a:xfrm>
+            <a:off x="5111496" y="3429000"/>
+            <a:ext cx="2011680" cy="822960"/>
+          </a:xfrm>
+          <a:prstGeom prst="rect">
+            <a:avLst/>
+          </a:prstGeom>
+          <a:noFill/>
+        </p:spPr>
+        <p:txBody>
+          <a:bodyPr wrap="square" lIns="45720" rIns="45720" anchor="ctr">
+            <a:spAutoFit/>
+          </a:bodyPr>
+          <a:lstStyle/>
+          <a:p>
+            <a:pPr algn="ctr" rtl="1">
+              <a:spcAft>
+                <a:spcPts val="400"/>
+              </a:spcAft>
+            </a:pPr>
+            <a:r>
+              <a:rPr lang="he-IL" sz="1500" b="1" i="0">
+                <a:solidFill>
+                  <a:srgbClr val="FFFFFF"/>
+                </a:solidFill>
+                <a:latin typeface="Arial"/>
+                <a:cs typeface="Arial"/>
+              </a:rPr>
+              <a:t>מחכים 20 אלפיות</a:t>
+            </a:r>
+          </a:p>
+        </p:txBody>
+      </p:sp>
+      <p:cxnSp>
+        <p:nvCxnSpPr>
+          <p:cNvPr id="16" name="Connector 15"/>
+          <p:cNvCxnSpPr/>
+          <p:nvPr/>
+        </p:nvCxnSpPr>
+        <p:spPr>
+          <a:xfrm>
+            <a:off x="5349240" y="4270248"/>
+            <a:ext cx="0" cy="256032"/>
+          </a:xfrm>
+          <a:prstGeom prst="line">
+            <a:avLst/>
+          </a:prstGeom>
+          <a:ln w="25400">
+            <a:solidFill>
+              <a:srgbClr val="5F6F78"/>
+            </a:solidFill>
+          </a:ln>
+        </p:spPr>
+        <p:style>
+          <a:lnRef idx="2">
+            <a:schemeClr val="accent1"/>
+          </a:lnRef>
+          <a:fillRef idx="0">
+            <a:schemeClr val="accent1"/>
+          </a:fillRef>
+          <a:effectRef idx="1">
+            <a:schemeClr val="accent1"/>
+          </a:effectRef>
+          <a:fontRef idx="minor">
+            <a:schemeClr val="tx1"/>
+          </a:fontRef>
+        </p:style>
+      </p:cxnSp>
+      <p:cxnSp>
+        <p:nvCxnSpPr>
+          <p:cNvPr id="17" name="Connector 16"/>
+          <p:cNvCxnSpPr/>
+          <p:nvPr/>
+        </p:nvCxnSpPr>
+        <p:spPr>
+          <a:xfrm>
+            <a:off x="5349240" y="4526280"/>
+            <a:ext cx="5285232" cy="0"/>
+          </a:xfrm>
+          <a:prstGeom prst="line">
+            <a:avLst/>
+          </a:prstGeom>
+          <a:ln w="25400">
+            <a:solidFill>
+              <a:srgbClr val="5F6F78"/>
+            </a:solidFill>
+          </a:ln>
+        </p:spPr>
+        <p:style>
+          <a:lnRef idx="2">
+            <a:schemeClr val="accent1"/>
+          </a:lnRef>
+          <a:fillRef idx="0">
+            <a:schemeClr val="accent1"/>
+          </a:fillRef>
+          <a:effectRef idx="1">
+            <a:schemeClr val="accent1"/>
+          </a:effectRef>
+          <a:fontRef idx="minor">
+            <a:schemeClr val="tx1"/>
+          </a:fontRef>
+        </p:style>
+      </p:cxnSp>
+      <p:cxnSp>
+        <p:nvCxnSpPr>
+          <p:cNvPr id="18" name="Connector 17"/>
+          <p:cNvCxnSpPr/>
+          <p:nvPr/>
+        </p:nvCxnSpPr>
+        <p:spPr>
+          <a:xfrm flipV="1">
+            <a:off x="10634472" y="4279392"/>
+            <a:ext cx="0" cy="246888"/>
+          </a:xfrm>
+          <a:prstGeom prst="line">
+            <a:avLst/>
+          </a:prstGeom>
+          <a:ln w="25400">
+            <a:solidFill>
+              <a:srgbClr val="5F6F78"/>
+            </a:solidFill>
+            <a:tailEnd type="triangle" w="med" len="med"/>
+          </a:ln>
+        </p:spPr>
+        <p:style>
+          <a:lnRef idx="2">
+            <a:schemeClr val="accent1"/>
+          </a:lnRef>
+          <a:fillRef idx="0">
+            <a:schemeClr val="accent1"/>
+          </a:fillRef>
+          <a:effectRef idx="1">
+            <a:schemeClr val="accent1"/>
+          </a:effectRef>
+          <a:fontRef idx="minor">
+            <a:schemeClr val="tx1"/>
+          </a:fontRef>
+        </p:style>
+      </p:cxnSp>
+      <p:sp>
+        <p:nvSpPr>
+          <p:cNvPr id="19" name="TextBox 18"/>
+          <p:cNvSpPr txBox="1"/>
+          <p:nvPr/>
+        </p:nvSpPr>
+        <p:spPr>
+          <a:xfrm>
+            <a:off x="5120640" y="4663440"/>
+            <a:ext cx="6519672" cy="685800"/>
+          </a:xfrm>
+          <a:prstGeom prst="rect">
+            <a:avLst/>
+          </a:prstGeom>
+          <a:noFill/>
+        </p:spPr>
+        <p:txBody>
+          <a:bodyPr wrap="square" lIns="45720" rIns="45720" anchor="t">
+            <a:spAutoFit/>
+          </a:bodyPr>
+          <a:lstStyle/>
+          <a:p>
+            <a:pPr algn="ctr" rtl="1">
+              <a:spcAft>
+                <a:spcPts val="400"/>
+              </a:spcAft>
+            </a:pPr>
+            <a:r>
+              <a:rPr lang="he-IL" sz="1600" b="0" i="0">
+                <a:solidFill>
+                  <a:srgbClr val="5F6F78"/>
+                </a:solidFill>
+                <a:latin typeface="Arial"/>
+                <a:cs typeface="Arial"/>
+              </a:rPr>
+              <a:t>50 תמונות בשנייה = תנועה חלקה, כמו ספר דפדוף</a:t>
+            </a:r>
+          </a:p>
+        </p:txBody>
+      </p:sp>
+      <p:sp>
+        <p:nvSpPr>
+          <p:cNvPr id="20" name="file-tag"/>
+          <p:cNvSpPr/>
+          <p:nvPr/>
+        </p:nvSpPr>
+        <p:spPr>
+          <a:xfrm>
+            <a:off x="1325880" y="5760720"/>
+            <a:ext cx="2377440" cy="502920"/>
+          </a:xfrm>
+          <a:prstGeom prst="roundRect">
+            <a:avLst>
+              <a:gd name="adj" fmla="val 50000"/>
+            </a:avLst>
+          </a:prstGeom>
+          <a:solidFill>
+            <a:srgbClr val="FF9F1C"/>
+          </a:solidFill>
+          <a:ln>
+            <a:noFill/>
+          </a:ln>
+        </p:spPr>
+        <p:style>
+          <a:lnRef idx="1">
+            <a:schemeClr val="accent1"/>
+          </a:lnRef>
+          <a:fillRef idx="3">
+            <a:schemeClr val="accent1"/>
+          </a:fillRef>
+          <a:effectRef idx="2">
+            <a:schemeClr val="accent1"/>
+          </a:effectRef>
+          <a:fontRef idx="minor">
+            <a:schemeClr val="lt1"/>
+          </a:fontRef>
+        </p:style>
+        <p:txBody>
           <a:bodyPr wrap="square" lIns="0" tIns="0" rIns="0" bIns="0" rtlCol="0" anchor="ctr"/>
           <a:lstStyle/>
           <a:p>
@@ -26475,11 +25730,117 @@
                 </a:solidFill>
                 <a:latin typeface="Arial"/>
               </a:rPr>
-              <a:t>car4.py</a:t>
-            </a:r>
-          </a:p>
-        </p:txBody>
-      </p:sp>
+              <a:t>car3.py</a:t>
+            </a:r>
+          </a:p>
+        </p:txBody>
+      </p:sp>
+      <p:sp>
+        <p:nvSpPr>
+          <p:cNvPr id="21" name="TextBox 20">
+            <a:extLst>
+              <a:ext uri="{FF2B5EF4-FFF2-40B4-BE49-F238E27FC236}">
+                <a16:creationId xmlns:a16="http://schemas.microsoft.com/office/drawing/2014/main" id="{54F40450-3826-D933-0963-3BD4575DB23A}"/>
+              </a:ext>
+            </a:extLst>
+          </p:cNvPr>
+          <p:cNvSpPr txBox="1"/>
+          <p:nvPr/>
+        </p:nvSpPr>
+        <p:spPr>
+          <a:xfrm>
+            <a:off x="5590888" y="5087172"/>
+            <a:ext cx="5820824" cy="1569660"/>
+          </a:xfrm>
+          <a:prstGeom prst="rect">
+            <a:avLst/>
+          </a:prstGeom>
+          <a:noFill/>
+        </p:spPr>
+        <p:txBody>
+          <a:bodyPr wrap="none" rtlCol="1">
+            <a:spAutoFit/>
+          </a:bodyPr>
+          <a:lstStyle/>
+          <a:p>
+            <a:pPr algn="r" rtl="1"/>
+            <a:r>
+              <a:rPr lang="en-US" sz="2400" dirty="0" err="1"/>
+              <a:t>screen.ontimer</a:t>
+            </a:r>
+            <a:r>
+              <a:rPr lang="en-US" sz="2400" dirty="0"/>
+              <a:t>(</a:t>
+            </a:r>
+            <a:r>
+              <a:rPr lang="en-US" sz="2400" dirty="0" err="1"/>
+              <a:t>game_loop</a:t>
+            </a:r>
+            <a:r>
+              <a:rPr lang="en-US" sz="2400" dirty="0"/>
+              <a:t>, 20)             </a:t>
+            </a:r>
+            <a:endParaRPr lang="he-IL" sz="2400" dirty="0"/>
+          </a:p>
+          <a:p>
+            <a:pPr algn="r" rtl="1"/>
+            <a:r>
+              <a:rPr lang="he-IL" sz="2400" dirty="0"/>
+              <a:t>מתזמן את הפונקציה</a:t>
+            </a:r>
+            <a:endParaRPr lang="en-US" sz="2400" dirty="0"/>
+          </a:p>
+          <a:p>
+            <a:pPr algn="r" rtl="1"/>
+            <a:r>
+              <a:rPr lang="en-US" sz="2400" dirty="0" err="1"/>
+              <a:t>game_loop</a:t>
+            </a:r>
+            <a:r>
+              <a:rPr lang="en-US" sz="2400" dirty="0"/>
+              <a:t> </a:t>
+            </a:r>
+            <a:endParaRPr lang="he-IL" sz="2400" dirty="0"/>
+          </a:p>
+          <a:p>
+            <a:pPr algn="r" rtl="1"/>
+            <a:r>
+              <a:rPr lang="he-IL" sz="2400" dirty="0"/>
+              <a:t>לרוץ פעם אחת לאחר השהיה של 20 מילי-שניות</a:t>
+            </a:r>
+          </a:p>
+        </p:txBody>
+      </p:sp>
+      <p:pic>
+        <p:nvPicPr>
+          <p:cNvPr id="23" name="Picture 22" descr="car2.png">
+            <a:extLst>
+              <a:ext uri="{FF2B5EF4-FFF2-40B4-BE49-F238E27FC236}">
+                <a16:creationId xmlns:a16="http://schemas.microsoft.com/office/drawing/2014/main" id="{666205A6-AF63-48E8-A8C9-F293ABEC7E88}"/>
+              </a:ext>
+            </a:extLst>
+          </p:cNvPr>
+          <p:cNvPicPr>
+            <a:picLocks noChangeAspect="1"/>
+          </p:cNvPicPr>
+          <p:nvPr/>
+        </p:nvPicPr>
+        <p:blipFill>
+          <a:blip r:embed="rId3"/>
+          <a:stretch>
+            <a:fillRect/>
+          </a:stretch>
+        </p:blipFill>
+        <p:spPr>
+          <a:xfrm>
+            <a:off x="914399" y="1325880"/>
+            <a:ext cx="2994067" cy="4206240"/>
+          </a:xfrm>
+          <a:prstGeom prst="rect">
+            <a:avLst/>
+          </a:prstGeom>
+        </p:spPr>
+      </p:pic>
     </p:spTree>
   </p:cSld>
   <p:clrMapOvr>
@@ -26521,8 +25882,8 @@
         </p:nvSpPr>
         <p:spPr>
           <a:xfrm>
-            <a:off x="548640" y="320040"/>
-            <a:ext cx="11091672" cy="777240"/>
+            <a:off x="548640" y="385494"/>
+            <a:ext cx="11091672" cy="646331"/>
           </a:xfrm>
           <a:prstGeom prst="rect">
             <a:avLst/>
@@ -26541,14 +25902,14 @@
               </a:spcAft>
             </a:pPr>
             <a:r>
-              <a:rPr lang="he-IL" sz="3600" b="1" i="0">
+              <a:rPr lang="he-IL" sz="3600" b="1" i="0" dirty="0">
                 <a:solidFill>
                   <a:srgbClr val="1B4332"/>
                 </a:solidFill>
                 <a:latin typeface="Arial"/>
                 <a:cs typeface="Arial"/>
               </a:rPr>
-              <a:t>שלב 5: הרבה מכוניות + ניקוד</a:t>
+              <a:t>שלב 4: אויב אחד והתנגשות 💥</a:t>
             </a:r>
           </a:p>
         </p:txBody>
@@ -26587,7 +25948,7 @@
                 </a:solidFill>
                 <a:latin typeface="Arial"/>
               </a:rPr>
-              <a:t>26</a:t>
+              <a:t>25</a:t>
             </a:r>
           </a:p>
         </p:txBody>
@@ -26648,7 +26009,7 @@
       </p:sp>
       <p:pic>
         <p:nvPicPr>
-          <p:cNvPr id="5" name="Picture 4" descr="car5.png"/>
+          <p:cNvPr id="5" name="Picture 4" descr="car4.png"/>
           <p:cNvPicPr>
             <a:picLocks noChangeAspect="1"/>
           </p:cNvPicPr>
@@ -26679,7 +26040,7 @@
         <p:spPr>
           <a:xfrm>
             <a:off x="5120640" y="1280160"/>
-            <a:ext cx="6519672" cy="1371600"/>
+            <a:ext cx="6519672" cy="1828800"/>
           </a:xfrm>
           <a:prstGeom prst="roundRect">
             <a:avLst>
@@ -26731,7 +26092,7 @@
         <p:spPr>
           <a:xfrm>
             <a:off x="5349240" y="1440180"/>
-            <a:ext cx="6062472" cy="1051560"/>
+            <a:ext cx="6205225" cy="1181349"/>
           </a:xfrm>
           <a:prstGeom prst="rect">
             <a:avLst/>
@@ -26750,22 +26111,40 @@
               </a:lnSpc>
             </a:pPr>
             <a:r>
-              <a:rPr sz="1500" b="1">
-                <a:solidFill>
-                  <a:srgbClr val="FF6B9A"/>
-                </a:solidFill>
-                <a:latin typeface="Consolas"/>
-              </a:rPr>
-              <a:t>enemies</a:t>
-            </a:r>
-            <a:r>
-              <a:rPr sz="1500">
+              <a:rPr dirty="0">
+                <a:solidFill>
+                  <a:srgbClr val="FF9F1C"/>
+                </a:solidFill>
+                <a:latin typeface="Consolas"/>
+              </a:rPr>
+              <a:t>def</a:t>
+            </a:r>
+            <a:r>
+              <a:rPr dirty="0">
                 <a:solidFill>
                   <a:srgbClr val="E6E6E6"/>
                 </a:solidFill>
                 <a:latin typeface="Consolas"/>
               </a:rPr>
-              <a:t> = []</a:t>
+              <a:t> </a:t>
+            </a:r>
+            <a:r>
+              <a:rPr dirty="0">
+                <a:solidFill>
+                  <a:srgbClr val="7FDBFF"/>
+                </a:solidFill>
+                <a:latin typeface="Consolas"/>
+              </a:rPr>
+              <a:t>crashed</a:t>
+            </a:r>
+            <a:r>
+              <a:rPr dirty="0">
+                <a:solidFill>
+                  <a:srgbClr val="E6E6E6"/>
+                </a:solidFill>
+                <a:latin typeface="Consolas"/>
+              </a:rPr>
+              <a:t>(car1, car2):</a:t>
             </a:r>
           </a:p>
           <a:p>
@@ -26775,76 +26154,94 @@
               </a:lnSpc>
             </a:pPr>
             <a:r>
-              <a:rPr sz="1500">
-                <a:solidFill>
-                  <a:srgbClr val="FF9F1C"/>
-                </a:solidFill>
-                <a:latin typeface="Consolas"/>
-              </a:rPr>
-              <a:t>for</a:t>
-            </a:r>
-            <a:r>
-              <a:rPr sz="1500">
+              <a:rPr dirty="0">
                 <a:solidFill>
                   <a:srgbClr val="E6E6E6"/>
                 </a:solidFill>
                 <a:latin typeface="Consolas"/>
               </a:rPr>
-              <a:t> i </a:t>
-            </a:r>
-            <a:r>
-              <a:rPr sz="1500">
-                <a:solidFill>
-                  <a:srgbClr val="FF9F1C"/>
-                </a:solidFill>
-                <a:latin typeface="Consolas"/>
-              </a:rPr>
-              <a:t>in</a:t>
-            </a:r>
-            <a:r>
-              <a:rPr sz="1500">
+              <a:t>    </a:t>
+            </a:r>
+            <a:r>
+              <a:rPr dirty="0" err="1">
                 <a:solidFill>
                   <a:srgbClr val="E6E6E6"/>
                 </a:solidFill>
                 <a:latin typeface="Consolas"/>
               </a:rPr>
-              <a:t> </a:t>
-            </a:r>
-            <a:r>
-              <a:rPr sz="1500">
+              <a:t>close_x</a:t>
+            </a:r>
+            <a:r>
+              <a:rPr dirty="0">
+                <a:solidFill>
+                  <a:srgbClr val="E6E6E6"/>
+                </a:solidFill>
+                <a:latin typeface="Consolas"/>
+              </a:rPr>
+              <a:t> = </a:t>
+            </a:r>
+            <a:r>
+              <a:rPr dirty="0">
                 <a:solidFill>
                   <a:srgbClr val="7FDBFF"/>
                 </a:solidFill>
                 <a:latin typeface="Consolas"/>
               </a:rPr>
-              <a:t>range</a:t>
-            </a:r>
-            <a:r>
-              <a:rPr sz="1500">
+              <a:t>abs</a:t>
+            </a:r>
+            <a:r>
+              <a:rPr dirty="0">
                 <a:solidFill>
                   <a:srgbClr val="E6E6E6"/>
                 </a:solidFill>
                 <a:latin typeface="Consolas"/>
               </a:rPr>
-              <a:t>(</a:t>
-            </a:r>
-            <a:r>
-              <a:rPr sz="1500">
+              <a:t>(car1.</a:t>
+            </a:r>
+            <a:r>
+              <a:rPr dirty="0">
+                <a:solidFill>
+                  <a:srgbClr val="7FDBFF"/>
+                </a:solidFill>
+                <a:latin typeface="Consolas"/>
+              </a:rPr>
+              <a:t>xcor</a:t>
+            </a:r>
+            <a:r>
+              <a:rPr dirty="0">
+                <a:solidFill>
+                  <a:srgbClr val="E6E6E6"/>
+                </a:solidFill>
+                <a:latin typeface="Consolas"/>
+              </a:rPr>
+              <a:t>() - car2.</a:t>
+            </a:r>
+            <a:r>
+              <a:rPr dirty="0">
+                <a:solidFill>
+                  <a:srgbClr val="7FDBFF"/>
+                </a:solidFill>
+                <a:latin typeface="Consolas"/>
+              </a:rPr>
+              <a:t>xcor</a:t>
+            </a:r>
+            <a:r>
+              <a:rPr dirty="0">
+                <a:solidFill>
+                  <a:srgbClr val="E6E6E6"/>
+                </a:solidFill>
+                <a:latin typeface="Consolas"/>
+              </a:rPr>
+              <a:t>()) &lt; </a:t>
+            </a:r>
+            <a:r>
+              <a:rPr dirty="0">
                 <a:solidFill>
                   <a:srgbClr val="FFD166"/>
                 </a:solidFill>
                 <a:latin typeface="Consolas"/>
               </a:rPr>
-              <a:t>3</a:t>
-            </a:r>
-            <a:r>
-              <a:rPr sz="1500">
-                <a:solidFill>
-                  <a:srgbClr val="E6E6E6"/>
-                </a:solidFill>
-                <a:latin typeface="Consolas"/>
-              </a:rPr>
-              <a:t>):</a:t>
+              <a:t>36</a:t>
             </a:r>
           </a:p>
           <a:p>
@@ -26854,49 +26251,94 @@
               </a:lnSpc>
             </a:pPr>
             <a:r>
-              <a:rPr sz="1500">
+              <a:rPr dirty="0">
                 <a:solidFill>
                   <a:srgbClr val="E6E6E6"/>
                 </a:solidFill>
                 <a:latin typeface="Consolas"/>
               </a:rPr>
-              <a:t>    enemy = </a:t>
-            </a:r>
-            <a:r>
-              <a:rPr sz="1500">
+              <a:t>    </a:t>
+            </a:r>
+            <a:r>
+              <a:rPr dirty="0" err="1">
+                <a:solidFill>
+                  <a:srgbClr val="E6E6E6"/>
+                </a:solidFill>
+                <a:latin typeface="Consolas"/>
+              </a:rPr>
+              <a:t>close_y</a:t>
+            </a:r>
+            <a:r>
+              <a:rPr dirty="0">
+                <a:solidFill>
+                  <a:srgbClr val="E6E6E6"/>
+                </a:solidFill>
+                <a:latin typeface="Consolas"/>
+              </a:rPr>
+              <a:t> = </a:t>
+            </a:r>
+            <a:r>
+              <a:rPr dirty="0">
                 <a:solidFill>
                   <a:srgbClr val="7FDBFF"/>
                 </a:solidFill>
                 <a:latin typeface="Consolas"/>
               </a:rPr>
-              <a:t>make_car</a:t>
-            </a:r>
-            <a:r>
-              <a:rPr sz="1500">
+              <a:t>abs</a:t>
+            </a:r>
+            <a:r>
+              <a:rPr dirty="0">
                 <a:solidFill>
                   <a:srgbClr val="E6E6E6"/>
                 </a:solidFill>
                 <a:latin typeface="Consolas"/>
               </a:rPr>
-              <a:t>(random.</a:t>
-            </a:r>
-            <a:r>
-              <a:rPr sz="1500">
+              <a:t>(car1.</a:t>
+            </a:r>
+            <a:r>
+              <a:rPr dirty="0">
                 <a:solidFill>
                   <a:srgbClr val="7FDBFF"/>
                 </a:solidFill>
                 <a:latin typeface="Consolas"/>
               </a:rPr>
-              <a:t>choice</a:t>
-            </a:r>
-            <a:r>
-              <a:rPr sz="1500">
+              <a:t>ycor</a:t>
+            </a:r>
+            <a:r>
+              <a:rPr dirty="0">
                 <a:solidFill>
                   <a:srgbClr val="E6E6E6"/>
                 </a:solidFill>
                 <a:latin typeface="Consolas"/>
               </a:rPr>
-              <a:t>(ENEMIES), ...)</a:t>
+              <a:t>() - car2.</a:t>
+            </a:r>
+            <a:r>
+              <a:rPr dirty="0">
+                <a:solidFill>
+                  <a:srgbClr val="7FDBFF"/>
+                </a:solidFill>
+                <a:latin typeface="Consolas"/>
+              </a:rPr>
+              <a:t>ycor</a:t>
+            </a:r>
+            <a:r>
+              <a:rPr dirty="0">
+                <a:solidFill>
+                  <a:srgbClr val="E6E6E6"/>
+                </a:solidFill>
+                <a:latin typeface="Consolas"/>
+              </a:rPr>
+              <a:t>()) &lt; </a:t>
+            </a:r>
+            <a:r>
+              <a:rPr dirty="0">
+                <a:solidFill>
+                  <a:srgbClr val="FFD166"/>
+                </a:solidFill>
+                <a:latin typeface="Consolas"/>
+              </a:rPr>
+              <a:t>64</a:t>
             </a:r>
           </a:p>
           <a:p>
@@ -26906,7 +26348,7 @@
               </a:lnSpc>
             </a:pPr>
             <a:r>
-              <a:rPr sz="1500">
+              <a:rPr dirty="0">
                 <a:solidFill>
                   <a:srgbClr val="E6E6E6"/>
                 </a:solidFill>
@@ -26915,41 +26357,74 @@
               <a:t>    </a:t>
             </a:r>
             <a:r>
-              <a:rPr sz="1500" b="1">
+              <a:rPr b="1" dirty="0">
                 <a:solidFill>
                   <a:srgbClr val="FF6B9A"/>
                 </a:solidFill>
                 <a:latin typeface="Consolas"/>
               </a:rPr>
-              <a:t>enemies</a:t>
-            </a:r>
-            <a:r>
-              <a:rPr sz="1500">
+              <a:t>return</a:t>
+            </a:r>
+            <a:r>
+              <a:rPr dirty="0">
                 <a:solidFill>
                   <a:srgbClr val="E6E6E6"/>
                 </a:solidFill>
                 <a:latin typeface="Consolas"/>
               </a:rPr>
-              <a:t>.</a:t>
-            </a:r>
-            <a:r>
-              <a:rPr sz="1500">
-                <a:solidFill>
-                  <a:srgbClr val="7FDBFF"/>
-                </a:solidFill>
-                <a:latin typeface="Consolas"/>
-              </a:rPr>
-              <a:t>append</a:t>
-            </a:r>
-            <a:r>
-              <a:rPr sz="1500">
+              <a:t> </a:t>
+            </a:r>
+            <a:r>
+              <a:rPr dirty="0" err="1">
                 <a:solidFill>
                   <a:srgbClr val="E6E6E6"/>
                 </a:solidFill>
                 <a:latin typeface="Consolas"/>
               </a:rPr>
-              <a:t>(enemy)</a:t>
-            </a:r>
+              <a:t>close_x</a:t>
+            </a:r>
+            <a:r>
+              <a:rPr dirty="0">
+                <a:solidFill>
+                  <a:srgbClr val="E6E6E6"/>
+                </a:solidFill>
+                <a:latin typeface="Consolas"/>
+              </a:rPr>
+              <a:t> </a:t>
+            </a:r>
+            <a:r>
+              <a:rPr dirty="0">
+                <a:solidFill>
+                  <a:srgbClr val="FF9F1C"/>
+                </a:solidFill>
+                <a:latin typeface="Consolas"/>
+              </a:rPr>
+              <a:t>and</a:t>
+            </a:r>
+            <a:r>
+              <a:rPr dirty="0">
+                <a:solidFill>
+                  <a:srgbClr val="E6E6E6"/>
+                </a:solidFill>
+                <a:latin typeface="Consolas"/>
+              </a:rPr>
+              <a:t> </a:t>
+            </a:r>
+            <a:r>
+              <a:rPr dirty="0" err="1">
+                <a:solidFill>
+                  <a:srgbClr val="E6E6E6"/>
+                </a:solidFill>
+                <a:latin typeface="Consolas"/>
+              </a:rPr>
+              <a:t>close_y</a:t>
+            </a:r>
+            <a:endParaRPr dirty="0">
+              <a:solidFill>
+                <a:srgbClr val="E6E6E6"/>
+              </a:solidFill>
+              <a:latin typeface="Consolas"/>
+            </a:endParaRPr>
           </a:p>
         </p:txBody>
       </p:sp>
@@ -26961,8 +26436,8 @@
         </p:nvSpPr>
         <p:spPr>
           <a:xfrm>
-            <a:off x="5120640" y="2788920"/>
-            <a:ext cx="6519672" cy="2286000"/>
+            <a:off x="5120640" y="3291839"/>
+            <a:ext cx="6519672" cy="1654733"/>
           </a:xfrm>
           <a:prstGeom prst="roundRect">
             <a:avLst>
@@ -27013,8 +26488,8 @@
         </p:nvSpPr>
         <p:spPr>
           <a:xfrm>
-            <a:off x="5349240" y="2948939"/>
-            <a:ext cx="6062472" cy="1965960"/>
+            <a:off x="5349240" y="3451860"/>
+            <a:ext cx="4179029" cy="1181349"/>
           </a:xfrm>
           <a:prstGeom prst="rect">
             <a:avLst/>
@@ -27033,58 +26508,40 @@
               </a:lnSpc>
             </a:pPr>
             <a:r>
-              <a:rPr sz="1500">
+              <a:rPr dirty="0">
                 <a:solidFill>
                   <a:srgbClr val="FF9F1C"/>
                 </a:solidFill>
                 <a:latin typeface="Consolas"/>
               </a:rPr>
-              <a:t>for</a:t>
-            </a:r>
-            <a:r>
-              <a:rPr sz="1500">
+              <a:t>if</a:t>
+            </a:r>
+            <a:r>
+              <a:rPr dirty="0">
                 <a:solidFill>
                   <a:srgbClr val="E6E6E6"/>
                 </a:solidFill>
                 <a:latin typeface="Consolas"/>
               </a:rPr>
-              <a:t> enemy </a:t>
-            </a:r>
-            <a:r>
-              <a:rPr sz="1500">
-                <a:solidFill>
-                  <a:srgbClr val="FF9F1C"/>
-                </a:solidFill>
-                <a:latin typeface="Consolas"/>
-              </a:rPr>
-              <a:t>in</a:t>
-            </a:r>
-            <a:r>
-              <a:rPr sz="1500">
+              <a:t> </a:t>
+            </a:r>
+            <a:r>
+              <a:rPr dirty="0">
+                <a:solidFill>
+                  <a:srgbClr val="7FDBFF"/>
+                </a:solidFill>
+                <a:latin typeface="Consolas"/>
+              </a:rPr>
+              <a:t>crashed</a:t>
+            </a:r>
+            <a:r>
+              <a:rPr dirty="0">
                 <a:solidFill>
                   <a:srgbClr val="E6E6E6"/>
                 </a:solidFill>
                 <a:latin typeface="Consolas"/>
               </a:rPr>
-              <a:t> </a:t>
-            </a:r>
-            <a:r>
-              <a:rPr sz="1500" b="1">
-                <a:solidFill>
-                  <a:srgbClr val="FF6B9A"/>
-                </a:solidFill>
-                <a:latin typeface="Consolas"/>
-              </a:rPr>
-              <a:t>enemies</a:t>
-            </a:r>
-            <a:r>
-              <a:rPr sz="1500">
-                <a:solidFill>
-                  <a:srgbClr val="E6E6E6"/>
-                </a:solidFill>
-                <a:latin typeface="Consolas"/>
-              </a:rPr>
-              <a:t>:</a:t>
+              <a:t>(player, enemy):</a:t>
             </a:r>
           </a:p>
           <a:p>
@@ -27094,67 +26551,58 @@
               </a:lnSpc>
             </a:pPr>
             <a:r>
-              <a:rPr sz="1500">
+              <a:rPr dirty="0">
                 <a:solidFill>
                   <a:srgbClr val="E6E6E6"/>
                 </a:solidFill>
                 <a:latin typeface="Consolas"/>
               </a:rPr>
-              <a:t>    enemy.</a:t>
-            </a:r>
-            <a:r>
-              <a:rPr sz="1500">
+              <a:t>    </a:t>
+            </a:r>
+            <a:r>
+              <a:rPr dirty="0" err="1">
+                <a:solidFill>
+                  <a:srgbClr val="E6E6E6"/>
+                </a:solidFill>
+                <a:latin typeface="Consolas"/>
+              </a:rPr>
+              <a:t>writer.</a:t>
+            </a:r>
+            <a:r>
+              <a:rPr dirty="0" err="1">
                 <a:solidFill>
                   <a:srgbClr val="7FDBFF"/>
                 </a:solidFill>
                 <a:latin typeface="Consolas"/>
               </a:rPr>
-              <a:t>sety</a:t>
-            </a:r>
-            <a:r>
-              <a:rPr sz="1500">
+              <a:t>write</a:t>
+            </a:r>
+            <a:r>
+              <a:rPr dirty="0">
                 <a:solidFill>
                   <a:srgbClr val="E6E6E6"/>
                 </a:solidFill>
                 <a:latin typeface="Consolas"/>
               </a:rPr>
-              <a:t>(enemy.</a:t>
-            </a:r>
-            <a:r>
-              <a:rPr sz="1500">
-                <a:solidFill>
-                  <a:srgbClr val="7FDBFF"/>
-                </a:solidFill>
-                <a:latin typeface="Consolas"/>
-              </a:rPr>
-              <a:t>ycor</a:t>
-            </a:r>
-            <a:r>
-              <a:rPr sz="1500">
+              <a:t>(</a:t>
+            </a:r>
+            <a:r>
+              <a:rPr dirty="0">
+                <a:solidFill>
+                  <a:srgbClr val="A6E22E"/>
+                </a:solidFill>
+                <a:latin typeface="Consolas"/>
+              </a:rPr>
+              <a:t>"CRASH!"</a:t>
+            </a:r>
+            <a:r>
+              <a:rPr dirty="0">
                 <a:solidFill>
                   <a:srgbClr val="E6E6E6"/>
                 </a:solidFill>
                 <a:latin typeface="Consolas"/>
               </a:rPr>
-              <a:t>() - </a:t>
-            </a:r>
-            <a:r>
-              <a:rPr sz="1500" b="1">
-                <a:solidFill>
-                  <a:srgbClr val="FF6B9A"/>
-                </a:solidFill>
-                <a:latin typeface="Consolas"/>
-              </a:rPr>
-              <a:t>speed</a:t>
-            </a:r>
-            <a:r>
-              <a:rPr sz="1500">
-                <a:solidFill>
-                  <a:srgbClr val="E6E6E6"/>
-                </a:solidFill>
-                <a:latin typeface="Consolas"/>
-              </a:rPr>
-              <a:t>)</a:t>
+              <a:t>, ...)</a:t>
             </a:r>
           </a:p>
           <a:p>
@@ -27164,61 +26612,16 @@
               </a:lnSpc>
             </a:pPr>
             <a:r>
-              <a:rPr sz="1500">
-                <a:solidFill>
-                  <a:srgbClr val="E6E6E6"/>
-                </a:solidFill>
-                <a:latin typeface="Consolas"/>
-              </a:rPr>
-              <a:t>    </a:t>
-            </a:r>
-            <a:r>
-              <a:rPr sz="1500">
+              <a:rPr dirty="0">
                 <a:solidFill>
                   <a:srgbClr val="FF9F1C"/>
                 </a:solidFill>
                 <a:latin typeface="Consolas"/>
               </a:rPr>
-              <a:t>if</a:t>
-            </a:r>
-            <a:r>
-              <a:rPr sz="1500">
-                <a:solidFill>
-                  <a:srgbClr val="E6E6E6"/>
-                </a:solidFill>
-                <a:latin typeface="Consolas"/>
-              </a:rPr>
-              <a:t> enemy.</a:t>
-            </a:r>
-            <a:r>
-              <a:rPr sz="1500">
-                <a:solidFill>
-                  <a:srgbClr val="7FDBFF"/>
-                </a:solidFill>
-                <a:latin typeface="Consolas"/>
-              </a:rPr>
-              <a:t>ycor</a:t>
-            </a:r>
-            <a:r>
-              <a:rPr sz="1500">
-                <a:solidFill>
-                  <a:srgbClr val="E6E6E6"/>
-                </a:solidFill>
-                <a:latin typeface="Consolas"/>
-              </a:rPr>
-              <a:t>() &lt; -</a:t>
-            </a:r>
-            <a:r>
-              <a:rPr sz="1500">
-                <a:solidFill>
-                  <a:srgbClr val="FFD166"/>
-                </a:solidFill>
-                <a:latin typeface="Consolas"/>
-              </a:rPr>
-              <a:t>400</a:t>
-            </a:r>
-            <a:r>
-              <a:rPr sz="1500">
+              <a:t>else</a:t>
+            </a:r>
+            <a:r>
+              <a:rPr dirty="0">
                 <a:solidFill>
                   <a:srgbClr val="E6E6E6"/>
                 </a:solidFill>
@@ -27234,244 +26637,180 @@
               </a:lnSpc>
             </a:pPr>
             <a:r>
-              <a:rPr sz="1500">
+              <a:rPr dirty="0">
                 <a:solidFill>
                   <a:srgbClr val="E6E6E6"/>
                 </a:solidFill>
                 <a:latin typeface="Consolas"/>
               </a:rPr>
-              <a:t>        </a:t>
-            </a:r>
-            <a:r>
-              <a:rPr sz="1500">
+              <a:t>    </a:t>
+            </a:r>
+            <a:r>
+              <a:rPr dirty="0" err="1">
+                <a:solidFill>
+                  <a:srgbClr val="E6E6E6"/>
+                </a:solidFill>
+                <a:latin typeface="Consolas"/>
+              </a:rPr>
+              <a:t>screen.</a:t>
+            </a:r>
+            <a:r>
+              <a:rPr dirty="0" err="1">
                 <a:solidFill>
                   <a:srgbClr val="7FDBFF"/>
                 </a:solidFill>
                 <a:latin typeface="Consolas"/>
               </a:rPr>
-              <a:t>reset_enemy</a:t>
-            </a:r>
-            <a:r>
-              <a:rPr sz="1500">
+              <a:t>ontimer</a:t>
+            </a:r>
+            <a:r>
+              <a:rPr dirty="0">
                 <a:solidFill>
                   <a:srgbClr val="E6E6E6"/>
                 </a:solidFill>
                 <a:latin typeface="Consolas"/>
               </a:rPr>
-              <a:t>(enemy)</a:t>
-            </a:r>
-          </a:p>
-          <a:p>
-            <a:pPr algn="l" rtl="0">
-              <a:lnSpc>
-                <a:spcPct val="108000"/>
-              </a:lnSpc>
-            </a:pPr>
-            <a:r>
-              <a:rPr sz="1500">
+              <a:t>(</a:t>
+            </a:r>
+            <a:r>
+              <a:rPr dirty="0" err="1">
                 <a:solidFill>
                   <a:srgbClr val="E6E6E6"/>
                 </a:solidFill>
                 <a:latin typeface="Consolas"/>
               </a:rPr>
-              <a:t>        </a:t>
-            </a:r>
-            <a:r>
-              <a:rPr sz="1500" b="1">
-                <a:solidFill>
-                  <a:srgbClr val="FF6B9A"/>
-                </a:solidFill>
-                <a:latin typeface="Consolas"/>
-              </a:rPr>
-              <a:t>score</a:t>
-            </a:r>
-            <a:r>
-              <a:rPr sz="1500">
+              <a:t>game_loop</a:t>
+            </a:r>
+            <a:r>
+              <a:rPr dirty="0">
                 <a:solidFill>
                   <a:srgbClr val="E6E6E6"/>
                 </a:solidFill>
                 <a:latin typeface="Consolas"/>
               </a:rPr>
-              <a:t> = </a:t>
-            </a:r>
-            <a:r>
-              <a:rPr sz="1500" b="1">
-                <a:solidFill>
-                  <a:srgbClr val="FF6B9A"/>
-                </a:solidFill>
-                <a:latin typeface="Consolas"/>
-              </a:rPr>
-              <a:t>score</a:t>
-            </a:r>
-            <a:r>
-              <a:rPr sz="1500">
+              <a:t>, </a:t>
+            </a:r>
+            <a:r>
+              <a:rPr dirty="0">
+                <a:solidFill>
+                  <a:srgbClr val="FFD166"/>
+                </a:solidFill>
+                <a:latin typeface="Consolas"/>
+              </a:rPr>
+              <a:t>20</a:t>
+            </a:r>
+            <a:r>
+              <a:rPr dirty="0">
                 <a:solidFill>
                   <a:srgbClr val="E6E6E6"/>
                 </a:solidFill>
                 <a:latin typeface="Consolas"/>
               </a:rPr>
-              <a:t> + </a:t>
-            </a:r>
-            <a:r>
-              <a:rPr sz="1500">
-                <a:solidFill>
-                  <a:srgbClr val="FFD166"/>
-                </a:solidFill>
-                <a:latin typeface="Consolas"/>
-              </a:rPr>
-              <a:t>1</a:t>
-            </a:r>
-          </a:p>
-          <a:p>
-            <a:pPr algn="l" rtl="0">
-              <a:lnSpc>
-                <a:spcPct val="108000"/>
-              </a:lnSpc>
-            </a:pPr>
-            <a:r>
-              <a:rPr sz="1500">
-                <a:solidFill>
-                  <a:srgbClr val="E6E6E6"/>
-                </a:solidFill>
-                <a:latin typeface="Consolas"/>
-              </a:rPr>
-              <a:t>        </a:t>
-            </a:r>
-            <a:r>
-              <a:rPr sz="1500" b="1">
-                <a:solidFill>
-                  <a:srgbClr val="FF6B9A"/>
-                </a:solidFill>
-                <a:latin typeface="Consolas"/>
-              </a:rPr>
-              <a:t>speed</a:t>
-            </a:r>
-            <a:r>
-              <a:rPr sz="1500">
-                <a:solidFill>
-                  <a:srgbClr val="E6E6E6"/>
-                </a:solidFill>
-                <a:latin typeface="Consolas"/>
-              </a:rPr>
-              <a:t> = </a:t>
-            </a:r>
-            <a:r>
-              <a:rPr sz="1500" b="1">
-                <a:solidFill>
-                  <a:srgbClr val="FF6B9A"/>
-                </a:solidFill>
-                <a:latin typeface="Consolas"/>
-              </a:rPr>
-              <a:t>speed</a:t>
-            </a:r>
-            <a:r>
-              <a:rPr sz="1500">
-                <a:solidFill>
-                  <a:srgbClr val="E6E6E6"/>
-                </a:solidFill>
-                <a:latin typeface="Consolas"/>
-              </a:rPr>
-              <a:t> + </a:t>
-            </a:r>
-            <a:r>
-              <a:rPr sz="1500">
-                <a:solidFill>
-                  <a:srgbClr val="FFD166"/>
-                </a:solidFill>
-                <a:latin typeface="Consolas"/>
-              </a:rPr>
-              <a:t>0.3</a:t>
-            </a:r>
-          </a:p>
-          <a:p>
-            <a:pPr algn="l" rtl="0">
-              <a:lnSpc>
-                <a:spcPct val="108000"/>
-              </a:lnSpc>
-            </a:pPr>
-            <a:r>
-              <a:rPr sz="1500">
-                <a:solidFill>
-                  <a:srgbClr val="E6E6E6"/>
-                </a:solidFill>
-                <a:latin typeface="Consolas"/>
-              </a:rPr>
-              <a:t>    </a:t>
-            </a:r>
-            <a:r>
-              <a:rPr sz="1500">
-                <a:solidFill>
-                  <a:srgbClr val="FF9F1C"/>
-                </a:solidFill>
-                <a:latin typeface="Consolas"/>
-              </a:rPr>
-              <a:t>if</a:t>
-            </a:r>
-            <a:r>
-              <a:rPr sz="1500">
-                <a:solidFill>
-                  <a:srgbClr val="E6E6E6"/>
-                </a:solidFill>
-                <a:latin typeface="Consolas"/>
-              </a:rPr>
-              <a:t> </a:t>
-            </a:r>
-            <a:r>
-              <a:rPr sz="1500">
-                <a:solidFill>
-                  <a:srgbClr val="7FDBFF"/>
-                </a:solidFill>
-                <a:latin typeface="Consolas"/>
-              </a:rPr>
-              <a:t>crashed</a:t>
-            </a:r>
-            <a:r>
-              <a:rPr sz="1500">
-                <a:solidFill>
-                  <a:srgbClr val="E6E6E6"/>
-                </a:solidFill>
-                <a:latin typeface="Consolas"/>
-              </a:rPr>
-              <a:t>(player, enemy):</a:t>
-            </a:r>
-          </a:p>
-          <a:p>
-            <a:pPr algn="l" rtl="0">
-              <a:lnSpc>
-                <a:spcPct val="108000"/>
-              </a:lnSpc>
-            </a:pPr>
-            <a:r>
-              <a:rPr sz="1500">
-                <a:solidFill>
-                  <a:srgbClr val="E6E6E6"/>
-                </a:solidFill>
-                <a:latin typeface="Consolas"/>
-              </a:rPr>
-              <a:t>        game_over = </a:t>
-            </a:r>
-            <a:r>
-              <a:rPr sz="1500">
-                <a:solidFill>
-                  <a:srgbClr val="FF9F1C"/>
-                </a:solidFill>
-                <a:latin typeface="Consolas"/>
-              </a:rPr>
-              <a:t>True</a:t>
-            </a:r>
-          </a:p>
-        </p:txBody>
-      </p:sp>
-      <p:sp>
-        <p:nvSpPr>
-          <p:cNvPr id="10" name="TextBox 9"/>
+              <a:t>)</a:t>
+            </a:r>
+          </a:p>
+        </p:txBody>
+      </p:sp>
+      <p:sp>
+        <p:nvSpPr>
+          <p:cNvPr id="10" name="Rounded Rectangle 9"/>
+          <p:cNvSpPr/>
+          <p:nvPr/>
+        </p:nvSpPr>
+        <p:spPr>
+          <a:xfrm>
+            <a:off x="10195560" y="5201018"/>
+            <a:ext cx="548640" cy="960120"/>
+          </a:xfrm>
+          <a:prstGeom prst="roundRect">
+            <a:avLst>
+              <a:gd name="adj" fmla="val 10000"/>
+            </a:avLst>
+          </a:prstGeom>
+          <a:solidFill>
+            <a:srgbClr val="118AB2"/>
+          </a:solidFill>
+          <a:ln>
+            <a:noFill/>
+          </a:ln>
+        </p:spPr>
+        <p:style>
+          <a:lnRef idx="1">
+            <a:schemeClr val="accent1"/>
+          </a:lnRef>
+          <a:fillRef idx="3">
+            <a:schemeClr val="accent1"/>
+          </a:fillRef>
+          <a:effectRef idx="2">
+            <a:schemeClr val="accent1"/>
+          </a:effectRef>
+          <a:fontRef idx="minor">
+            <a:schemeClr val="lt1"/>
+          </a:fontRef>
+        </p:style>
+        <p:txBody>
+          <a:bodyPr rtlCol="0" anchor="ctr"/>
+          <a:lstStyle/>
+          <a:p>
+            <a:endParaRPr/>
+          </a:p>
+        </p:txBody>
+      </p:sp>
+      <p:sp>
+        <p:nvSpPr>
+          <p:cNvPr id="11" name="Rounded Rectangle 10"/>
+          <p:cNvSpPr/>
+          <p:nvPr/>
+        </p:nvSpPr>
+        <p:spPr>
+          <a:xfrm>
+            <a:off x="10469880" y="5658218"/>
+            <a:ext cx="548640" cy="960120"/>
+          </a:xfrm>
+          <a:prstGeom prst="roundRect">
+            <a:avLst>
+              <a:gd name="adj" fmla="val 10000"/>
+            </a:avLst>
+          </a:prstGeom>
+          <a:solidFill>
+            <a:srgbClr val="E74C3C"/>
+          </a:solidFill>
+          <a:ln>
+            <a:noFill/>
+          </a:ln>
+        </p:spPr>
+        <p:style>
+          <a:lnRef idx="1">
+            <a:schemeClr val="accent1"/>
+          </a:lnRef>
+          <a:fillRef idx="3">
+            <a:schemeClr val="accent1"/>
+          </a:fillRef>
+          <a:effectRef idx="2">
+            <a:schemeClr val="accent1"/>
+          </a:effectRef>
+          <a:fontRef idx="minor">
+            <a:schemeClr val="lt1"/>
+          </a:fontRef>
+        </p:style>
+        <p:txBody>
+          <a:bodyPr rtlCol="0" anchor="ctr"/>
+          <a:lstStyle/>
+          <a:p>
+            <a:endParaRPr/>
+          </a:p>
+        </p:txBody>
+      </p:sp>
+      <p:sp>
+        <p:nvSpPr>
+          <p:cNvPr id="12" name="TextBox 11"/>
           <p:cNvSpPr txBox="1"/>
           <p:nvPr/>
         </p:nvSpPr>
         <p:spPr>
           <a:xfrm>
-            <a:off x="5120640" y="5212080"/>
-            <a:ext cx="6519672" cy="731520"/>
+            <a:off x="5120640" y="5201018"/>
+            <a:ext cx="4892040" cy="1461939"/>
           </a:xfrm>
           <a:prstGeom prst="rect">
             <a:avLst/>
@@ -27486,25 +26825,96 @@
           <a:p>
             <a:pPr algn="r" rtl="1">
               <a:spcAft>
-                <a:spcPts val="400"/>
+                <a:spcPts val="300"/>
               </a:spcAft>
             </a:pPr>
             <a:r>
-              <a:rPr lang="he-IL" sz="1500" b="0" i="0">
-                <a:solidFill>
-                  <a:srgbClr val="5F6F78"/>
+              <a:rPr sz="2800" b="1" i="0" dirty="0">
+                <a:solidFill>
+                  <a:srgbClr val="1B2B34"/>
+                </a:solidFill>
+                <a:latin typeface="Consolas"/>
+              </a:rPr>
+              <a:t>‎abs‎</a:t>
+            </a:r>
+            <a:r>
+              <a:rPr lang="he-IL" sz="2800" b="0" i="0" dirty="0">
+                <a:solidFill>
+                  <a:srgbClr val="1B2B34"/>
                 </a:solidFill>
                 <a:latin typeface="Arial"/>
                 <a:cs typeface="Arial"/>
               </a:rPr>
-              <a:t>רוצים עוד מכוניות? משנים רק מספר אחד בלולאה - הרשימה עושה את השאר</a:t>
-            </a:r>
-          </a:p>
-        </p:txBody>
-      </p:sp>
-      <p:sp>
-        <p:nvSpPr>
-          <p:cNvPr id="11" name="file-tag"/>
+              <a:t> = מרחק בלי מינוס</a:t>
+            </a:r>
+          </a:p>
+          <a:p>
+            <a:pPr algn="r" rtl="1">
+              <a:spcAft>
+                <a:spcPts val="300"/>
+              </a:spcAft>
+            </a:pPr>
+            <a:r>
+              <a:rPr lang="he-IL" sz="2800" b="0" i="0" dirty="0">
+                <a:solidFill>
+                  <a:srgbClr val="1B2B34"/>
+                </a:solidFill>
+                <a:latin typeface="Arial"/>
+                <a:cs typeface="Arial"/>
+              </a:rPr>
+              <a:t>קרובות גם ב-x וגם ב-y? ← נגעו!</a:t>
+            </a:r>
+          </a:p>
+          <a:p>
+            <a:pPr algn="r" rtl="1">
+              <a:spcAft>
+                <a:spcPts val="300"/>
+              </a:spcAft>
+            </a:pPr>
+            <a:r>
+              <a:rPr lang="he-IL" sz="2800" b="0" i="0" dirty="0">
+                <a:solidFill>
+                  <a:srgbClr val="1B2B34"/>
+                </a:solidFill>
+                <a:latin typeface="Arial"/>
+                <a:cs typeface="Arial"/>
+              </a:rPr>
+              <a:t>הפונקציה מחזירה </a:t>
+            </a:r>
+            <a:r>
+              <a:rPr sz="2800" b="1" i="0" dirty="0">
+                <a:solidFill>
+                  <a:srgbClr val="2D9F5C"/>
+                </a:solidFill>
+                <a:latin typeface="Consolas"/>
+              </a:rPr>
+              <a:t>‎True‎</a:t>
+            </a:r>
+            <a:r>
+              <a:rPr lang="he-IL" sz="2800" b="0" i="0" dirty="0">
+                <a:solidFill>
+                  <a:srgbClr val="1B2B34"/>
+                </a:solidFill>
+                <a:latin typeface="Arial"/>
+                <a:cs typeface="Arial"/>
+              </a:rPr>
+              <a:t> או </a:t>
+            </a:r>
+            <a:r>
+              <a:rPr sz="2800" b="1" i="0" dirty="0">
+                <a:solidFill>
+                  <a:srgbClr val="EF476F"/>
+                </a:solidFill>
+                <a:latin typeface="Consolas"/>
+              </a:rPr>
+              <a:t>‎False‎</a:t>
+            </a:r>
+          </a:p>
+        </p:txBody>
+      </p:sp>
+      <p:sp>
+        <p:nvSpPr>
+          <p:cNvPr id="13" name="file-tag"/>
           <p:cNvSpPr/>
           <p:nvPr/>
         </p:nvSpPr>
@@ -27564,7 +26974,7 @@
                 </a:solidFill>
                 <a:latin typeface="Arial"/>
               </a:rPr>
-              <a:t>car5.py</a:t>
+              <a:t>car4.py</a:t>
             </a:r>
           </a:p>
         </p:txBody>
@@ -27610,8 +27020,8 @@
         </p:nvSpPr>
         <p:spPr>
           <a:xfrm>
-            <a:off x="548640" y="320040"/>
-            <a:ext cx="11091672" cy="777240"/>
+            <a:off x="548640" y="385494"/>
+            <a:ext cx="11091672" cy="646331"/>
           </a:xfrm>
           <a:prstGeom prst="rect">
             <a:avLst/>
@@ -27630,14 +27040,14 @@
               </a:spcAft>
             </a:pPr>
             <a:r>
-              <a:rPr lang="he-IL" sz="3600" b="1" i="0">
+              <a:rPr lang="he-IL" sz="3600" b="1" i="0" dirty="0">
                 <a:solidFill>
                   <a:srgbClr val="1B4332"/>
                 </a:solidFill>
                 <a:latin typeface="Arial"/>
                 <a:cs typeface="Arial"/>
               </a:rPr>
-              <a:t>אתגרים: שדרגו את המשחק</a:t>
+              <a:t>שלב 5: הוספת אויבים + ניקוד</a:t>
             </a:r>
           </a:p>
         </p:txBody>
@@ -27676,25 +27086,25 @@
                 </a:solidFill>
                 <a:latin typeface="Arial"/>
               </a:rPr>
-              <a:t>27</a:t>
-            </a:r>
-          </a:p>
-        </p:txBody>
-      </p:sp>
-      <p:sp>
-        <p:nvSpPr>
-          <p:cNvPr id="4" name="Rounded Rectangle 3"/>
+              <a:t>26</a:t>
+            </a:r>
+          </a:p>
+        </p:txBody>
+      </p:sp>
+      <p:sp>
+        <p:nvSpPr>
+          <p:cNvPr id="4" name="pic-card"/>
           <p:cNvSpPr/>
           <p:nvPr/>
         </p:nvSpPr>
         <p:spPr>
           <a:xfrm>
-            <a:off x="8119872" y="1325880"/>
-            <a:ext cx="3520440" cy="4206240"/>
+            <a:off x="804672" y="1216152"/>
+            <a:ext cx="3213523" cy="4425696"/>
           </a:xfrm>
           <a:prstGeom prst="roundRect">
             <a:avLst>
-              <a:gd name="adj" fmla="val 6000"/>
+              <a:gd name="adj" fmla="val 5000"/>
             </a:avLst>
           </a:prstGeom>
           <a:solidFill>
@@ -27702,7 +27112,7 @@
           </a:solidFill>
           <a:ln w="9525">
             <a:solidFill>
-              <a:srgbClr val="E1E7EA"/>
+              <a:srgbClr val="D5DDE0"/>
             </a:solidFill>
           </a:ln>
           <a:effectLst>
@@ -27735,363 +27145,51 @@
           </a:p>
         </p:txBody>
       </p:sp>
-      <p:sp>
-        <p:nvSpPr>
-          <p:cNvPr id="5" name="Rounded Rectangle 4"/>
+      <p:pic>
+        <p:nvPicPr>
+          <p:cNvPr id="5" name="Picture 4" descr="car5.png"/>
+          <p:cNvPicPr>
+            <a:picLocks noChangeAspect="1"/>
+          </p:cNvPicPr>
+          <p:nvPr/>
+        </p:nvPicPr>
+        <p:blipFill>
+          <a:blip r:embed="rId3"/>
+          <a:stretch>
+            <a:fillRect/>
+          </a:stretch>
+        </p:blipFill>
+        <p:spPr>
+          <a:xfrm>
+            <a:off x="914400" y="1325880"/>
+            <a:ext cx="2994067" cy="4206240"/>
+          </a:xfrm>
+          <a:prstGeom prst="rect">
+            <a:avLst/>
+          </a:prstGeom>
+        </p:spPr>
+      </p:pic>
+      <p:sp>
+        <p:nvSpPr>
+          <p:cNvPr id="6" name="code-bg"/>
           <p:cNvSpPr/>
           <p:nvPr/>
         </p:nvSpPr>
         <p:spPr>
           <a:xfrm>
-            <a:off x="8348472" y="1554480"/>
-            <a:ext cx="3063240" cy="685800"/>
+            <a:off x="4318612" y="1280159"/>
+            <a:ext cx="7321700" cy="1958799"/>
           </a:xfrm>
           <a:prstGeom prst="roundRect">
             <a:avLst>
-              <a:gd name="adj" fmla="val 50000"/>
+              <a:gd name="adj" fmla="val 4000"/>
             </a:avLst>
           </a:prstGeom>
           <a:solidFill>
-            <a:srgbClr val="2D9F5C"/>
+            <a:srgbClr val="1E1E2E"/>
           </a:solidFill>
           <a:ln>
             <a:noFill/>
-          </a:ln>
-        </p:spPr>
-        <p:style>
-          <a:lnRef idx="1">
-            <a:schemeClr val="accent1"/>
-          </a:lnRef>
-          <a:fillRef idx="3">
-            <a:schemeClr val="accent1"/>
-          </a:fillRef>
-          <a:effectRef idx="2">
-            <a:schemeClr val="accent1"/>
-          </a:effectRef>
-          <a:fontRef idx="minor">
-            <a:schemeClr val="lt1"/>
-          </a:fontRef>
-        </p:style>
-        <p:txBody>
-          <a:bodyPr rtlCol="0" anchor="ctr"/>
-          <a:lstStyle/>
-          <a:p>
-            <a:endParaRPr/>
-          </a:p>
-        </p:txBody>
-      </p:sp>
-      <p:sp>
-        <p:nvSpPr>
-          <p:cNvPr id="6" name="TextBox 5"/>
-          <p:cNvSpPr txBox="1"/>
-          <p:nvPr/>
-        </p:nvSpPr>
-        <p:spPr>
-          <a:xfrm>
-            <a:off x="8348472" y="1554480"/>
-            <a:ext cx="3063240" cy="685800"/>
-          </a:xfrm>
-          <a:prstGeom prst="rect">
-            <a:avLst/>
-          </a:prstGeom>
-          <a:noFill/>
-        </p:spPr>
-        <p:txBody>
-          <a:bodyPr wrap="square" lIns="45720" rIns="45720" anchor="ctr">
-            <a:spAutoFit/>
-          </a:bodyPr>
-          <a:lstStyle/>
-          <a:p>
-            <a:pPr algn="ctr" rtl="1">
-              <a:spcAft>
-                <a:spcPts val="400"/>
-              </a:spcAft>
-            </a:pPr>
-            <a:r>
-              <a:rPr lang="he-IL" sz="2200" b="1" i="0">
-                <a:solidFill>
-                  <a:srgbClr val="FFFFFF"/>
-                </a:solidFill>
-                <a:latin typeface="Arial"/>
-                <a:cs typeface="Arial"/>
-              </a:rPr>
-              <a:t>★  קל</a:t>
-            </a:r>
-          </a:p>
-        </p:txBody>
-      </p:sp>
-      <p:sp>
-        <p:nvSpPr>
-          <p:cNvPr id="7" name="Oval 6"/>
-          <p:cNvSpPr/>
-          <p:nvPr/>
-        </p:nvSpPr>
-        <p:spPr>
-          <a:xfrm>
-            <a:off x="11137392" y="2743200"/>
-            <a:ext cx="201168" cy="201168"/>
-          </a:xfrm>
-          <a:prstGeom prst="ellipse">
-            <a:avLst/>
-          </a:prstGeom>
-          <a:solidFill>
-            <a:srgbClr val="2D9F5C"/>
-          </a:solidFill>
-          <a:ln>
-            <a:noFill/>
-          </a:ln>
-        </p:spPr>
-        <p:style>
-          <a:lnRef idx="1">
-            <a:schemeClr val="accent1"/>
-          </a:lnRef>
-          <a:fillRef idx="3">
-            <a:schemeClr val="accent1"/>
-          </a:fillRef>
-          <a:effectRef idx="2">
-            <a:schemeClr val="accent1"/>
-          </a:effectRef>
-          <a:fontRef idx="minor">
-            <a:schemeClr val="lt1"/>
-          </a:fontRef>
-        </p:style>
-        <p:txBody>
-          <a:bodyPr rtlCol="0" anchor="ctr"/>
-          <a:lstStyle/>
-          <a:p>
-            <a:endParaRPr/>
-          </a:p>
-        </p:txBody>
-      </p:sp>
-      <p:sp>
-        <p:nvSpPr>
-          <p:cNvPr id="8" name="TextBox 7"/>
-          <p:cNvSpPr txBox="1"/>
-          <p:nvPr/>
-        </p:nvSpPr>
-        <p:spPr>
-          <a:xfrm>
-            <a:off x="8348472" y="2560320"/>
-            <a:ext cx="2697480" cy="868680"/>
-          </a:xfrm>
-          <a:prstGeom prst="rect">
-            <a:avLst/>
-          </a:prstGeom>
-          <a:noFill/>
-        </p:spPr>
-        <p:txBody>
-          <a:bodyPr wrap="square" lIns="45720" rIns="45720" anchor="t">
-            <a:spAutoFit/>
-          </a:bodyPr>
-          <a:lstStyle/>
-          <a:p>
-            <a:pPr algn="r" rtl="1">
-              <a:spcAft>
-                <a:spcPts val="400"/>
-              </a:spcAft>
-            </a:pPr>
-            <a:r>
-              <a:rPr lang="he-IL" sz="1700" b="0" i="0">
-                <a:solidFill>
-                  <a:srgbClr val="1B2B34"/>
-                </a:solidFill>
-                <a:latin typeface="Arial"/>
-                <a:cs typeface="Arial"/>
-              </a:rPr>
-              <a:t>מכונית חדשה ברשימה ENEMIES</a:t>
-            </a:r>
-          </a:p>
-        </p:txBody>
-      </p:sp>
-      <p:sp>
-        <p:nvSpPr>
-          <p:cNvPr id="9" name="Oval 8"/>
-          <p:cNvSpPr/>
-          <p:nvPr/>
-        </p:nvSpPr>
-        <p:spPr>
-          <a:xfrm>
-            <a:off x="11137392" y="3657600"/>
-            <a:ext cx="201168" cy="201168"/>
-          </a:xfrm>
-          <a:prstGeom prst="ellipse">
-            <a:avLst/>
-          </a:prstGeom>
-          <a:solidFill>
-            <a:srgbClr val="2D9F5C"/>
-          </a:solidFill>
-          <a:ln>
-            <a:noFill/>
-          </a:ln>
-        </p:spPr>
-        <p:style>
-          <a:lnRef idx="1">
-            <a:schemeClr val="accent1"/>
-          </a:lnRef>
-          <a:fillRef idx="3">
-            <a:schemeClr val="accent1"/>
-          </a:fillRef>
-          <a:effectRef idx="2">
-            <a:schemeClr val="accent1"/>
-          </a:effectRef>
-          <a:fontRef idx="minor">
-            <a:schemeClr val="lt1"/>
-          </a:fontRef>
-        </p:style>
-        <p:txBody>
-          <a:bodyPr rtlCol="0" anchor="ctr"/>
-          <a:lstStyle/>
-          <a:p>
-            <a:endParaRPr/>
-          </a:p>
-        </p:txBody>
-      </p:sp>
-      <p:sp>
-        <p:nvSpPr>
-          <p:cNvPr id="10" name="TextBox 9"/>
-          <p:cNvSpPr txBox="1"/>
-          <p:nvPr/>
-        </p:nvSpPr>
-        <p:spPr>
-          <a:xfrm>
-            <a:off x="8348472" y="3474720"/>
-            <a:ext cx="2697480" cy="868680"/>
-          </a:xfrm>
-          <a:prstGeom prst="rect">
-            <a:avLst/>
-          </a:prstGeom>
-          <a:noFill/>
-        </p:spPr>
-        <p:txBody>
-          <a:bodyPr wrap="square" lIns="45720" rIns="45720" anchor="t">
-            <a:spAutoFit/>
-          </a:bodyPr>
-          <a:lstStyle/>
-          <a:p>
-            <a:pPr algn="r" rtl="1">
-              <a:spcAft>
-                <a:spcPts val="400"/>
-              </a:spcAft>
-            </a:pPr>
-            <a:r>
-              <a:rPr lang="he-IL" sz="1700" b="0" i="0">
-                <a:solidFill>
-                  <a:srgbClr val="1B2B34"/>
-                </a:solidFill>
-                <a:latin typeface="Arial"/>
-                <a:cs typeface="Arial"/>
-              </a:rPr>
-              <a:t>ציירו מכונית משלכם</a:t>
-            </a:r>
-          </a:p>
-        </p:txBody>
-      </p:sp>
-      <p:sp>
-        <p:nvSpPr>
-          <p:cNvPr id="11" name="Oval 10"/>
-          <p:cNvSpPr/>
-          <p:nvPr/>
-        </p:nvSpPr>
-        <p:spPr>
-          <a:xfrm>
-            <a:off x="11137392" y="4572000"/>
-            <a:ext cx="201168" cy="201168"/>
-          </a:xfrm>
-          <a:prstGeom prst="ellipse">
-            <a:avLst/>
-          </a:prstGeom>
-          <a:solidFill>
-            <a:srgbClr val="2D9F5C"/>
-          </a:solidFill>
-          <a:ln>
-            <a:noFill/>
-          </a:ln>
-        </p:spPr>
-        <p:style>
-          <a:lnRef idx="1">
-            <a:schemeClr val="accent1"/>
-          </a:lnRef>
-          <a:fillRef idx="3">
-            <a:schemeClr val="accent1"/>
-          </a:fillRef>
-          <a:effectRef idx="2">
-            <a:schemeClr val="accent1"/>
-          </a:effectRef>
-          <a:fontRef idx="minor">
-            <a:schemeClr val="lt1"/>
-          </a:fontRef>
-        </p:style>
-        <p:txBody>
-          <a:bodyPr rtlCol="0" anchor="ctr"/>
-          <a:lstStyle/>
-          <a:p>
-            <a:endParaRPr/>
-          </a:p>
-        </p:txBody>
-      </p:sp>
-      <p:sp>
-        <p:nvSpPr>
-          <p:cNvPr id="12" name="TextBox 11"/>
-          <p:cNvSpPr txBox="1"/>
-          <p:nvPr/>
-        </p:nvSpPr>
-        <p:spPr>
-          <a:xfrm>
-            <a:off x="8348472" y="4389120"/>
-            <a:ext cx="2697480" cy="868680"/>
-          </a:xfrm>
-          <a:prstGeom prst="rect">
-            <a:avLst/>
-          </a:prstGeom>
-          <a:noFill/>
-        </p:spPr>
-        <p:txBody>
-          <a:bodyPr wrap="square" lIns="45720" rIns="45720" anchor="t">
-            <a:spAutoFit/>
-          </a:bodyPr>
-          <a:lstStyle/>
-          <a:p>
-            <a:pPr algn="r" rtl="1">
-              <a:spcAft>
-                <a:spcPts val="400"/>
-              </a:spcAft>
-            </a:pPr>
-            <a:r>
-              <a:rPr lang="he-IL" sz="1700" b="0" i="0">
-                <a:solidFill>
-                  <a:srgbClr val="1B2B34"/>
-                </a:solidFill>
-                <a:latin typeface="Arial"/>
-                <a:cs typeface="Arial"/>
-              </a:rPr>
-              <a:t>מהירות התחלתית אחרת</a:t>
-            </a:r>
-          </a:p>
-        </p:txBody>
-      </p:sp>
-      <p:sp>
-        <p:nvSpPr>
-          <p:cNvPr id="13" name="Rounded Rectangle 12"/>
-          <p:cNvSpPr/>
-          <p:nvPr/>
-        </p:nvSpPr>
-        <p:spPr>
-          <a:xfrm>
-            <a:off x="4334256" y="1325880"/>
-            <a:ext cx="3520440" cy="4206240"/>
-          </a:xfrm>
-          <a:prstGeom prst="roundRect">
-            <a:avLst>
-              <a:gd name="adj" fmla="val 6000"/>
-            </a:avLst>
-          </a:prstGeom>
-          <a:solidFill>
-            <a:srgbClr val="FFFFFF"/>
-          </a:solidFill>
-          <a:ln w="9525">
-            <a:solidFill>
-              <a:srgbClr val="E1E7EA"/>
-            </a:solidFill>
           </a:ln>
           <a:effectLst>
             <a:outerShdw blurRad="76200" dist="19050" dir="5400000" algn="t" rotWithShape="0">
@@ -28125,361 +27223,283 @@
       </p:sp>
       <p:sp>
         <p:nvSpPr>
-          <p:cNvPr id="14" name="Rounded Rectangle 13"/>
+          <p:cNvPr id="7" name="code"/>
+          <p:cNvSpPr txBox="1"/>
+          <p:nvPr/>
+        </p:nvSpPr>
+        <p:spPr>
+          <a:xfrm>
+            <a:off x="4500941" y="1394461"/>
+            <a:ext cx="6912149" cy="1312475"/>
+          </a:xfrm>
+          <a:prstGeom prst="rect">
+            <a:avLst/>
+          </a:prstGeom>
+          <a:noFill/>
+        </p:spPr>
+        <p:txBody>
+          <a:bodyPr wrap="none" lIns="0" tIns="0" rIns="0" bIns="0" anchor="t">
+            <a:spAutoFit/>
+          </a:bodyPr>
+          <a:lstStyle/>
+          <a:p>
+            <a:pPr algn="l" rtl="0">
+              <a:lnSpc>
+                <a:spcPct val="108000"/>
+              </a:lnSpc>
+            </a:pPr>
+            <a:r>
+              <a:rPr sz="2000" b="1" dirty="0">
+                <a:solidFill>
+                  <a:srgbClr val="FF6B9A"/>
+                </a:solidFill>
+                <a:latin typeface="Consolas"/>
+              </a:rPr>
+              <a:t>enemies</a:t>
+            </a:r>
+            <a:r>
+              <a:rPr sz="2000" dirty="0">
+                <a:solidFill>
+                  <a:srgbClr val="E6E6E6"/>
+                </a:solidFill>
+                <a:latin typeface="Consolas"/>
+              </a:rPr>
+              <a:t> = []</a:t>
+            </a:r>
+          </a:p>
+          <a:p>
+            <a:pPr algn="l" rtl="0">
+              <a:lnSpc>
+                <a:spcPct val="108000"/>
+              </a:lnSpc>
+            </a:pPr>
+            <a:r>
+              <a:rPr sz="2000" dirty="0">
+                <a:solidFill>
+                  <a:srgbClr val="FF9F1C"/>
+                </a:solidFill>
+                <a:latin typeface="Consolas"/>
+              </a:rPr>
+              <a:t>for</a:t>
+            </a:r>
+            <a:r>
+              <a:rPr sz="2000" dirty="0">
+                <a:solidFill>
+                  <a:srgbClr val="E6E6E6"/>
+                </a:solidFill>
+                <a:latin typeface="Consolas"/>
+              </a:rPr>
+              <a:t> </a:t>
+            </a:r>
+            <a:r>
+              <a:rPr sz="2000" dirty="0" err="1">
+                <a:solidFill>
+                  <a:srgbClr val="E6E6E6"/>
+                </a:solidFill>
+                <a:latin typeface="Consolas"/>
+              </a:rPr>
+              <a:t>i</a:t>
+            </a:r>
+            <a:r>
+              <a:rPr sz="2000" dirty="0">
+                <a:solidFill>
+                  <a:srgbClr val="E6E6E6"/>
+                </a:solidFill>
+                <a:latin typeface="Consolas"/>
+              </a:rPr>
+              <a:t> </a:t>
+            </a:r>
+            <a:r>
+              <a:rPr sz="2000" dirty="0">
+                <a:solidFill>
+                  <a:srgbClr val="FF9F1C"/>
+                </a:solidFill>
+                <a:latin typeface="Consolas"/>
+              </a:rPr>
+              <a:t>in</a:t>
+            </a:r>
+            <a:r>
+              <a:rPr sz="2000" dirty="0">
+                <a:solidFill>
+                  <a:srgbClr val="E6E6E6"/>
+                </a:solidFill>
+                <a:latin typeface="Consolas"/>
+              </a:rPr>
+              <a:t> </a:t>
+            </a:r>
+            <a:r>
+              <a:rPr sz="2000" dirty="0">
+                <a:solidFill>
+                  <a:srgbClr val="7FDBFF"/>
+                </a:solidFill>
+                <a:latin typeface="Consolas"/>
+              </a:rPr>
+              <a:t>range</a:t>
+            </a:r>
+            <a:r>
+              <a:rPr sz="2000" dirty="0">
+                <a:solidFill>
+                  <a:srgbClr val="E6E6E6"/>
+                </a:solidFill>
+                <a:latin typeface="Consolas"/>
+              </a:rPr>
+              <a:t>(</a:t>
+            </a:r>
+            <a:r>
+              <a:rPr sz="2000" dirty="0">
+                <a:solidFill>
+                  <a:srgbClr val="FFD166"/>
+                </a:solidFill>
+                <a:latin typeface="Consolas"/>
+              </a:rPr>
+              <a:t>3</a:t>
+            </a:r>
+            <a:r>
+              <a:rPr sz="2000" dirty="0">
+                <a:solidFill>
+                  <a:srgbClr val="E6E6E6"/>
+                </a:solidFill>
+                <a:latin typeface="Consolas"/>
+              </a:rPr>
+              <a:t>):</a:t>
+            </a:r>
+          </a:p>
+          <a:p>
+            <a:pPr algn="l" rtl="0">
+              <a:lnSpc>
+                <a:spcPct val="108000"/>
+              </a:lnSpc>
+            </a:pPr>
+            <a:r>
+              <a:rPr sz="2000" dirty="0">
+                <a:solidFill>
+                  <a:srgbClr val="E6E6E6"/>
+                </a:solidFill>
+                <a:latin typeface="Consolas"/>
+              </a:rPr>
+              <a:t>    enemy = </a:t>
+            </a:r>
+            <a:r>
+              <a:rPr sz="2000" dirty="0" err="1">
+                <a:solidFill>
+                  <a:srgbClr val="7FDBFF"/>
+                </a:solidFill>
+                <a:latin typeface="Consolas"/>
+              </a:rPr>
+              <a:t>make_car</a:t>
+            </a:r>
+            <a:r>
+              <a:rPr sz="2000" dirty="0">
+                <a:solidFill>
+                  <a:srgbClr val="E6E6E6"/>
+                </a:solidFill>
+                <a:latin typeface="Consolas"/>
+              </a:rPr>
+              <a:t>(</a:t>
+            </a:r>
+            <a:r>
+              <a:rPr sz="2000" dirty="0" err="1">
+                <a:solidFill>
+                  <a:srgbClr val="E6E6E6"/>
+                </a:solidFill>
+                <a:latin typeface="Consolas"/>
+              </a:rPr>
+              <a:t>random.</a:t>
+            </a:r>
+            <a:r>
+              <a:rPr sz="2000" dirty="0" err="1">
+                <a:solidFill>
+                  <a:srgbClr val="7FDBFF"/>
+                </a:solidFill>
+                <a:latin typeface="Consolas"/>
+              </a:rPr>
+              <a:t>choice</a:t>
+            </a:r>
+            <a:r>
+              <a:rPr sz="2000" dirty="0">
+                <a:solidFill>
+                  <a:srgbClr val="E6E6E6"/>
+                </a:solidFill>
+                <a:latin typeface="Consolas"/>
+              </a:rPr>
+              <a:t>(ENEMIES), ...)</a:t>
+            </a:r>
+          </a:p>
+          <a:p>
+            <a:pPr algn="l" rtl="0">
+              <a:lnSpc>
+                <a:spcPct val="108000"/>
+              </a:lnSpc>
+            </a:pPr>
+            <a:r>
+              <a:rPr sz="2000" dirty="0">
+                <a:solidFill>
+                  <a:srgbClr val="E6E6E6"/>
+                </a:solidFill>
+                <a:latin typeface="Consolas"/>
+              </a:rPr>
+              <a:t>    </a:t>
+            </a:r>
+            <a:r>
+              <a:rPr sz="2000" b="1" dirty="0" err="1">
+                <a:solidFill>
+                  <a:srgbClr val="FF6B9A"/>
+                </a:solidFill>
+                <a:latin typeface="Consolas"/>
+              </a:rPr>
+              <a:t>enemies</a:t>
+            </a:r>
+            <a:r>
+              <a:rPr sz="2000" dirty="0" err="1">
+                <a:solidFill>
+                  <a:srgbClr val="E6E6E6"/>
+                </a:solidFill>
+                <a:latin typeface="Consolas"/>
+              </a:rPr>
+              <a:t>.</a:t>
+            </a:r>
+            <a:r>
+              <a:rPr sz="2000" dirty="0" err="1">
+                <a:solidFill>
+                  <a:srgbClr val="7FDBFF"/>
+                </a:solidFill>
+                <a:latin typeface="Consolas"/>
+              </a:rPr>
+              <a:t>append</a:t>
+            </a:r>
+            <a:r>
+              <a:rPr sz="2000" dirty="0">
+                <a:solidFill>
+                  <a:srgbClr val="E6E6E6"/>
+                </a:solidFill>
+                <a:latin typeface="Consolas"/>
+              </a:rPr>
+              <a:t>(enemy)</a:t>
+            </a:r>
+          </a:p>
+        </p:txBody>
+      </p:sp>
+      <p:sp>
+        <p:nvSpPr>
+          <p:cNvPr id="8" name="code-bg"/>
           <p:cNvSpPr/>
           <p:nvPr/>
         </p:nvSpPr>
         <p:spPr>
           <a:xfrm>
-            <a:off x="4562856" y="1554480"/>
-            <a:ext cx="3063240" cy="685800"/>
+            <a:off x="4318612" y="3536139"/>
+            <a:ext cx="7321700" cy="2810186"/>
           </a:xfrm>
           <a:prstGeom prst="roundRect">
             <a:avLst>
-              <a:gd name="adj" fmla="val 50000"/>
+              <a:gd name="adj" fmla="val 4000"/>
             </a:avLst>
           </a:prstGeom>
           <a:solidFill>
-            <a:srgbClr val="FF9F1C"/>
+            <a:srgbClr val="1E1E2E"/>
           </a:solidFill>
           <a:ln>
             <a:noFill/>
-          </a:ln>
-        </p:spPr>
-        <p:style>
-          <a:lnRef idx="1">
-            <a:schemeClr val="accent1"/>
-          </a:lnRef>
-          <a:fillRef idx="3">
-            <a:schemeClr val="accent1"/>
-          </a:fillRef>
-          <a:effectRef idx="2">
-            <a:schemeClr val="accent1"/>
-          </a:effectRef>
-          <a:fontRef idx="minor">
-            <a:schemeClr val="lt1"/>
-          </a:fontRef>
-        </p:style>
-        <p:txBody>
-          <a:bodyPr rtlCol="0" anchor="ctr"/>
-          <a:lstStyle/>
-          <a:p>
-            <a:endParaRPr/>
-          </a:p>
-        </p:txBody>
-      </p:sp>
-      <p:sp>
-        <p:nvSpPr>
-          <p:cNvPr id="15" name="TextBox 14"/>
-          <p:cNvSpPr txBox="1"/>
-          <p:nvPr/>
-        </p:nvSpPr>
-        <p:spPr>
-          <a:xfrm>
-            <a:off x="4562856" y="1554480"/>
-            <a:ext cx="3063240" cy="685800"/>
-          </a:xfrm>
-          <a:prstGeom prst="rect">
-            <a:avLst/>
-          </a:prstGeom>
-          <a:noFill/>
-        </p:spPr>
-        <p:txBody>
-          <a:bodyPr wrap="square" lIns="45720" rIns="45720" anchor="ctr">
-            <a:spAutoFit/>
-          </a:bodyPr>
-          <a:lstStyle/>
-          <a:p>
-            <a:pPr algn="ctr" rtl="1">
-              <a:spcAft>
-                <a:spcPts val="400"/>
-              </a:spcAft>
-            </a:pPr>
-            <a:r>
-              <a:rPr lang="he-IL" sz="2200" b="1" i="0">
-                <a:solidFill>
-                  <a:srgbClr val="FFFFFF"/>
-                </a:solidFill>
-                <a:latin typeface="Arial"/>
-                <a:cs typeface="Arial"/>
-              </a:rPr>
-              <a:t>★★  בינוני</a:t>
-            </a:r>
-          </a:p>
-        </p:txBody>
-      </p:sp>
-      <p:sp>
-        <p:nvSpPr>
-          <p:cNvPr id="16" name="Oval 15"/>
-          <p:cNvSpPr/>
-          <p:nvPr/>
-        </p:nvSpPr>
-        <p:spPr>
-          <a:xfrm>
-            <a:off x="7351775" y="2743200"/>
-            <a:ext cx="201168" cy="201168"/>
-          </a:xfrm>
-          <a:prstGeom prst="ellipse">
-            <a:avLst/>
-          </a:prstGeom>
-          <a:solidFill>
-            <a:srgbClr val="FF9F1C"/>
-          </a:solidFill>
-          <a:ln>
-            <a:noFill/>
-          </a:ln>
-        </p:spPr>
-        <p:style>
-          <a:lnRef idx="1">
-            <a:schemeClr val="accent1"/>
-          </a:lnRef>
-          <a:fillRef idx="3">
-            <a:schemeClr val="accent1"/>
-          </a:fillRef>
-          <a:effectRef idx="2">
-            <a:schemeClr val="accent1"/>
-          </a:effectRef>
-          <a:fontRef idx="minor">
-            <a:schemeClr val="lt1"/>
-          </a:fontRef>
-        </p:style>
-        <p:txBody>
-          <a:bodyPr rtlCol="0" anchor="ctr"/>
-          <a:lstStyle/>
-          <a:p>
-            <a:endParaRPr/>
-          </a:p>
-        </p:txBody>
-      </p:sp>
-      <p:sp>
-        <p:nvSpPr>
-          <p:cNvPr id="17" name="TextBox 16"/>
-          <p:cNvSpPr txBox="1"/>
-          <p:nvPr/>
-        </p:nvSpPr>
-        <p:spPr>
-          <a:xfrm>
-            <a:off x="4562856" y="2560320"/>
-            <a:ext cx="2697480" cy="868680"/>
-          </a:xfrm>
-          <a:prstGeom prst="rect">
-            <a:avLst/>
-          </a:prstGeom>
-          <a:noFill/>
-        </p:spPr>
-        <p:txBody>
-          <a:bodyPr wrap="square" lIns="45720" rIns="45720" anchor="t">
-            <a:spAutoFit/>
-          </a:bodyPr>
-          <a:lstStyle/>
-          <a:p>
-            <a:pPr algn="r" rtl="1">
-              <a:spcAft>
-                <a:spcPts val="400"/>
-              </a:spcAft>
-            </a:pPr>
-            <a:r>
-              <a:rPr lang="he-IL" sz="1700" b="0" i="0">
-                <a:solidFill>
-                  <a:srgbClr val="1B2B34"/>
-                </a:solidFill>
-                <a:latin typeface="Arial"/>
-                <a:cs typeface="Arial"/>
-              </a:rPr>
-              <a:t>נתיב רביעי וכביש רחב יותר</a:t>
-            </a:r>
-          </a:p>
-        </p:txBody>
-      </p:sp>
-      <p:sp>
-        <p:nvSpPr>
-          <p:cNvPr id="18" name="Oval 17"/>
-          <p:cNvSpPr/>
-          <p:nvPr/>
-        </p:nvSpPr>
-        <p:spPr>
-          <a:xfrm>
-            <a:off x="7351775" y="3657600"/>
-            <a:ext cx="201168" cy="201168"/>
-          </a:xfrm>
-          <a:prstGeom prst="ellipse">
-            <a:avLst/>
-          </a:prstGeom>
-          <a:solidFill>
-            <a:srgbClr val="FF9F1C"/>
-          </a:solidFill>
-          <a:ln>
-            <a:noFill/>
-          </a:ln>
-        </p:spPr>
-        <p:style>
-          <a:lnRef idx="1">
-            <a:schemeClr val="accent1"/>
-          </a:lnRef>
-          <a:fillRef idx="3">
-            <a:schemeClr val="accent1"/>
-          </a:fillRef>
-          <a:effectRef idx="2">
-            <a:schemeClr val="accent1"/>
-          </a:effectRef>
-          <a:fontRef idx="minor">
-            <a:schemeClr val="lt1"/>
-          </a:fontRef>
-        </p:style>
-        <p:txBody>
-          <a:bodyPr rtlCol="0" anchor="ctr"/>
-          <a:lstStyle/>
-          <a:p>
-            <a:endParaRPr/>
-          </a:p>
-        </p:txBody>
-      </p:sp>
-      <p:sp>
-        <p:nvSpPr>
-          <p:cNvPr id="19" name="TextBox 18"/>
-          <p:cNvSpPr txBox="1"/>
-          <p:nvPr/>
-        </p:nvSpPr>
-        <p:spPr>
-          <a:xfrm>
-            <a:off x="4562856" y="3474720"/>
-            <a:ext cx="2697480" cy="868680"/>
-          </a:xfrm>
-          <a:prstGeom prst="rect">
-            <a:avLst/>
-          </a:prstGeom>
-          <a:noFill/>
-        </p:spPr>
-        <p:txBody>
-          <a:bodyPr wrap="square" lIns="45720" rIns="45720" anchor="t">
-            <a:spAutoFit/>
-          </a:bodyPr>
-          <a:lstStyle/>
-          <a:p>
-            <a:pPr algn="r" rtl="1">
-              <a:spcAft>
-                <a:spcPts val="400"/>
-              </a:spcAft>
-            </a:pPr>
-            <a:r>
-              <a:rPr lang="he-IL" sz="1700" b="0" i="0">
-                <a:solidFill>
-                  <a:srgbClr val="1B2B34"/>
-                </a:solidFill>
-                <a:latin typeface="Arial"/>
-                <a:cs typeface="Arial"/>
-              </a:rPr>
-              <a:t>שומרים את השיא הכי גבוה</a:t>
-            </a:r>
-          </a:p>
-        </p:txBody>
-      </p:sp>
-      <p:sp>
-        <p:nvSpPr>
-          <p:cNvPr id="20" name="Oval 19"/>
-          <p:cNvSpPr/>
-          <p:nvPr/>
-        </p:nvSpPr>
-        <p:spPr>
-          <a:xfrm>
-            <a:off x="7351775" y="4572000"/>
-            <a:ext cx="201168" cy="201168"/>
-          </a:xfrm>
-          <a:prstGeom prst="ellipse">
-            <a:avLst/>
-          </a:prstGeom>
-          <a:solidFill>
-            <a:srgbClr val="FF9F1C"/>
-          </a:solidFill>
-          <a:ln>
-            <a:noFill/>
-          </a:ln>
-        </p:spPr>
-        <p:style>
-          <a:lnRef idx="1">
-            <a:schemeClr val="accent1"/>
-          </a:lnRef>
-          <a:fillRef idx="3">
-            <a:schemeClr val="accent1"/>
-          </a:fillRef>
-          <a:effectRef idx="2">
-            <a:schemeClr val="accent1"/>
-          </a:effectRef>
-          <a:fontRef idx="minor">
-            <a:schemeClr val="lt1"/>
-          </a:fontRef>
-        </p:style>
-        <p:txBody>
-          <a:bodyPr rtlCol="0" anchor="ctr"/>
-          <a:lstStyle/>
-          <a:p>
-            <a:endParaRPr/>
-          </a:p>
-        </p:txBody>
-      </p:sp>
-      <p:sp>
-        <p:nvSpPr>
-          <p:cNvPr id="21" name="TextBox 20"/>
-          <p:cNvSpPr txBox="1"/>
-          <p:nvPr/>
-        </p:nvSpPr>
-        <p:spPr>
-          <a:xfrm>
-            <a:off x="4562856" y="4389120"/>
-            <a:ext cx="2697480" cy="868680"/>
-          </a:xfrm>
-          <a:prstGeom prst="rect">
-            <a:avLst/>
-          </a:prstGeom>
-          <a:noFill/>
-        </p:spPr>
-        <p:txBody>
-          <a:bodyPr wrap="square" lIns="45720" rIns="45720" anchor="t">
-            <a:spAutoFit/>
-          </a:bodyPr>
-          <a:lstStyle/>
-          <a:p>
-            <a:pPr algn="r" rtl="1">
-              <a:spcAft>
-                <a:spcPts val="400"/>
-              </a:spcAft>
-            </a:pPr>
-            <a:r>
-              <a:rPr lang="he-IL" sz="1700" b="0" i="0">
-                <a:solidFill>
-                  <a:srgbClr val="1B2B34"/>
-                </a:solidFill>
-                <a:latin typeface="Arial"/>
-                <a:cs typeface="Arial"/>
-              </a:rPr>
-              <a:t>רקע משתנה כל 10 נקודות</a:t>
-            </a:r>
-          </a:p>
-        </p:txBody>
-      </p:sp>
-      <p:sp>
-        <p:nvSpPr>
-          <p:cNvPr id="22" name="Rounded Rectangle 21"/>
-          <p:cNvSpPr/>
-          <p:nvPr/>
-        </p:nvSpPr>
-        <p:spPr>
-          <a:xfrm>
-            <a:off x="548639" y="1325880"/>
-            <a:ext cx="3520440" cy="4206240"/>
-          </a:xfrm>
-          <a:prstGeom prst="roundRect">
-            <a:avLst>
-              <a:gd name="adj" fmla="val 6000"/>
-            </a:avLst>
-          </a:prstGeom>
-          <a:solidFill>
-            <a:srgbClr val="FFFFFF"/>
-          </a:solidFill>
-          <a:ln w="9525">
-            <a:solidFill>
-              <a:srgbClr val="E1E7EA"/>
-            </a:solidFill>
           </a:ln>
           <a:effectLst>
             <a:outerShdw blurRad="76200" dist="19050" dir="5400000" algn="t" rotWithShape="0">
@@ -28513,14 +27533,556 @@
       </p:sp>
       <p:sp>
         <p:nvSpPr>
-          <p:cNvPr id="23" name="Rounded Rectangle 22"/>
+          <p:cNvPr id="9" name="code"/>
+          <p:cNvSpPr txBox="1"/>
+          <p:nvPr/>
+        </p:nvSpPr>
+        <p:spPr>
+          <a:xfrm>
+            <a:off x="4523759" y="3704255"/>
+            <a:ext cx="5078313" cy="2642070"/>
+          </a:xfrm>
+          <a:prstGeom prst="rect">
+            <a:avLst/>
+          </a:prstGeom>
+          <a:noFill/>
+        </p:spPr>
+        <p:txBody>
+          <a:bodyPr wrap="none" lIns="0" tIns="0" rIns="0" bIns="0" anchor="t">
+            <a:spAutoFit/>
+          </a:bodyPr>
+          <a:lstStyle/>
+          <a:p>
+            <a:pPr algn="l" rtl="0">
+              <a:lnSpc>
+                <a:spcPct val="108000"/>
+              </a:lnSpc>
+            </a:pPr>
+            <a:r>
+              <a:rPr sz="2000" dirty="0">
+                <a:solidFill>
+                  <a:srgbClr val="FF9F1C"/>
+                </a:solidFill>
+                <a:latin typeface="Consolas"/>
+              </a:rPr>
+              <a:t>for</a:t>
+            </a:r>
+            <a:r>
+              <a:rPr sz="2000" dirty="0">
+                <a:solidFill>
+                  <a:srgbClr val="E6E6E6"/>
+                </a:solidFill>
+                <a:latin typeface="Consolas"/>
+              </a:rPr>
+              <a:t> enemy </a:t>
+            </a:r>
+            <a:r>
+              <a:rPr sz="2000" dirty="0">
+                <a:solidFill>
+                  <a:srgbClr val="FF9F1C"/>
+                </a:solidFill>
+                <a:latin typeface="Consolas"/>
+              </a:rPr>
+              <a:t>in</a:t>
+            </a:r>
+            <a:r>
+              <a:rPr sz="2000" dirty="0">
+                <a:solidFill>
+                  <a:srgbClr val="E6E6E6"/>
+                </a:solidFill>
+                <a:latin typeface="Consolas"/>
+              </a:rPr>
+              <a:t> </a:t>
+            </a:r>
+            <a:r>
+              <a:rPr sz="2000" b="1" dirty="0">
+                <a:solidFill>
+                  <a:srgbClr val="FF6B9A"/>
+                </a:solidFill>
+                <a:latin typeface="Consolas"/>
+              </a:rPr>
+              <a:t>enemies</a:t>
+            </a:r>
+            <a:r>
+              <a:rPr sz="2000" dirty="0">
+                <a:solidFill>
+                  <a:srgbClr val="E6E6E6"/>
+                </a:solidFill>
+                <a:latin typeface="Consolas"/>
+              </a:rPr>
+              <a:t>:</a:t>
+            </a:r>
+          </a:p>
+          <a:p>
+            <a:pPr algn="l" rtl="0">
+              <a:lnSpc>
+                <a:spcPct val="108000"/>
+              </a:lnSpc>
+            </a:pPr>
+            <a:r>
+              <a:rPr sz="2000" dirty="0">
+                <a:solidFill>
+                  <a:srgbClr val="E6E6E6"/>
+                </a:solidFill>
+                <a:latin typeface="Consolas"/>
+              </a:rPr>
+              <a:t>    </a:t>
+            </a:r>
+            <a:r>
+              <a:rPr sz="2000" dirty="0" err="1">
+                <a:solidFill>
+                  <a:srgbClr val="E6E6E6"/>
+                </a:solidFill>
+                <a:latin typeface="Consolas"/>
+              </a:rPr>
+              <a:t>enemy.</a:t>
+            </a:r>
+            <a:r>
+              <a:rPr sz="2000" dirty="0" err="1">
+                <a:solidFill>
+                  <a:srgbClr val="7FDBFF"/>
+                </a:solidFill>
+                <a:latin typeface="Consolas"/>
+              </a:rPr>
+              <a:t>sety</a:t>
+            </a:r>
+            <a:r>
+              <a:rPr sz="2000" dirty="0">
+                <a:solidFill>
+                  <a:srgbClr val="E6E6E6"/>
+                </a:solidFill>
+                <a:latin typeface="Consolas"/>
+              </a:rPr>
+              <a:t>(</a:t>
+            </a:r>
+            <a:r>
+              <a:rPr sz="2000" dirty="0" err="1">
+                <a:solidFill>
+                  <a:srgbClr val="E6E6E6"/>
+                </a:solidFill>
+                <a:latin typeface="Consolas"/>
+              </a:rPr>
+              <a:t>enemy.</a:t>
+            </a:r>
+            <a:r>
+              <a:rPr sz="2000" dirty="0" err="1">
+                <a:solidFill>
+                  <a:srgbClr val="7FDBFF"/>
+                </a:solidFill>
+                <a:latin typeface="Consolas"/>
+              </a:rPr>
+              <a:t>ycor</a:t>
+            </a:r>
+            <a:r>
+              <a:rPr sz="2000" dirty="0">
+                <a:solidFill>
+                  <a:srgbClr val="E6E6E6"/>
+                </a:solidFill>
+                <a:latin typeface="Consolas"/>
+              </a:rPr>
+              <a:t>() - </a:t>
+            </a:r>
+            <a:r>
+              <a:rPr sz="2000" b="1" dirty="0">
+                <a:solidFill>
+                  <a:srgbClr val="FF6B9A"/>
+                </a:solidFill>
+                <a:latin typeface="Consolas"/>
+              </a:rPr>
+              <a:t>speed</a:t>
+            </a:r>
+            <a:r>
+              <a:rPr sz="2000" dirty="0">
+                <a:solidFill>
+                  <a:srgbClr val="E6E6E6"/>
+                </a:solidFill>
+                <a:latin typeface="Consolas"/>
+              </a:rPr>
+              <a:t>)</a:t>
+            </a:r>
+          </a:p>
+          <a:p>
+            <a:pPr algn="l" rtl="0">
+              <a:lnSpc>
+                <a:spcPct val="108000"/>
+              </a:lnSpc>
+            </a:pPr>
+            <a:r>
+              <a:rPr sz="2000" dirty="0">
+                <a:solidFill>
+                  <a:srgbClr val="E6E6E6"/>
+                </a:solidFill>
+                <a:latin typeface="Consolas"/>
+              </a:rPr>
+              <a:t>    </a:t>
+            </a:r>
+            <a:r>
+              <a:rPr sz="2000" dirty="0">
+                <a:solidFill>
+                  <a:srgbClr val="FF9F1C"/>
+                </a:solidFill>
+                <a:latin typeface="Consolas"/>
+              </a:rPr>
+              <a:t>if</a:t>
+            </a:r>
+            <a:r>
+              <a:rPr sz="2000" dirty="0">
+                <a:solidFill>
+                  <a:srgbClr val="E6E6E6"/>
+                </a:solidFill>
+                <a:latin typeface="Consolas"/>
+              </a:rPr>
+              <a:t> </a:t>
+            </a:r>
+            <a:r>
+              <a:rPr sz="2000" dirty="0" err="1">
+                <a:solidFill>
+                  <a:srgbClr val="E6E6E6"/>
+                </a:solidFill>
+                <a:latin typeface="Consolas"/>
+              </a:rPr>
+              <a:t>enemy.</a:t>
+            </a:r>
+            <a:r>
+              <a:rPr sz="2000" dirty="0" err="1">
+                <a:solidFill>
+                  <a:srgbClr val="7FDBFF"/>
+                </a:solidFill>
+                <a:latin typeface="Consolas"/>
+              </a:rPr>
+              <a:t>ycor</a:t>
+            </a:r>
+            <a:r>
+              <a:rPr sz="2000" dirty="0">
+                <a:solidFill>
+                  <a:srgbClr val="E6E6E6"/>
+                </a:solidFill>
+                <a:latin typeface="Consolas"/>
+              </a:rPr>
+              <a:t>() &lt; -</a:t>
+            </a:r>
+            <a:r>
+              <a:rPr sz="2000" dirty="0">
+                <a:solidFill>
+                  <a:srgbClr val="FFD166"/>
+                </a:solidFill>
+                <a:latin typeface="Consolas"/>
+              </a:rPr>
+              <a:t>400</a:t>
+            </a:r>
+            <a:r>
+              <a:rPr sz="2000" dirty="0">
+                <a:solidFill>
+                  <a:srgbClr val="E6E6E6"/>
+                </a:solidFill>
+                <a:latin typeface="Consolas"/>
+              </a:rPr>
+              <a:t>:</a:t>
+            </a:r>
+          </a:p>
+          <a:p>
+            <a:pPr algn="l" rtl="0">
+              <a:lnSpc>
+                <a:spcPct val="108000"/>
+              </a:lnSpc>
+            </a:pPr>
+            <a:r>
+              <a:rPr sz="2000" dirty="0">
+                <a:solidFill>
+                  <a:srgbClr val="E6E6E6"/>
+                </a:solidFill>
+                <a:latin typeface="Consolas"/>
+              </a:rPr>
+              <a:t>        </a:t>
+            </a:r>
+            <a:r>
+              <a:rPr sz="2000" dirty="0" err="1">
+                <a:solidFill>
+                  <a:srgbClr val="7FDBFF"/>
+                </a:solidFill>
+                <a:latin typeface="Consolas"/>
+              </a:rPr>
+              <a:t>reset_enemy</a:t>
+            </a:r>
+            <a:r>
+              <a:rPr sz="2000" dirty="0">
+                <a:solidFill>
+                  <a:srgbClr val="E6E6E6"/>
+                </a:solidFill>
+                <a:latin typeface="Consolas"/>
+              </a:rPr>
+              <a:t>(enemy)</a:t>
+            </a:r>
+          </a:p>
+          <a:p>
+            <a:pPr algn="l" rtl="0">
+              <a:lnSpc>
+                <a:spcPct val="108000"/>
+              </a:lnSpc>
+            </a:pPr>
+            <a:r>
+              <a:rPr sz="2000" dirty="0">
+                <a:solidFill>
+                  <a:srgbClr val="E6E6E6"/>
+                </a:solidFill>
+                <a:latin typeface="Consolas"/>
+              </a:rPr>
+              <a:t>        </a:t>
+            </a:r>
+            <a:r>
+              <a:rPr sz="2000" b="1" dirty="0">
+                <a:solidFill>
+                  <a:srgbClr val="FF6B9A"/>
+                </a:solidFill>
+                <a:latin typeface="Consolas"/>
+              </a:rPr>
+              <a:t>score</a:t>
+            </a:r>
+            <a:r>
+              <a:rPr sz="2000" dirty="0">
+                <a:solidFill>
+                  <a:srgbClr val="E6E6E6"/>
+                </a:solidFill>
+                <a:latin typeface="Consolas"/>
+              </a:rPr>
+              <a:t> = </a:t>
+            </a:r>
+            <a:r>
+              <a:rPr sz="2000" b="1" dirty="0">
+                <a:solidFill>
+                  <a:srgbClr val="FF6B9A"/>
+                </a:solidFill>
+                <a:latin typeface="Consolas"/>
+              </a:rPr>
+              <a:t>score</a:t>
+            </a:r>
+            <a:r>
+              <a:rPr sz="2000" dirty="0">
+                <a:solidFill>
+                  <a:srgbClr val="E6E6E6"/>
+                </a:solidFill>
+                <a:latin typeface="Consolas"/>
+              </a:rPr>
+              <a:t> + </a:t>
+            </a:r>
+            <a:r>
+              <a:rPr sz="2000" dirty="0">
+                <a:solidFill>
+                  <a:srgbClr val="FFD166"/>
+                </a:solidFill>
+                <a:latin typeface="Consolas"/>
+              </a:rPr>
+              <a:t>1</a:t>
+            </a:r>
+          </a:p>
+          <a:p>
+            <a:pPr algn="l" rtl="0">
+              <a:lnSpc>
+                <a:spcPct val="108000"/>
+              </a:lnSpc>
+            </a:pPr>
+            <a:r>
+              <a:rPr sz="2000" dirty="0">
+                <a:solidFill>
+                  <a:srgbClr val="E6E6E6"/>
+                </a:solidFill>
+                <a:latin typeface="Consolas"/>
+              </a:rPr>
+              <a:t>        </a:t>
+            </a:r>
+            <a:r>
+              <a:rPr sz="2000" b="1" dirty="0">
+                <a:solidFill>
+                  <a:srgbClr val="FF6B9A"/>
+                </a:solidFill>
+                <a:latin typeface="Consolas"/>
+              </a:rPr>
+              <a:t>speed</a:t>
+            </a:r>
+            <a:r>
+              <a:rPr sz="2000" dirty="0">
+                <a:solidFill>
+                  <a:srgbClr val="E6E6E6"/>
+                </a:solidFill>
+                <a:latin typeface="Consolas"/>
+              </a:rPr>
+              <a:t> = </a:t>
+            </a:r>
+            <a:r>
+              <a:rPr sz="2000" b="1" dirty="0">
+                <a:solidFill>
+                  <a:srgbClr val="FF6B9A"/>
+                </a:solidFill>
+                <a:latin typeface="Consolas"/>
+              </a:rPr>
+              <a:t>speed</a:t>
+            </a:r>
+            <a:r>
+              <a:rPr sz="2000" dirty="0">
+                <a:solidFill>
+                  <a:srgbClr val="E6E6E6"/>
+                </a:solidFill>
+                <a:latin typeface="Consolas"/>
+              </a:rPr>
+              <a:t> + </a:t>
+            </a:r>
+            <a:r>
+              <a:rPr sz="2000" dirty="0">
+                <a:solidFill>
+                  <a:srgbClr val="FFD166"/>
+                </a:solidFill>
+                <a:latin typeface="Consolas"/>
+              </a:rPr>
+              <a:t>0.3</a:t>
+            </a:r>
+          </a:p>
+          <a:p>
+            <a:pPr algn="l" rtl="0">
+              <a:lnSpc>
+                <a:spcPct val="108000"/>
+              </a:lnSpc>
+            </a:pPr>
+            <a:r>
+              <a:rPr sz="2000" dirty="0">
+                <a:solidFill>
+                  <a:srgbClr val="E6E6E6"/>
+                </a:solidFill>
+                <a:latin typeface="Consolas"/>
+              </a:rPr>
+              <a:t>    </a:t>
+            </a:r>
+            <a:r>
+              <a:rPr sz="2000" dirty="0">
+                <a:solidFill>
+                  <a:srgbClr val="FF9F1C"/>
+                </a:solidFill>
+                <a:latin typeface="Consolas"/>
+              </a:rPr>
+              <a:t>if</a:t>
+            </a:r>
+            <a:r>
+              <a:rPr sz="2000" dirty="0">
+                <a:solidFill>
+                  <a:srgbClr val="E6E6E6"/>
+                </a:solidFill>
+                <a:latin typeface="Consolas"/>
+              </a:rPr>
+              <a:t> </a:t>
+            </a:r>
+            <a:r>
+              <a:rPr sz="2000" dirty="0">
+                <a:solidFill>
+                  <a:srgbClr val="7FDBFF"/>
+                </a:solidFill>
+                <a:latin typeface="Consolas"/>
+              </a:rPr>
+              <a:t>crashed</a:t>
+            </a:r>
+            <a:r>
+              <a:rPr sz="2000" dirty="0">
+                <a:solidFill>
+                  <a:srgbClr val="E6E6E6"/>
+                </a:solidFill>
+                <a:latin typeface="Consolas"/>
+              </a:rPr>
+              <a:t>(player, enemy):</a:t>
+            </a:r>
+          </a:p>
+          <a:p>
+            <a:pPr algn="l" rtl="0">
+              <a:lnSpc>
+                <a:spcPct val="108000"/>
+              </a:lnSpc>
+            </a:pPr>
+            <a:r>
+              <a:rPr sz="2000" dirty="0">
+                <a:solidFill>
+                  <a:srgbClr val="E6E6E6"/>
+                </a:solidFill>
+                <a:latin typeface="Consolas"/>
+              </a:rPr>
+              <a:t>        </a:t>
+            </a:r>
+            <a:r>
+              <a:rPr sz="2000" dirty="0" err="1">
+                <a:solidFill>
+                  <a:srgbClr val="E6E6E6"/>
+                </a:solidFill>
+                <a:latin typeface="Consolas"/>
+              </a:rPr>
+              <a:t>game_over</a:t>
+            </a:r>
+            <a:r>
+              <a:rPr sz="2000" dirty="0">
+                <a:solidFill>
+                  <a:srgbClr val="E6E6E6"/>
+                </a:solidFill>
+                <a:latin typeface="Consolas"/>
+              </a:rPr>
+              <a:t> = </a:t>
+            </a:r>
+            <a:r>
+              <a:rPr sz="2000" dirty="0">
+                <a:solidFill>
+                  <a:srgbClr val="FF9F1C"/>
+                </a:solidFill>
+                <a:latin typeface="Consolas"/>
+              </a:rPr>
+              <a:t>True</a:t>
+            </a:r>
+          </a:p>
+        </p:txBody>
+      </p:sp>
+      <p:sp>
+        <p:nvSpPr>
+          <p:cNvPr id="10" name="TextBox 9"/>
+          <p:cNvSpPr txBox="1"/>
+          <p:nvPr/>
+        </p:nvSpPr>
+        <p:spPr>
+          <a:xfrm>
+            <a:off x="4219460" y="6400800"/>
+            <a:ext cx="7321700" cy="369332"/>
+          </a:xfrm>
+          <a:prstGeom prst="rect">
+            <a:avLst/>
+          </a:prstGeom>
+          <a:noFill/>
+        </p:spPr>
+        <p:txBody>
+          <a:bodyPr wrap="square" lIns="45720" rIns="45720" anchor="t">
+            <a:spAutoFit/>
+          </a:bodyPr>
+          <a:lstStyle/>
+          <a:p>
+            <a:pPr algn="r" rtl="1">
+              <a:spcAft>
+                <a:spcPts val="400"/>
+              </a:spcAft>
+            </a:pPr>
+            <a:r>
+              <a:rPr lang="he-IL" b="0" i="0" dirty="0">
+                <a:solidFill>
+                  <a:srgbClr val="5F6F78"/>
+                </a:solidFill>
+                <a:latin typeface="Arial"/>
+                <a:cs typeface="Arial"/>
+              </a:rPr>
+              <a:t>רוצים עוד מכוניות? משנים רק מספר אחד בלולאה - הרשימה עושה את השאר</a:t>
+            </a:r>
+          </a:p>
+        </p:txBody>
+      </p:sp>
+      <p:sp>
+        <p:nvSpPr>
+          <p:cNvPr id="11" name="file-tag"/>
           <p:cNvSpPr/>
           <p:nvPr/>
         </p:nvSpPr>
         <p:spPr>
           <a:xfrm>
-            <a:off x="777239" y="1554480"/>
-            <a:ext cx="3063240" cy="685800"/>
+            <a:off x="1325880" y="5760720"/>
+            <a:ext cx="2377440" cy="502920"/>
           </a:xfrm>
           <a:prstGeom prst="roundRect">
             <a:avLst>
@@ -28528,7 +28090,7 @@
             </a:avLst>
           </a:prstGeom>
           <a:solidFill>
-            <a:srgbClr val="EF476F"/>
+            <a:srgbClr val="FF9F1C"/>
           </a:solidFill>
           <a:ln>
             <a:noFill/>
@@ -28549,347 +28111,31 @@
           </a:fontRef>
         </p:style>
         <p:txBody>
-          <a:bodyPr rtlCol="0" anchor="ctr"/>
-          <a:lstStyle/>
-          <a:p>
-            <a:endParaRPr/>
-          </a:p>
-        </p:txBody>
-      </p:sp>
-      <p:sp>
-        <p:nvSpPr>
-          <p:cNvPr id="24" name="TextBox 23"/>
-          <p:cNvSpPr txBox="1"/>
-          <p:nvPr/>
-        </p:nvSpPr>
-        <p:spPr>
-          <a:xfrm>
-            <a:off x="777239" y="1554480"/>
-            <a:ext cx="3063240" cy="685800"/>
-          </a:xfrm>
-          <a:prstGeom prst="rect">
-            <a:avLst/>
-          </a:prstGeom>
-          <a:noFill/>
-        </p:spPr>
-        <p:txBody>
-          <a:bodyPr wrap="square" lIns="45720" rIns="45720" anchor="ctr">
-            <a:spAutoFit/>
-          </a:bodyPr>
-          <a:lstStyle/>
-          <a:p>
-            <a:pPr algn="ctr" rtl="1">
+          <a:bodyPr wrap="square" lIns="0" tIns="0" rIns="0" bIns="0" rtlCol="0" anchor="ctr"/>
+          <a:lstStyle/>
+          <a:p>
+            <a:pPr algn="ctr" rtl="0">
               <a:spcAft>
-                <a:spcPts val="400"/>
+                <a:spcPts val="0"/>
               </a:spcAft>
             </a:pPr>
             <a:r>
-              <a:rPr lang="he-IL" sz="2200" b="1" i="0">
+              <a:rPr sz="1700" b="1" i="0">
                 <a:solidFill>
                   <a:srgbClr val="FFFFFF"/>
                 </a:solidFill>
+                <a:latin typeface="Consolas"/>
+              </a:rPr>
+              <a:t>&lt;/&gt;  </a:t>
+            </a:r>
+            <a:r>
+              <a:rPr sz="1700" b="1" i="0">
+                <a:solidFill>
+                  <a:srgbClr val="FFFFFF"/>
+                </a:solidFill>
                 <a:latin typeface="Arial"/>
-                <a:cs typeface="Arial"/>
-              </a:rPr>
-              <a:t>★★★  אלופים</a:t>
-            </a:r>
-          </a:p>
-        </p:txBody>
-      </p:sp>
-      <p:sp>
-        <p:nvSpPr>
-          <p:cNvPr id="25" name="Oval 24"/>
-          <p:cNvSpPr/>
-          <p:nvPr/>
-        </p:nvSpPr>
-        <p:spPr>
-          <a:xfrm>
-            <a:off x="3566160" y="2743200"/>
-            <a:ext cx="201168" cy="201168"/>
-          </a:xfrm>
-          <a:prstGeom prst="ellipse">
-            <a:avLst/>
-          </a:prstGeom>
-          <a:solidFill>
-            <a:srgbClr val="EF476F"/>
-          </a:solidFill>
-          <a:ln>
-            <a:noFill/>
-          </a:ln>
-        </p:spPr>
-        <p:style>
-          <a:lnRef idx="1">
-            <a:schemeClr val="accent1"/>
-          </a:lnRef>
-          <a:fillRef idx="3">
-            <a:schemeClr val="accent1"/>
-          </a:fillRef>
-          <a:effectRef idx="2">
-            <a:schemeClr val="accent1"/>
-          </a:effectRef>
-          <a:fontRef idx="minor">
-            <a:schemeClr val="lt1"/>
-          </a:fontRef>
-        </p:style>
-        <p:txBody>
-          <a:bodyPr rtlCol="0" anchor="ctr"/>
-          <a:lstStyle/>
-          <a:p>
-            <a:endParaRPr/>
-          </a:p>
-        </p:txBody>
-      </p:sp>
-      <p:sp>
-        <p:nvSpPr>
-          <p:cNvPr id="26" name="TextBox 25"/>
-          <p:cNvSpPr txBox="1"/>
-          <p:nvPr/>
-        </p:nvSpPr>
-        <p:spPr>
-          <a:xfrm>
-            <a:off x="777239" y="2560320"/>
-            <a:ext cx="2697480" cy="868680"/>
-          </a:xfrm>
-          <a:prstGeom prst="rect">
-            <a:avLst/>
-          </a:prstGeom>
-          <a:noFill/>
-        </p:spPr>
-        <p:txBody>
-          <a:bodyPr wrap="square" lIns="45720" rIns="45720" anchor="t">
-            <a:spAutoFit/>
-          </a:bodyPr>
-          <a:lstStyle/>
-          <a:p>
-            <a:pPr algn="r" rtl="1">
-              <a:spcAft>
-                <a:spcPts val="400"/>
-              </a:spcAft>
-            </a:pPr>
-            <a:r>
-              <a:rPr lang="he-IL" sz="1700" b="0" i="0">
-                <a:solidFill>
-                  <a:srgbClr val="1B2B34"/>
-                </a:solidFill>
-                <a:latin typeface="Arial"/>
-                <a:cs typeface="Arial"/>
-              </a:rPr>
-              <a:t>3 חיים במקום 1</a:t>
-            </a:r>
-          </a:p>
-        </p:txBody>
-      </p:sp>
-      <p:sp>
-        <p:nvSpPr>
-          <p:cNvPr id="27" name="Oval 26"/>
-          <p:cNvSpPr/>
-          <p:nvPr/>
-        </p:nvSpPr>
-        <p:spPr>
-          <a:xfrm>
-            <a:off x="3566160" y="3657600"/>
-            <a:ext cx="201168" cy="201168"/>
-          </a:xfrm>
-          <a:prstGeom prst="ellipse">
-            <a:avLst/>
-          </a:prstGeom>
-          <a:solidFill>
-            <a:srgbClr val="EF476F"/>
-          </a:solidFill>
-          <a:ln>
-            <a:noFill/>
-          </a:ln>
-        </p:spPr>
-        <p:style>
-          <a:lnRef idx="1">
-            <a:schemeClr val="accent1"/>
-          </a:lnRef>
-          <a:fillRef idx="3">
-            <a:schemeClr val="accent1"/>
-          </a:fillRef>
-          <a:effectRef idx="2">
-            <a:schemeClr val="accent1"/>
-          </a:effectRef>
-          <a:fontRef idx="minor">
-            <a:schemeClr val="lt1"/>
-          </a:fontRef>
-        </p:style>
-        <p:txBody>
-          <a:bodyPr rtlCol="0" anchor="ctr"/>
-          <a:lstStyle/>
-          <a:p>
-            <a:endParaRPr/>
-          </a:p>
-        </p:txBody>
-      </p:sp>
-      <p:sp>
-        <p:nvSpPr>
-          <p:cNvPr id="28" name="TextBox 27"/>
-          <p:cNvSpPr txBox="1"/>
-          <p:nvPr/>
-        </p:nvSpPr>
-        <p:spPr>
-          <a:xfrm>
-            <a:off x="777239" y="3474720"/>
-            <a:ext cx="2697480" cy="868680"/>
-          </a:xfrm>
-          <a:prstGeom prst="rect">
-            <a:avLst/>
-          </a:prstGeom>
-          <a:noFill/>
-        </p:spPr>
-        <p:txBody>
-          <a:bodyPr wrap="square" lIns="45720" rIns="45720" anchor="t">
-            <a:spAutoFit/>
-          </a:bodyPr>
-          <a:lstStyle/>
-          <a:p>
-            <a:pPr algn="r" rtl="1">
-              <a:spcAft>
-                <a:spcPts val="400"/>
-              </a:spcAft>
-            </a:pPr>
-            <a:r>
-              <a:rPr lang="he-IL" sz="1700" b="0" i="0">
-                <a:solidFill>
-                  <a:srgbClr val="1B2B34"/>
-                </a:solidFill>
-                <a:latin typeface="Arial"/>
-                <a:cs typeface="Arial"/>
-              </a:rPr>
-              <a:t>מטבעות לאיסוף = בונוס</a:t>
-            </a:r>
-          </a:p>
-        </p:txBody>
-      </p:sp>
-      <p:sp>
-        <p:nvSpPr>
-          <p:cNvPr id="29" name="Oval 28"/>
-          <p:cNvSpPr/>
-          <p:nvPr/>
-        </p:nvSpPr>
-        <p:spPr>
-          <a:xfrm>
-            <a:off x="3566160" y="4572000"/>
-            <a:ext cx="201168" cy="201168"/>
-          </a:xfrm>
-          <a:prstGeom prst="ellipse">
-            <a:avLst/>
-          </a:prstGeom>
-          <a:solidFill>
-            <a:srgbClr val="EF476F"/>
-          </a:solidFill>
-          <a:ln>
-            <a:noFill/>
-          </a:ln>
-        </p:spPr>
-        <p:style>
-          <a:lnRef idx="1">
-            <a:schemeClr val="accent1"/>
-          </a:lnRef>
-          <a:fillRef idx="3">
-            <a:schemeClr val="accent1"/>
-          </a:fillRef>
-          <a:effectRef idx="2">
-            <a:schemeClr val="accent1"/>
-          </a:effectRef>
-          <a:fontRef idx="minor">
-            <a:schemeClr val="lt1"/>
-          </a:fontRef>
-        </p:style>
-        <p:txBody>
-          <a:bodyPr rtlCol="0" anchor="ctr"/>
-          <a:lstStyle/>
-          <a:p>
-            <a:endParaRPr/>
-          </a:p>
-        </p:txBody>
-      </p:sp>
-      <p:sp>
-        <p:nvSpPr>
-          <p:cNvPr id="30" name="TextBox 29"/>
-          <p:cNvSpPr txBox="1"/>
-          <p:nvPr/>
-        </p:nvSpPr>
-        <p:spPr>
-          <a:xfrm>
-            <a:off x="777239" y="4389120"/>
-            <a:ext cx="2697480" cy="868680"/>
-          </a:xfrm>
-          <a:prstGeom prst="rect">
-            <a:avLst/>
-          </a:prstGeom>
-          <a:noFill/>
-        </p:spPr>
-        <p:txBody>
-          <a:bodyPr wrap="square" lIns="45720" rIns="45720" anchor="t">
-            <a:spAutoFit/>
-          </a:bodyPr>
-          <a:lstStyle/>
-          <a:p>
-            <a:pPr algn="r" rtl="1">
-              <a:spcAft>
-                <a:spcPts val="400"/>
-              </a:spcAft>
-            </a:pPr>
-            <a:r>
-              <a:rPr lang="he-IL" sz="1700" b="0" i="0">
-                <a:solidFill>
-                  <a:srgbClr val="1B2B34"/>
-                </a:solidFill>
-                <a:latin typeface="Arial"/>
-                <a:cs typeface="Arial"/>
-              </a:rPr>
-              <a:t>רווח = משחק חדש</a:t>
-            </a:r>
-          </a:p>
-        </p:txBody>
-      </p:sp>
-      <p:sp>
-        <p:nvSpPr>
-          <p:cNvPr id="31" name="TextBox 30"/>
-          <p:cNvSpPr txBox="1"/>
-          <p:nvPr/>
-        </p:nvSpPr>
-        <p:spPr>
-          <a:xfrm>
-            <a:off x="548640" y="5760720"/>
-            <a:ext cx="11091672" cy="457200"/>
-          </a:xfrm>
-          <a:prstGeom prst="rect">
-            <a:avLst/>
-          </a:prstGeom>
-          <a:noFill/>
-        </p:spPr>
-        <p:txBody>
-          <a:bodyPr wrap="square" lIns="45720" rIns="45720" anchor="t">
-            <a:spAutoFit/>
-          </a:bodyPr>
-          <a:lstStyle/>
-          <a:p>
-            <a:pPr algn="ctr" rtl="1">
-              <a:spcAft>
-                <a:spcPts val="400"/>
-              </a:spcAft>
-            </a:pPr>
-            <a:r>
-              <a:rPr lang="he-IL" sz="1600" b="0" i="0">
-                <a:solidFill>
-                  <a:srgbClr val="5F6F78"/>
-                </a:solidFill>
-                <a:latin typeface="Arial"/>
-                <a:cs typeface="Arial"/>
-              </a:rPr>
-              <a:t>רמזים לאתגרים נמצאים בסוף הקובץ </a:t>
-            </a:r>
-            <a:r>
-              <a:rPr sz="1600" b="1" i="0">
-                <a:solidFill>
-                  <a:srgbClr val="5F6F78"/>
-                </a:solidFill>
-                <a:latin typeface="Consolas"/>
-              </a:rPr>
-              <a:t>‎car5.py‎</a:t>
+              </a:rPr>
+              <a:t>car5.py</a:t>
             </a:r>
           </a:p>
         </p:txBody>
@@ -30476,16 +29722,49 @@
           </a:p>
         </p:txBody>
       </p:sp>
-      <p:sp>
-        <p:nvSpPr>
-          <p:cNvPr id="15" name="TextBox 14"/>
+    </p:spTree>
+  </p:cSld>
+  <p:clrMapOvr>
+    <a:masterClrMapping/>
+  </p:clrMapOvr>
+</p:sld>
+</file>
+
+<file path=ppt/slides/slide31.xml><?xml version="1.0" encoding="utf-8"?>
+<p:sld xmlns:a="http://schemas.openxmlformats.org/drawingml/2006/main" xmlns:r="http://schemas.openxmlformats.org/officeDocument/2006/relationships" xmlns:p="http://schemas.openxmlformats.org/presentationml/2006/main">
+  <p:cSld>
+    <p:bg>
+      <p:bgPr>
+        <a:solidFill>
+          <a:srgbClr val="FFFFFF"/>
+        </a:solidFill>
+        <a:effectLst/>
+      </p:bgPr>
+    </p:bg>
+    <p:spTree>
+      <p:nvGrpSpPr>
+        <p:cNvPr id="1" name=""/>
+        <p:cNvGrpSpPr/>
+        <p:nvPr/>
+      </p:nvGrpSpPr>
+      <p:grpSpPr>
+        <a:xfrm>
+          <a:off x="0" y="0"/>
+          <a:ext cx="0" cy="0"/>
+          <a:chOff x="0" y="0"/>
+          <a:chExt cx="0" cy="0"/>
+        </a:xfrm>
+      </p:grpSpPr>
+      <p:sp>
+        <p:nvSpPr>
+          <p:cNvPr id="2" name="TextBox 1"/>
           <p:cNvSpPr txBox="1"/>
           <p:nvPr/>
         </p:nvSpPr>
         <p:spPr>
           <a:xfrm>
-            <a:off x="548640" y="5532120"/>
-            <a:ext cx="11091672" cy="548640"/>
+            <a:off x="548640" y="108495"/>
+            <a:ext cx="11091672" cy="1200329"/>
           </a:xfrm>
           <a:prstGeom prst="rect">
             <a:avLst/>
@@ -30493,7 +29772,185 @@
           <a:noFill/>
         </p:spPr>
         <p:txBody>
+          <a:bodyPr wrap="square" lIns="45720" rIns="45720" anchor="ctr">
+            <a:spAutoFit/>
+          </a:bodyPr>
+          <a:lstStyle/>
+          <a:p>
+            <a:pPr algn="r" rtl="1">
+              <a:spcAft>
+                <a:spcPts val="400"/>
+              </a:spcAft>
+            </a:pPr>
+            <a:r>
+              <a:rPr lang="he-IL" sz="3600" b="1" i="0" dirty="0">
+                <a:solidFill>
+                  <a:srgbClr val="1B4332"/>
+                </a:solidFill>
+                <a:latin typeface="Arial"/>
+                <a:cs typeface="Arial"/>
+              </a:rPr>
+              <a:t>שיעורי בית: שדרגו את המשחק (להגיש את קל ואחד מבינוני)</a:t>
+            </a:r>
+          </a:p>
+        </p:txBody>
+      </p:sp>
+      <p:sp>
+        <p:nvSpPr>
+          <p:cNvPr id="3" name="TextBox 2"/>
+          <p:cNvSpPr txBox="1"/>
+          <p:nvPr/>
+        </p:nvSpPr>
+        <p:spPr>
+          <a:xfrm>
+            <a:off x="320040" y="6382512"/>
+            <a:ext cx="548640" cy="274320"/>
+          </a:xfrm>
+          <a:prstGeom prst="rect">
+            <a:avLst/>
+          </a:prstGeom>
+          <a:noFill/>
+        </p:spPr>
+        <p:txBody>
           <a:bodyPr wrap="square" lIns="45720" rIns="45720" anchor="t">
+            <a:spAutoFit/>
+          </a:bodyPr>
+          <a:lstStyle/>
+          <a:p>
+            <a:pPr algn="l" rtl="0">
+              <a:spcAft>
+                <a:spcPts val="400"/>
+              </a:spcAft>
+            </a:pPr>
+            <a:r>
+              <a:rPr sz="1000" b="0" i="0">
+                <a:solidFill>
+                  <a:srgbClr val="2D9F5C"/>
+                </a:solidFill>
+                <a:latin typeface="Arial"/>
+              </a:rPr>
+              <a:t>27</a:t>
+            </a:r>
+          </a:p>
+        </p:txBody>
+      </p:sp>
+      <p:sp>
+        <p:nvSpPr>
+          <p:cNvPr id="4" name="Rounded Rectangle 3"/>
+          <p:cNvSpPr/>
+          <p:nvPr/>
+        </p:nvSpPr>
+        <p:spPr>
+          <a:xfrm>
+            <a:off x="8119872" y="1325880"/>
+            <a:ext cx="3520440" cy="4206240"/>
+          </a:xfrm>
+          <a:prstGeom prst="roundRect">
+            <a:avLst>
+              <a:gd name="adj" fmla="val 6000"/>
+            </a:avLst>
+          </a:prstGeom>
+          <a:solidFill>
+            <a:srgbClr val="FFFFFF"/>
+          </a:solidFill>
+          <a:ln w="9525">
+            <a:solidFill>
+              <a:srgbClr val="E1E7EA"/>
+            </a:solidFill>
+          </a:ln>
+          <a:effectLst>
+            <a:outerShdw blurRad="76200" dist="19050" dir="5400000" algn="t" rotWithShape="0">
+              <a:srgbClr val="000000">
+                <a:alpha val="16000"/>
+              </a:srgbClr>
+            </a:outerShdw>
+          </a:effectLst>
+        </p:spPr>
+        <p:style>
+          <a:lnRef idx="1">
+            <a:schemeClr val="accent1"/>
+          </a:lnRef>
+          <a:fillRef idx="3">
+            <a:schemeClr val="accent1"/>
+          </a:fillRef>
+          <a:effectRef idx="2">
+            <a:schemeClr val="accent1"/>
+          </a:effectRef>
+          <a:fontRef idx="minor">
+            <a:schemeClr val="lt1"/>
+          </a:fontRef>
+        </p:style>
+        <p:txBody>
+          <a:bodyPr rtlCol="0" anchor="ctr"/>
+          <a:lstStyle/>
+          <a:p>
+            <a:endParaRPr/>
+          </a:p>
+        </p:txBody>
+      </p:sp>
+      <p:sp>
+        <p:nvSpPr>
+          <p:cNvPr id="5" name="Rounded Rectangle 4"/>
+          <p:cNvSpPr/>
+          <p:nvPr/>
+        </p:nvSpPr>
+        <p:spPr>
+          <a:xfrm>
+            <a:off x="8348472" y="1554480"/>
+            <a:ext cx="3063240" cy="685800"/>
+          </a:xfrm>
+          <a:prstGeom prst="roundRect">
+            <a:avLst>
+              <a:gd name="adj" fmla="val 50000"/>
+            </a:avLst>
+          </a:prstGeom>
+          <a:solidFill>
+            <a:srgbClr val="2D9F5C"/>
+          </a:solidFill>
+          <a:ln>
+            <a:noFill/>
+          </a:ln>
+        </p:spPr>
+        <p:style>
+          <a:lnRef idx="1">
+            <a:schemeClr val="accent1"/>
+          </a:lnRef>
+          <a:fillRef idx="3">
+            <a:schemeClr val="accent1"/>
+          </a:fillRef>
+          <a:effectRef idx="2">
+            <a:schemeClr val="accent1"/>
+          </a:effectRef>
+          <a:fontRef idx="minor">
+            <a:schemeClr val="lt1"/>
+          </a:fontRef>
+        </p:style>
+        <p:txBody>
+          <a:bodyPr rtlCol="0" anchor="ctr"/>
+          <a:lstStyle/>
+          <a:p>
+            <a:endParaRPr/>
+          </a:p>
+        </p:txBody>
+      </p:sp>
+      <p:sp>
+        <p:nvSpPr>
+          <p:cNvPr id="6" name="TextBox 5"/>
+          <p:cNvSpPr txBox="1"/>
+          <p:nvPr/>
+        </p:nvSpPr>
+        <p:spPr>
+          <a:xfrm>
+            <a:off x="8348472" y="1554480"/>
+            <a:ext cx="3063240" cy="685800"/>
+          </a:xfrm>
+          <a:prstGeom prst="rect">
+            <a:avLst/>
+          </a:prstGeom>
+          <a:noFill/>
+        </p:spPr>
+        <p:txBody>
+          <a:bodyPr wrap="square" lIns="45720" rIns="45720" anchor="ctr">
             <a:spAutoFit/>
           </a:bodyPr>
           <a:lstStyle/>
@@ -30504,24 +29961,1087 @@
               </a:spcAft>
             </a:pPr>
             <a:r>
-              <a:rPr lang="he-IL" sz="2000" b="1" i="0">
-                <a:solidFill>
-                  <a:srgbClr val="FFD166"/>
+              <a:rPr lang="he-IL" sz="2200" b="1" i="0">
+                <a:solidFill>
+                  <a:srgbClr val="FFFFFF"/>
                 </a:solidFill>
                 <a:latin typeface="Arial"/>
                 <a:cs typeface="Arial"/>
               </a:rPr>
-              <a:t>בפעם הבאה: </a:t>
-            </a:r>
-            <a:r>
-              <a:rPr lang="he-IL" sz="2000" b="0" i="0">
-                <a:solidFill>
-                  <a:srgbClr val="FFFFFF"/>
+              <a:t>★  קל</a:t>
+            </a:r>
+          </a:p>
+        </p:txBody>
+      </p:sp>
+      <p:sp>
+        <p:nvSpPr>
+          <p:cNvPr id="7" name="Oval 6"/>
+          <p:cNvSpPr/>
+          <p:nvPr/>
+        </p:nvSpPr>
+        <p:spPr>
+          <a:xfrm>
+            <a:off x="11137392" y="2743200"/>
+            <a:ext cx="201168" cy="201168"/>
+          </a:xfrm>
+          <a:prstGeom prst="ellipse">
+            <a:avLst/>
+          </a:prstGeom>
+          <a:solidFill>
+            <a:srgbClr val="2D9F5C"/>
+          </a:solidFill>
+          <a:ln>
+            <a:noFill/>
+          </a:ln>
+        </p:spPr>
+        <p:style>
+          <a:lnRef idx="1">
+            <a:schemeClr val="accent1"/>
+          </a:lnRef>
+          <a:fillRef idx="3">
+            <a:schemeClr val="accent1"/>
+          </a:fillRef>
+          <a:effectRef idx="2">
+            <a:schemeClr val="accent1"/>
+          </a:effectRef>
+          <a:fontRef idx="minor">
+            <a:schemeClr val="lt1"/>
+          </a:fontRef>
+        </p:style>
+        <p:txBody>
+          <a:bodyPr rtlCol="0" anchor="ctr"/>
+          <a:lstStyle/>
+          <a:p>
+            <a:endParaRPr/>
+          </a:p>
+        </p:txBody>
+      </p:sp>
+      <p:sp>
+        <p:nvSpPr>
+          <p:cNvPr id="8" name="TextBox 7"/>
+          <p:cNvSpPr txBox="1"/>
+          <p:nvPr/>
+        </p:nvSpPr>
+        <p:spPr>
+          <a:xfrm>
+            <a:off x="8348472" y="2560320"/>
+            <a:ext cx="2697480" cy="928459"/>
+          </a:xfrm>
+          <a:prstGeom prst="rect">
+            <a:avLst/>
+          </a:prstGeom>
+          <a:noFill/>
+        </p:spPr>
+        <p:txBody>
+          <a:bodyPr wrap="square" lIns="45720" rIns="45720" anchor="t">
+            <a:spAutoFit/>
+          </a:bodyPr>
+          <a:lstStyle/>
+          <a:p>
+            <a:pPr algn="r" rtl="1">
+              <a:spcAft>
+                <a:spcPts val="400"/>
+              </a:spcAft>
+            </a:pPr>
+            <a:r>
+              <a:rPr lang="he-IL" sz="1700" b="0" i="0" dirty="0">
+                <a:solidFill>
+                  <a:srgbClr val="1B2B34"/>
                 </a:solidFill>
                 <a:latin typeface="Arial"/>
                 <a:cs typeface="Arial"/>
               </a:rPr>
-              <a:t>מוסיפים למשחק משהו משלכם - תביאו רעיון!</a:t>
+              <a:t>הוסף מכונית חדשה ברשימה ENEMIES בעזרת התמונה</a:t>
+            </a:r>
+          </a:p>
+          <a:p>
+            <a:pPr algn="r" rtl="1">
+              <a:spcAft>
+                <a:spcPts val="400"/>
+              </a:spcAft>
+            </a:pPr>
+            <a:r>
+              <a:rPr lang="en-US" sz="1700" dirty="0">
+                <a:solidFill>
+                  <a:srgbClr val="1B2B34"/>
+                </a:solidFill>
+                <a:latin typeface="Arial"/>
+                <a:cs typeface="Arial"/>
+              </a:rPr>
+              <a:t>image1.gif</a:t>
+            </a:r>
+            <a:endParaRPr lang="he-IL" sz="1700" b="0" i="0" dirty="0">
+              <a:solidFill>
+                <a:srgbClr val="1B2B34"/>
+              </a:solidFill>
+              <a:latin typeface="Arial"/>
+              <a:cs typeface="Arial"/>
+            </a:endParaRPr>
+          </a:p>
+        </p:txBody>
+      </p:sp>
+      <p:sp>
+        <p:nvSpPr>
+          <p:cNvPr id="9" name="Oval 8"/>
+          <p:cNvSpPr/>
+          <p:nvPr/>
+        </p:nvSpPr>
+        <p:spPr>
+          <a:xfrm>
+            <a:off x="11137392" y="3657600"/>
+            <a:ext cx="201168" cy="201168"/>
+          </a:xfrm>
+          <a:prstGeom prst="ellipse">
+            <a:avLst/>
+          </a:prstGeom>
+          <a:solidFill>
+            <a:srgbClr val="2D9F5C"/>
+          </a:solidFill>
+          <a:ln>
+            <a:noFill/>
+          </a:ln>
+        </p:spPr>
+        <p:style>
+          <a:lnRef idx="1">
+            <a:schemeClr val="accent1"/>
+          </a:lnRef>
+          <a:fillRef idx="3">
+            <a:schemeClr val="accent1"/>
+          </a:fillRef>
+          <a:effectRef idx="2">
+            <a:schemeClr val="accent1"/>
+          </a:effectRef>
+          <a:fontRef idx="minor">
+            <a:schemeClr val="lt1"/>
+          </a:fontRef>
+        </p:style>
+        <p:txBody>
+          <a:bodyPr rtlCol="0" anchor="ctr"/>
+          <a:lstStyle/>
+          <a:p>
+            <a:endParaRPr/>
+          </a:p>
+        </p:txBody>
+      </p:sp>
+      <p:sp>
+        <p:nvSpPr>
+          <p:cNvPr id="10" name="TextBox 9"/>
+          <p:cNvSpPr txBox="1"/>
+          <p:nvPr/>
+        </p:nvSpPr>
+        <p:spPr>
+          <a:xfrm>
+            <a:off x="8348472" y="3474720"/>
+            <a:ext cx="2697480" cy="666849"/>
+          </a:xfrm>
+          <a:prstGeom prst="rect">
+            <a:avLst/>
+          </a:prstGeom>
+          <a:noFill/>
+        </p:spPr>
+        <p:txBody>
+          <a:bodyPr wrap="square" lIns="45720" rIns="45720" anchor="t">
+            <a:spAutoFit/>
+          </a:bodyPr>
+          <a:lstStyle/>
+          <a:p>
+            <a:pPr algn="r" rtl="1">
+              <a:spcAft>
+                <a:spcPts val="400"/>
+              </a:spcAft>
+            </a:pPr>
+            <a:r>
+              <a:rPr lang="he-IL" sz="1700" b="0" i="0" dirty="0">
+                <a:solidFill>
+                  <a:srgbClr val="1B2B34"/>
+                </a:solidFill>
+                <a:latin typeface="Arial"/>
+                <a:cs typeface="Arial"/>
+              </a:rPr>
+              <a:t>בחרו אויב משלכם מהאתר:</a:t>
+            </a:r>
+          </a:p>
+          <a:p>
+            <a:pPr algn="r" rtl="1">
+              <a:spcAft>
+                <a:spcPts val="400"/>
+              </a:spcAft>
+            </a:pPr>
+            <a:r>
+              <a:rPr lang="en-US" sz="1700" dirty="0">
+                <a:solidFill>
+                  <a:srgbClr val="1B2B34"/>
+                </a:solidFill>
+                <a:latin typeface="Arial"/>
+                <a:cs typeface="Arial"/>
+              </a:rPr>
+              <a:t>https://gifcities.org/</a:t>
+            </a:r>
+            <a:endParaRPr lang="he-IL" sz="1700" b="0" i="0" dirty="0">
+              <a:solidFill>
+                <a:srgbClr val="1B2B34"/>
+              </a:solidFill>
+              <a:latin typeface="Arial"/>
+              <a:cs typeface="Arial"/>
+            </a:endParaRPr>
+          </a:p>
+        </p:txBody>
+      </p:sp>
+      <p:sp>
+        <p:nvSpPr>
+          <p:cNvPr id="11" name="Oval 10"/>
+          <p:cNvSpPr/>
+          <p:nvPr/>
+        </p:nvSpPr>
+        <p:spPr>
+          <a:xfrm>
+            <a:off x="11137392" y="4572000"/>
+            <a:ext cx="201168" cy="201168"/>
+          </a:xfrm>
+          <a:prstGeom prst="ellipse">
+            <a:avLst/>
+          </a:prstGeom>
+          <a:solidFill>
+            <a:srgbClr val="2D9F5C"/>
+          </a:solidFill>
+          <a:ln>
+            <a:noFill/>
+          </a:ln>
+        </p:spPr>
+        <p:style>
+          <a:lnRef idx="1">
+            <a:schemeClr val="accent1"/>
+          </a:lnRef>
+          <a:fillRef idx="3">
+            <a:schemeClr val="accent1"/>
+          </a:fillRef>
+          <a:effectRef idx="2">
+            <a:schemeClr val="accent1"/>
+          </a:effectRef>
+          <a:fontRef idx="minor">
+            <a:schemeClr val="lt1"/>
+          </a:fontRef>
+        </p:style>
+        <p:txBody>
+          <a:bodyPr rtlCol="0" anchor="ctr"/>
+          <a:lstStyle/>
+          <a:p>
+            <a:endParaRPr/>
+          </a:p>
+        </p:txBody>
+      </p:sp>
+      <p:sp>
+        <p:nvSpPr>
+          <p:cNvPr id="12" name="TextBox 11"/>
+          <p:cNvSpPr txBox="1"/>
+          <p:nvPr/>
+        </p:nvSpPr>
+        <p:spPr>
+          <a:xfrm>
+            <a:off x="8348472" y="4389120"/>
+            <a:ext cx="2697480" cy="868680"/>
+          </a:xfrm>
+          <a:prstGeom prst="rect">
+            <a:avLst/>
+          </a:prstGeom>
+          <a:noFill/>
+        </p:spPr>
+        <p:txBody>
+          <a:bodyPr wrap="square" lIns="45720" rIns="45720" anchor="t">
+            <a:spAutoFit/>
+          </a:bodyPr>
+          <a:lstStyle/>
+          <a:p>
+            <a:pPr algn="r" rtl="1">
+              <a:spcAft>
+                <a:spcPts val="400"/>
+              </a:spcAft>
+            </a:pPr>
+            <a:r>
+              <a:rPr lang="he-IL" sz="1700" b="0" i="0">
+                <a:solidFill>
+                  <a:srgbClr val="1B2B34"/>
+                </a:solidFill>
+                <a:latin typeface="Arial"/>
+                <a:cs typeface="Arial"/>
+              </a:rPr>
+              <a:t>מהירות התחלתית אחרת</a:t>
+            </a:r>
+          </a:p>
+        </p:txBody>
+      </p:sp>
+      <p:sp>
+        <p:nvSpPr>
+          <p:cNvPr id="13" name="Rounded Rectangle 12"/>
+          <p:cNvSpPr/>
+          <p:nvPr/>
+        </p:nvSpPr>
+        <p:spPr>
+          <a:xfrm>
+            <a:off x="4334256" y="1325880"/>
+            <a:ext cx="3520440" cy="4206240"/>
+          </a:xfrm>
+          <a:prstGeom prst="roundRect">
+            <a:avLst>
+              <a:gd name="adj" fmla="val 6000"/>
+            </a:avLst>
+          </a:prstGeom>
+          <a:solidFill>
+            <a:srgbClr val="FFFFFF"/>
+          </a:solidFill>
+          <a:ln w="9525">
+            <a:solidFill>
+              <a:srgbClr val="E1E7EA"/>
+            </a:solidFill>
+          </a:ln>
+          <a:effectLst>
+            <a:outerShdw blurRad="76200" dist="19050" dir="5400000" algn="t" rotWithShape="0">
+              <a:srgbClr val="000000">
+                <a:alpha val="16000"/>
+              </a:srgbClr>
+            </a:outerShdw>
+          </a:effectLst>
+        </p:spPr>
+        <p:style>
+          <a:lnRef idx="1">
+            <a:schemeClr val="accent1"/>
+          </a:lnRef>
+          <a:fillRef idx="3">
+            <a:schemeClr val="accent1"/>
+          </a:fillRef>
+          <a:effectRef idx="2">
+            <a:schemeClr val="accent1"/>
+          </a:effectRef>
+          <a:fontRef idx="minor">
+            <a:schemeClr val="lt1"/>
+          </a:fontRef>
+        </p:style>
+        <p:txBody>
+          <a:bodyPr rtlCol="0" anchor="ctr"/>
+          <a:lstStyle/>
+          <a:p>
+            <a:endParaRPr/>
+          </a:p>
+        </p:txBody>
+      </p:sp>
+      <p:sp>
+        <p:nvSpPr>
+          <p:cNvPr id="14" name="Rounded Rectangle 13"/>
+          <p:cNvSpPr/>
+          <p:nvPr/>
+        </p:nvSpPr>
+        <p:spPr>
+          <a:xfrm>
+            <a:off x="4562856" y="1554480"/>
+            <a:ext cx="3063240" cy="685800"/>
+          </a:xfrm>
+          <a:prstGeom prst="roundRect">
+            <a:avLst>
+              <a:gd name="adj" fmla="val 50000"/>
+            </a:avLst>
+          </a:prstGeom>
+          <a:solidFill>
+            <a:srgbClr val="FF9F1C"/>
+          </a:solidFill>
+          <a:ln>
+            <a:noFill/>
+          </a:ln>
+        </p:spPr>
+        <p:style>
+          <a:lnRef idx="1">
+            <a:schemeClr val="accent1"/>
+          </a:lnRef>
+          <a:fillRef idx="3">
+            <a:schemeClr val="accent1"/>
+          </a:fillRef>
+          <a:effectRef idx="2">
+            <a:schemeClr val="accent1"/>
+          </a:effectRef>
+          <a:fontRef idx="minor">
+            <a:schemeClr val="lt1"/>
+          </a:fontRef>
+        </p:style>
+        <p:txBody>
+          <a:bodyPr rtlCol="0" anchor="ctr"/>
+          <a:lstStyle/>
+          <a:p>
+            <a:endParaRPr/>
+          </a:p>
+        </p:txBody>
+      </p:sp>
+      <p:sp>
+        <p:nvSpPr>
+          <p:cNvPr id="15" name="TextBox 14"/>
+          <p:cNvSpPr txBox="1"/>
+          <p:nvPr/>
+        </p:nvSpPr>
+        <p:spPr>
+          <a:xfrm>
+            <a:off x="4562856" y="1554480"/>
+            <a:ext cx="3063240" cy="685800"/>
+          </a:xfrm>
+          <a:prstGeom prst="rect">
+            <a:avLst/>
+          </a:prstGeom>
+          <a:noFill/>
+        </p:spPr>
+        <p:txBody>
+          <a:bodyPr wrap="square" lIns="45720" rIns="45720" anchor="ctr">
+            <a:spAutoFit/>
+          </a:bodyPr>
+          <a:lstStyle/>
+          <a:p>
+            <a:pPr algn="ctr" rtl="1">
+              <a:spcAft>
+                <a:spcPts val="400"/>
+              </a:spcAft>
+            </a:pPr>
+            <a:r>
+              <a:rPr lang="he-IL" sz="2200" b="1" i="0">
+                <a:solidFill>
+                  <a:srgbClr val="FFFFFF"/>
+                </a:solidFill>
+                <a:latin typeface="Arial"/>
+                <a:cs typeface="Arial"/>
+              </a:rPr>
+              <a:t>★★  בינוני</a:t>
+            </a:r>
+          </a:p>
+        </p:txBody>
+      </p:sp>
+      <p:sp>
+        <p:nvSpPr>
+          <p:cNvPr id="16" name="Oval 15"/>
+          <p:cNvSpPr/>
+          <p:nvPr/>
+        </p:nvSpPr>
+        <p:spPr>
+          <a:xfrm>
+            <a:off x="7351775" y="2743200"/>
+            <a:ext cx="201168" cy="201168"/>
+          </a:xfrm>
+          <a:prstGeom prst="ellipse">
+            <a:avLst/>
+          </a:prstGeom>
+          <a:solidFill>
+            <a:srgbClr val="FF9F1C"/>
+          </a:solidFill>
+          <a:ln>
+            <a:noFill/>
+          </a:ln>
+        </p:spPr>
+        <p:style>
+          <a:lnRef idx="1">
+            <a:schemeClr val="accent1"/>
+          </a:lnRef>
+          <a:fillRef idx="3">
+            <a:schemeClr val="accent1"/>
+          </a:fillRef>
+          <a:effectRef idx="2">
+            <a:schemeClr val="accent1"/>
+          </a:effectRef>
+          <a:fontRef idx="minor">
+            <a:schemeClr val="lt1"/>
+          </a:fontRef>
+        </p:style>
+        <p:txBody>
+          <a:bodyPr rtlCol="0" anchor="ctr"/>
+          <a:lstStyle/>
+          <a:p>
+            <a:endParaRPr/>
+          </a:p>
+        </p:txBody>
+      </p:sp>
+      <p:sp>
+        <p:nvSpPr>
+          <p:cNvPr id="17" name="TextBox 16"/>
+          <p:cNvSpPr txBox="1"/>
+          <p:nvPr/>
+        </p:nvSpPr>
+        <p:spPr>
+          <a:xfrm>
+            <a:off x="4562856" y="2560320"/>
+            <a:ext cx="2697480" cy="615553"/>
+          </a:xfrm>
+          <a:prstGeom prst="rect">
+            <a:avLst/>
+          </a:prstGeom>
+          <a:noFill/>
+        </p:spPr>
+        <p:txBody>
+          <a:bodyPr wrap="square" lIns="45720" rIns="45720" anchor="t">
+            <a:spAutoFit/>
+          </a:bodyPr>
+          <a:lstStyle/>
+          <a:p>
+            <a:pPr algn="r" rtl="1">
+              <a:spcAft>
+                <a:spcPts val="400"/>
+              </a:spcAft>
+            </a:pPr>
+            <a:r>
+              <a:rPr lang="he-IL" sz="1700" b="0" i="0" dirty="0">
+                <a:solidFill>
+                  <a:srgbClr val="1B2B34"/>
+                </a:solidFill>
+                <a:latin typeface="Arial"/>
+                <a:cs typeface="Arial"/>
+              </a:rPr>
+              <a:t>הוסף נתיב רביעי וכביש רחב יותר</a:t>
+            </a:r>
+          </a:p>
+        </p:txBody>
+      </p:sp>
+      <p:sp>
+        <p:nvSpPr>
+          <p:cNvPr id="18" name="Oval 17"/>
+          <p:cNvSpPr/>
+          <p:nvPr/>
+        </p:nvSpPr>
+        <p:spPr>
+          <a:xfrm>
+            <a:off x="7351775" y="3657600"/>
+            <a:ext cx="201168" cy="201168"/>
+          </a:xfrm>
+          <a:prstGeom prst="ellipse">
+            <a:avLst/>
+          </a:prstGeom>
+          <a:solidFill>
+            <a:srgbClr val="FF9F1C"/>
+          </a:solidFill>
+          <a:ln>
+            <a:noFill/>
+          </a:ln>
+        </p:spPr>
+        <p:style>
+          <a:lnRef idx="1">
+            <a:schemeClr val="accent1"/>
+          </a:lnRef>
+          <a:fillRef idx="3">
+            <a:schemeClr val="accent1"/>
+          </a:fillRef>
+          <a:effectRef idx="2">
+            <a:schemeClr val="accent1"/>
+          </a:effectRef>
+          <a:fontRef idx="minor">
+            <a:schemeClr val="lt1"/>
+          </a:fontRef>
+        </p:style>
+        <p:txBody>
+          <a:bodyPr rtlCol="0" anchor="ctr"/>
+          <a:lstStyle/>
+          <a:p>
+            <a:endParaRPr/>
+          </a:p>
+        </p:txBody>
+      </p:sp>
+      <p:sp>
+        <p:nvSpPr>
+          <p:cNvPr id="19" name="TextBox 18"/>
+          <p:cNvSpPr txBox="1"/>
+          <p:nvPr/>
+        </p:nvSpPr>
+        <p:spPr>
+          <a:xfrm>
+            <a:off x="4562856" y="3474720"/>
+            <a:ext cx="2697480" cy="868680"/>
+          </a:xfrm>
+          <a:prstGeom prst="rect">
+            <a:avLst/>
+          </a:prstGeom>
+          <a:noFill/>
+        </p:spPr>
+        <p:txBody>
+          <a:bodyPr wrap="square" lIns="45720" rIns="45720" anchor="t">
+            <a:spAutoFit/>
+          </a:bodyPr>
+          <a:lstStyle/>
+          <a:p>
+            <a:pPr algn="r" rtl="1">
+              <a:spcAft>
+                <a:spcPts val="400"/>
+              </a:spcAft>
+            </a:pPr>
+            <a:r>
+              <a:rPr lang="he-IL" sz="1700" b="0" i="0">
+                <a:solidFill>
+                  <a:srgbClr val="1B2B34"/>
+                </a:solidFill>
+                <a:latin typeface="Arial"/>
+                <a:cs typeface="Arial"/>
+              </a:rPr>
+              <a:t>שומרים את השיא הכי גבוה</a:t>
+            </a:r>
+          </a:p>
+        </p:txBody>
+      </p:sp>
+      <p:sp>
+        <p:nvSpPr>
+          <p:cNvPr id="20" name="Oval 19"/>
+          <p:cNvSpPr/>
+          <p:nvPr/>
+        </p:nvSpPr>
+        <p:spPr>
+          <a:xfrm>
+            <a:off x="7351775" y="4572000"/>
+            <a:ext cx="201168" cy="201168"/>
+          </a:xfrm>
+          <a:prstGeom prst="ellipse">
+            <a:avLst/>
+          </a:prstGeom>
+          <a:solidFill>
+            <a:srgbClr val="FF9F1C"/>
+          </a:solidFill>
+          <a:ln>
+            <a:noFill/>
+          </a:ln>
+        </p:spPr>
+        <p:style>
+          <a:lnRef idx="1">
+            <a:schemeClr val="accent1"/>
+          </a:lnRef>
+          <a:fillRef idx="3">
+            <a:schemeClr val="accent1"/>
+          </a:fillRef>
+          <a:effectRef idx="2">
+            <a:schemeClr val="accent1"/>
+          </a:effectRef>
+          <a:fontRef idx="minor">
+            <a:schemeClr val="lt1"/>
+          </a:fontRef>
+        </p:style>
+        <p:txBody>
+          <a:bodyPr rtlCol="0" anchor="ctr"/>
+          <a:lstStyle/>
+          <a:p>
+            <a:endParaRPr/>
+          </a:p>
+        </p:txBody>
+      </p:sp>
+      <p:sp>
+        <p:nvSpPr>
+          <p:cNvPr id="21" name="TextBox 20"/>
+          <p:cNvSpPr txBox="1"/>
+          <p:nvPr/>
+        </p:nvSpPr>
+        <p:spPr>
+          <a:xfrm>
+            <a:off x="4562856" y="4389120"/>
+            <a:ext cx="2697480" cy="868680"/>
+          </a:xfrm>
+          <a:prstGeom prst="rect">
+            <a:avLst/>
+          </a:prstGeom>
+          <a:noFill/>
+        </p:spPr>
+        <p:txBody>
+          <a:bodyPr wrap="square" lIns="45720" rIns="45720" anchor="t">
+            <a:spAutoFit/>
+          </a:bodyPr>
+          <a:lstStyle/>
+          <a:p>
+            <a:pPr algn="r" rtl="1">
+              <a:spcAft>
+                <a:spcPts val="400"/>
+              </a:spcAft>
+            </a:pPr>
+            <a:r>
+              <a:rPr lang="he-IL" sz="1700" b="0" i="0">
+                <a:solidFill>
+                  <a:srgbClr val="1B2B34"/>
+                </a:solidFill>
+                <a:latin typeface="Arial"/>
+                <a:cs typeface="Arial"/>
+              </a:rPr>
+              <a:t>רקע משתנה כל 10 נקודות</a:t>
+            </a:r>
+          </a:p>
+        </p:txBody>
+      </p:sp>
+      <p:sp>
+        <p:nvSpPr>
+          <p:cNvPr id="22" name="Rounded Rectangle 21"/>
+          <p:cNvSpPr/>
+          <p:nvPr/>
+        </p:nvSpPr>
+        <p:spPr>
+          <a:xfrm>
+            <a:off x="548639" y="1325880"/>
+            <a:ext cx="3520440" cy="4206240"/>
+          </a:xfrm>
+          <a:prstGeom prst="roundRect">
+            <a:avLst>
+              <a:gd name="adj" fmla="val 6000"/>
+            </a:avLst>
+          </a:prstGeom>
+          <a:solidFill>
+            <a:srgbClr val="FFFFFF"/>
+          </a:solidFill>
+          <a:ln w="9525">
+            <a:solidFill>
+              <a:srgbClr val="E1E7EA"/>
+            </a:solidFill>
+          </a:ln>
+          <a:effectLst>
+            <a:outerShdw blurRad="76200" dist="19050" dir="5400000" algn="t" rotWithShape="0">
+              <a:srgbClr val="000000">
+                <a:alpha val="16000"/>
+              </a:srgbClr>
+            </a:outerShdw>
+          </a:effectLst>
+        </p:spPr>
+        <p:style>
+          <a:lnRef idx="1">
+            <a:schemeClr val="accent1"/>
+          </a:lnRef>
+          <a:fillRef idx="3">
+            <a:schemeClr val="accent1"/>
+          </a:fillRef>
+          <a:effectRef idx="2">
+            <a:schemeClr val="accent1"/>
+          </a:effectRef>
+          <a:fontRef idx="minor">
+            <a:schemeClr val="lt1"/>
+          </a:fontRef>
+        </p:style>
+        <p:txBody>
+          <a:bodyPr rtlCol="0" anchor="ctr"/>
+          <a:lstStyle/>
+          <a:p>
+            <a:endParaRPr/>
+          </a:p>
+        </p:txBody>
+      </p:sp>
+      <p:sp>
+        <p:nvSpPr>
+          <p:cNvPr id="23" name="Rounded Rectangle 22"/>
+          <p:cNvSpPr/>
+          <p:nvPr/>
+        </p:nvSpPr>
+        <p:spPr>
+          <a:xfrm>
+            <a:off x="777239" y="1554480"/>
+            <a:ext cx="3063240" cy="685800"/>
+          </a:xfrm>
+          <a:prstGeom prst="roundRect">
+            <a:avLst>
+              <a:gd name="adj" fmla="val 50000"/>
+            </a:avLst>
+          </a:prstGeom>
+          <a:solidFill>
+            <a:srgbClr val="EF476F"/>
+          </a:solidFill>
+          <a:ln>
+            <a:noFill/>
+          </a:ln>
+        </p:spPr>
+        <p:style>
+          <a:lnRef idx="1">
+            <a:schemeClr val="accent1"/>
+          </a:lnRef>
+          <a:fillRef idx="3">
+            <a:schemeClr val="accent1"/>
+          </a:fillRef>
+          <a:effectRef idx="2">
+            <a:schemeClr val="accent1"/>
+          </a:effectRef>
+          <a:fontRef idx="minor">
+            <a:schemeClr val="lt1"/>
+          </a:fontRef>
+        </p:style>
+        <p:txBody>
+          <a:bodyPr rtlCol="0" anchor="ctr"/>
+          <a:lstStyle/>
+          <a:p>
+            <a:endParaRPr/>
+          </a:p>
+        </p:txBody>
+      </p:sp>
+      <p:sp>
+        <p:nvSpPr>
+          <p:cNvPr id="24" name="TextBox 23"/>
+          <p:cNvSpPr txBox="1"/>
+          <p:nvPr/>
+        </p:nvSpPr>
+        <p:spPr>
+          <a:xfrm>
+            <a:off x="777239" y="1554480"/>
+            <a:ext cx="3063240" cy="685800"/>
+          </a:xfrm>
+          <a:prstGeom prst="rect">
+            <a:avLst/>
+          </a:prstGeom>
+          <a:noFill/>
+        </p:spPr>
+        <p:txBody>
+          <a:bodyPr wrap="square" lIns="45720" rIns="45720" anchor="ctr">
+            <a:spAutoFit/>
+          </a:bodyPr>
+          <a:lstStyle/>
+          <a:p>
+            <a:pPr algn="ctr" rtl="1">
+              <a:spcAft>
+                <a:spcPts val="400"/>
+              </a:spcAft>
+            </a:pPr>
+            <a:r>
+              <a:rPr lang="he-IL" sz="2200" b="1" i="0">
+                <a:solidFill>
+                  <a:srgbClr val="FFFFFF"/>
+                </a:solidFill>
+                <a:latin typeface="Arial"/>
+                <a:cs typeface="Arial"/>
+              </a:rPr>
+              <a:t>★★★  אלופים</a:t>
+            </a:r>
+          </a:p>
+        </p:txBody>
+      </p:sp>
+      <p:sp>
+        <p:nvSpPr>
+          <p:cNvPr id="25" name="Oval 24"/>
+          <p:cNvSpPr/>
+          <p:nvPr/>
+        </p:nvSpPr>
+        <p:spPr>
+          <a:xfrm>
+            <a:off x="3566160" y="2743200"/>
+            <a:ext cx="201168" cy="201168"/>
+          </a:xfrm>
+          <a:prstGeom prst="ellipse">
+            <a:avLst/>
+          </a:prstGeom>
+          <a:solidFill>
+            <a:srgbClr val="EF476F"/>
+          </a:solidFill>
+          <a:ln>
+            <a:noFill/>
+          </a:ln>
+        </p:spPr>
+        <p:style>
+          <a:lnRef idx="1">
+            <a:schemeClr val="accent1"/>
+          </a:lnRef>
+          <a:fillRef idx="3">
+            <a:schemeClr val="accent1"/>
+          </a:fillRef>
+          <a:effectRef idx="2">
+            <a:schemeClr val="accent1"/>
+          </a:effectRef>
+          <a:fontRef idx="minor">
+            <a:schemeClr val="lt1"/>
+          </a:fontRef>
+        </p:style>
+        <p:txBody>
+          <a:bodyPr rtlCol="0" anchor="ctr"/>
+          <a:lstStyle/>
+          <a:p>
+            <a:endParaRPr/>
+          </a:p>
+        </p:txBody>
+      </p:sp>
+      <p:sp>
+        <p:nvSpPr>
+          <p:cNvPr id="26" name="TextBox 25"/>
+          <p:cNvSpPr txBox="1"/>
+          <p:nvPr/>
+        </p:nvSpPr>
+        <p:spPr>
+          <a:xfrm>
+            <a:off x="777239" y="2560320"/>
+            <a:ext cx="2697480" cy="868680"/>
+          </a:xfrm>
+          <a:prstGeom prst="rect">
+            <a:avLst/>
+          </a:prstGeom>
+          <a:noFill/>
+        </p:spPr>
+        <p:txBody>
+          <a:bodyPr wrap="square" lIns="45720" rIns="45720" anchor="t">
+            <a:spAutoFit/>
+          </a:bodyPr>
+          <a:lstStyle/>
+          <a:p>
+            <a:pPr algn="r" rtl="1">
+              <a:spcAft>
+                <a:spcPts val="400"/>
+              </a:spcAft>
+            </a:pPr>
+            <a:r>
+              <a:rPr lang="he-IL" sz="1700" b="0" i="0">
+                <a:solidFill>
+                  <a:srgbClr val="1B2B34"/>
+                </a:solidFill>
+                <a:latin typeface="Arial"/>
+                <a:cs typeface="Arial"/>
+              </a:rPr>
+              <a:t>3 חיים במקום 1</a:t>
+            </a:r>
+          </a:p>
+        </p:txBody>
+      </p:sp>
+      <p:sp>
+        <p:nvSpPr>
+          <p:cNvPr id="27" name="Oval 26"/>
+          <p:cNvSpPr/>
+          <p:nvPr/>
+        </p:nvSpPr>
+        <p:spPr>
+          <a:xfrm>
+            <a:off x="3566160" y="3657600"/>
+            <a:ext cx="201168" cy="201168"/>
+          </a:xfrm>
+          <a:prstGeom prst="ellipse">
+            <a:avLst/>
+          </a:prstGeom>
+          <a:solidFill>
+            <a:srgbClr val="EF476F"/>
+          </a:solidFill>
+          <a:ln>
+            <a:noFill/>
+          </a:ln>
+        </p:spPr>
+        <p:style>
+          <a:lnRef idx="1">
+            <a:schemeClr val="accent1"/>
+          </a:lnRef>
+          <a:fillRef idx="3">
+            <a:schemeClr val="accent1"/>
+          </a:fillRef>
+          <a:effectRef idx="2">
+            <a:schemeClr val="accent1"/>
+          </a:effectRef>
+          <a:fontRef idx="minor">
+            <a:schemeClr val="lt1"/>
+          </a:fontRef>
+        </p:style>
+        <p:txBody>
+          <a:bodyPr rtlCol="0" anchor="ctr"/>
+          <a:lstStyle/>
+          <a:p>
+            <a:endParaRPr/>
+          </a:p>
+        </p:txBody>
+      </p:sp>
+      <p:sp>
+        <p:nvSpPr>
+          <p:cNvPr id="28" name="TextBox 27"/>
+          <p:cNvSpPr txBox="1"/>
+          <p:nvPr/>
+        </p:nvSpPr>
+        <p:spPr>
+          <a:xfrm>
+            <a:off x="777239" y="3474720"/>
+            <a:ext cx="2697480" cy="868680"/>
+          </a:xfrm>
+          <a:prstGeom prst="rect">
+            <a:avLst/>
+          </a:prstGeom>
+          <a:noFill/>
+        </p:spPr>
+        <p:txBody>
+          <a:bodyPr wrap="square" lIns="45720" rIns="45720" anchor="t">
+            <a:spAutoFit/>
+          </a:bodyPr>
+          <a:lstStyle/>
+          <a:p>
+            <a:pPr algn="r" rtl="1">
+              <a:spcAft>
+                <a:spcPts val="400"/>
+              </a:spcAft>
+            </a:pPr>
+            <a:r>
+              <a:rPr lang="he-IL" sz="1700" b="0" i="0">
+                <a:solidFill>
+                  <a:srgbClr val="1B2B34"/>
+                </a:solidFill>
+                <a:latin typeface="Arial"/>
+                <a:cs typeface="Arial"/>
+              </a:rPr>
+              <a:t>מטבעות לאיסוף = בונוס</a:t>
+            </a:r>
+          </a:p>
+        </p:txBody>
+      </p:sp>
+      <p:sp>
+        <p:nvSpPr>
+          <p:cNvPr id="29" name="Oval 28"/>
+          <p:cNvSpPr/>
+          <p:nvPr/>
+        </p:nvSpPr>
+        <p:spPr>
+          <a:xfrm>
+            <a:off x="3566160" y="4572000"/>
+            <a:ext cx="201168" cy="201168"/>
+          </a:xfrm>
+          <a:prstGeom prst="ellipse">
+            <a:avLst/>
+          </a:prstGeom>
+          <a:solidFill>
+            <a:srgbClr val="EF476F"/>
+          </a:solidFill>
+          <a:ln>
+            <a:noFill/>
+          </a:ln>
+        </p:spPr>
+        <p:style>
+          <a:lnRef idx="1">
+            <a:schemeClr val="accent1"/>
+          </a:lnRef>
+          <a:fillRef idx="3">
+            <a:schemeClr val="accent1"/>
+          </a:fillRef>
+          <a:effectRef idx="2">
+            <a:schemeClr val="accent1"/>
+          </a:effectRef>
+          <a:fontRef idx="minor">
+            <a:schemeClr val="lt1"/>
+          </a:fontRef>
+        </p:style>
+        <p:txBody>
+          <a:bodyPr rtlCol="0" anchor="ctr"/>
+          <a:lstStyle/>
+          <a:p>
+            <a:endParaRPr/>
+          </a:p>
+        </p:txBody>
+      </p:sp>
+      <p:sp>
+        <p:nvSpPr>
+          <p:cNvPr id="30" name="TextBox 29"/>
+          <p:cNvSpPr txBox="1"/>
+          <p:nvPr/>
+        </p:nvSpPr>
+        <p:spPr>
+          <a:xfrm>
+            <a:off x="777239" y="4389120"/>
+            <a:ext cx="2697480" cy="353943"/>
+          </a:xfrm>
+          <a:prstGeom prst="rect">
+            <a:avLst/>
+          </a:prstGeom>
+          <a:noFill/>
+        </p:spPr>
+        <p:txBody>
+          <a:bodyPr wrap="square" lIns="45720" rIns="45720" anchor="t">
+            <a:spAutoFit/>
+          </a:bodyPr>
+          <a:lstStyle/>
+          <a:p>
+            <a:pPr algn="r" rtl="1">
+              <a:spcAft>
+                <a:spcPts val="400"/>
+              </a:spcAft>
+            </a:pPr>
+            <a:r>
+              <a:rPr lang="he-IL" sz="1700" b="0" i="0" dirty="0">
+                <a:solidFill>
+                  <a:srgbClr val="1B2B34"/>
+                </a:solidFill>
+                <a:latin typeface="Arial"/>
+                <a:cs typeface="Arial"/>
+              </a:rPr>
+              <a:t>לחיצה על רווח = משחק חדש</a:t>
             </a:r>
           </a:p>
         </p:txBody>

--- a/lesson3 car race/שיעור מרוץ המכוניות.pptx
+++ b/lesson3 car race/שיעור מרוץ המכוניות.pptx
@@ -22,8 +22,8 @@
     <p:sldId id="267" r:id="rId13"/>
     <p:sldId id="268" r:id="rId14"/>
     <p:sldId id="269" r:id="rId15"/>
-    <p:sldId id="270" r:id="rId16"/>
-    <p:sldId id="271" r:id="rId17"/>
+    <p:sldId id="271" r:id="rId16"/>
+    <p:sldId id="270" r:id="rId17"/>
     <p:sldId id="272" r:id="rId18"/>
     <p:sldId id="273" r:id="rId19"/>
     <p:sldId id="274" r:id="rId20"/>
@@ -746,7 +746,22 @@
           <a:lstStyle/>
           <a:p>
             <a:r>
-              <a:t>4 דק'. משל: הפונקציה היא חדר עם דלת סגורה. מה שנולד בחדר (bonus) נשאר בחדר. משתנה מהסלון (score) רואים מכל חדר, אבל כדי לשנות אותו צריך 'אישור' - global. בחלק 1 ראינו global ב-turtle_game.py. במשחק היום: global lane, global score.</a:t>
+              <a:t>7 דק' תרגול. מי שמסיים את 1-2 ממשיך ל-3. פתרון לאתגר 2:</a:t>
+            </a:r>
+          </a:p>
+          <a:p>
+            <a:r>
+              <a:t>colors = ["khaki", "lightblue", "pink", "lightgreen"]</a:t>
+            </a:r>
+          </a:p>
+          <a:p>
+            <a:r>
+              <a:t>for i in range(len(colors)):</a:t>
+            </a:r>
+          </a:p>
+          <a:p>
+            <a:r>
+              <a:t>    draw_house(-250 + i * 150, -50, colors[i])</a:t>
             </a:r>
           </a:p>
         </p:txBody>
@@ -816,22 +831,7 @@
           <a:lstStyle/>
           <a:p>
             <a:r>
-              <a:t>7 דק' תרגול. מי שמסיים את 1-2 ממשיך ל-3. פתרון לאתגר 2:</a:t>
-            </a:r>
-          </a:p>
-          <a:p>
-            <a:r>
-              <a:t>colors = ["khaki", "lightblue", "pink", "lightgreen"]</a:t>
-            </a:r>
-          </a:p>
-          <a:p>
-            <a:r>
-              <a:t>for i in range(len(colors)):</a:t>
-            </a:r>
-          </a:p>
-          <a:p>
-            <a:r>
-              <a:t>    draw_house(-250 + i * 150, -50, colors[i])</a:t>
+              <a:t>4 דק'. משל: הפונקציה היא חדר עם דלת סגורה. מה שנולד בחדר (bonus) נשאר בחדר. משתנה מהסלון (score) רואים מכל חדר, אבל כדי לשנות אותו צריך 'אישור' - global. בחלק 1 ראינו global ב-turtle_game.py. במשחק היום: global lane, global score.</a:t>
             </a:r>
           </a:p>
         </p:txBody>
@@ -12032,7 +12032,7 @@
                 <a:latin typeface="Arial"/>
                 <a:cs typeface="Arial"/>
               </a:rPr>
-              <a:t>משתנים מקומיים וגלובליים</a:t>
+              <a:t>תורכם: מתרגלים פונקציות</a:t>
             </a:r>
           </a:p>
         </p:txBody>
@@ -12071,21 +12071,21 @@
                 </a:solidFill>
                 <a:latin typeface="Arial"/>
               </a:rPr>
-              <a:t>15</a:t>
-            </a:r>
-          </a:p>
-        </p:txBody>
-      </p:sp>
-      <p:sp>
-        <p:nvSpPr>
-          <p:cNvPr id="4" name="Rounded Rectangle 3"/>
+              <a:t>16</a:t>
+            </a:r>
+          </a:p>
+        </p:txBody>
+      </p:sp>
+      <p:sp>
+        <p:nvSpPr>
+          <p:cNvPr id="4" name="pic-card"/>
           <p:cNvSpPr/>
           <p:nvPr/>
         </p:nvSpPr>
         <p:spPr>
           <a:xfrm>
-            <a:off x="5852160" y="1234440"/>
-            <a:ext cx="5788152" cy="3794760"/>
+            <a:off x="576072" y="1307592"/>
+            <a:ext cx="4425696" cy="2144654"/>
           </a:xfrm>
           <a:prstGeom prst="roundRect">
             <a:avLst>
@@ -12093,97 +12093,12 @@
             </a:avLst>
           </a:prstGeom>
           <a:solidFill>
-            <a:srgbClr val="E9F7EF"/>
+            <a:srgbClr val="FFFFFF"/>
           </a:solidFill>
-          <a:ln w="19050">
+          <a:ln w="9525">
             <a:solidFill>
-              <a:srgbClr val="9FD3B2"/>
+              <a:srgbClr val="D5DDE0"/>
             </a:solidFill>
-          </a:ln>
-        </p:spPr>
-        <p:style>
-          <a:lnRef idx="1">
-            <a:schemeClr val="accent1"/>
-          </a:lnRef>
-          <a:fillRef idx="3">
-            <a:schemeClr val="accent1"/>
-          </a:fillRef>
-          <a:effectRef idx="2">
-            <a:schemeClr val="accent1"/>
-          </a:effectRef>
-          <a:fontRef idx="minor">
-            <a:schemeClr val="lt1"/>
-          </a:fontRef>
-        </p:style>
-        <p:txBody>
-          <a:bodyPr rtlCol="0" anchor="ctr"/>
-          <a:lstStyle/>
-          <a:p>
-            <a:endParaRPr/>
-          </a:p>
-        </p:txBody>
-      </p:sp>
-      <p:sp>
-        <p:nvSpPr>
-          <p:cNvPr id="5" name="TextBox 4"/>
-          <p:cNvSpPr txBox="1"/>
-          <p:nvPr/>
-        </p:nvSpPr>
-        <p:spPr>
-          <a:xfrm>
-            <a:off x="6035040" y="1298448"/>
-            <a:ext cx="5486400" cy="323165"/>
-          </a:xfrm>
-          <a:prstGeom prst="rect">
-            <a:avLst/>
-          </a:prstGeom>
-          <a:noFill/>
-        </p:spPr>
-        <p:txBody>
-          <a:bodyPr wrap="square" lIns="45720" rIns="45720" anchor="t">
-            <a:spAutoFit/>
-          </a:bodyPr>
-          <a:lstStyle/>
-          <a:p>
-            <a:pPr algn="r" rtl="1">
-              <a:spcAft>
-                <a:spcPts val="400"/>
-              </a:spcAft>
-            </a:pPr>
-            <a:r>
-              <a:rPr lang="he-IL" sz="1500" b="1" i="0" dirty="0">
-                <a:solidFill>
-                  <a:srgbClr val="2D9F5C"/>
-                </a:solidFill>
-                <a:latin typeface="Arial"/>
-                <a:cs typeface="Arial"/>
-              </a:rPr>
-              <a:t>התוכנית (משתנה גלובלי)</a:t>
-            </a:r>
-          </a:p>
-        </p:txBody>
-      </p:sp>
-      <p:sp>
-        <p:nvSpPr>
-          <p:cNvPr id="6" name="code-bg"/>
-          <p:cNvSpPr/>
-          <p:nvPr/>
-        </p:nvSpPr>
-        <p:spPr>
-          <a:xfrm>
-            <a:off x="6080760" y="1737360"/>
-            <a:ext cx="5330952" cy="548640"/>
-          </a:xfrm>
-          <a:prstGeom prst="roundRect">
-            <a:avLst>
-              <a:gd name="adj" fmla="val 4000"/>
-            </a:avLst>
-          </a:prstGeom>
-          <a:solidFill>
-            <a:srgbClr val="1E1E2E"/>
-          </a:solidFill>
-          <a:ln>
-            <a:noFill/>
           </a:ln>
           <a:effectLst>
             <a:outerShdw blurRad="76200" dist="19050" dir="5400000" algn="t" rotWithShape="0">
@@ -12215,376 +12130,44 @@
           </a:p>
         </p:txBody>
       </p:sp>
-      <p:sp>
-        <p:nvSpPr>
-          <p:cNvPr id="7" name="code"/>
-          <p:cNvSpPr txBox="1"/>
-          <p:nvPr/>
-        </p:nvSpPr>
-        <p:spPr>
-          <a:xfrm>
-            <a:off x="6217920" y="1833372"/>
-            <a:ext cx="5056632" cy="356616"/>
+      <p:pic>
+        <p:nvPicPr>
+          <p:cNvPr id="5" name="Picture 4" descr="funcs_c.png"/>
+          <p:cNvPicPr>
+            <a:picLocks noChangeAspect="1"/>
+          </p:cNvPicPr>
+          <p:nvPr/>
+        </p:nvPicPr>
+        <p:blipFill>
+          <a:blip r:embed="rId3"/>
+          <a:stretch>
+            <a:fillRect/>
+          </a:stretch>
+        </p:blipFill>
+        <p:spPr>
+          <a:xfrm>
+            <a:off x="685800" y="1417320"/>
+            <a:ext cx="4206240" cy="1925198"/>
           </a:xfrm>
           <a:prstGeom prst="rect">
             <a:avLst/>
           </a:prstGeom>
-          <a:noFill/>
-        </p:spPr>
-        <p:txBody>
-          <a:bodyPr wrap="none" lIns="0" tIns="0" rIns="0" bIns="0" anchor="ctr">
-            <a:spAutoFit/>
-          </a:bodyPr>
-          <a:lstStyle/>
-          <a:p>
-            <a:pPr algn="l" rtl="0">
-              <a:lnSpc>
-                <a:spcPct val="108000"/>
-              </a:lnSpc>
-            </a:pPr>
-            <a:r>
-              <a:rPr sz="1700">
-                <a:solidFill>
-                  <a:srgbClr val="E6E6E6"/>
-                </a:solidFill>
-                <a:latin typeface="Consolas"/>
-              </a:rPr>
-              <a:t>score = </a:t>
-            </a:r>
-            <a:r>
-              <a:rPr sz="1700">
-                <a:solidFill>
-                  <a:srgbClr val="FFD166"/>
-                </a:solidFill>
-                <a:latin typeface="Consolas"/>
-              </a:rPr>
-              <a:t>0</a:t>
-            </a:r>
-          </a:p>
-        </p:txBody>
-      </p:sp>
-      <p:sp>
-        <p:nvSpPr>
-          <p:cNvPr id="8" name="Rounded Rectangle 7"/>
+        </p:spPr>
+      </p:pic>
+      <p:sp>
+        <p:nvSpPr>
+          <p:cNvPr id="6" name="Rounded Rectangle 5"/>
           <p:cNvSpPr/>
           <p:nvPr/>
         </p:nvSpPr>
         <p:spPr>
           <a:xfrm>
-            <a:off x="6080760" y="2514600"/>
-            <a:ext cx="5330952" cy="2331720"/>
+            <a:off x="5486400" y="1325880"/>
+            <a:ext cx="6153912" cy="777240"/>
           </a:xfrm>
           <a:prstGeom prst="roundRect">
             <a:avLst>
-              <a:gd name="adj" fmla="val 5000"/>
-            </a:avLst>
-          </a:prstGeom>
-          <a:solidFill>
-            <a:srgbClr val="FFF3E0"/>
-          </a:solidFill>
-          <a:ln w="19050">
-            <a:solidFill>
-              <a:srgbClr val="F5C27A"/>
-            </a:solidFill>
-          </a:ln>
-        </p:spPr>
-        <p:style>
-          <a:lnRef idx="1">
-            <a:schemeClr val="accent1"/>
-          </a:lnRef>
-          <a:fillRef idx="3">
-            <a:schemeClr val="accent1"/>
-          </a:fillRef>
-          <a:effectRef idx="2">
-            <a:schemeClr val="accent1"/>
-          </a:effectRef>
-          <a:fontRef idx="minor">
-            <a:schemeClr val="lt1"/>
-          </a:fontRef>
-        </p:style>
-        <p:txBody>
-          <a:bodyPr rtlCol="0" anchor="ctr"/>
-          <a:lstStyle/>
-          <a:p>
-            <a:endParaRPr/>
-          </a:p>
-        </p:txBody>
-      </p:sp>
-      <p:sp>
-        <p:nvSpPr>
-          <p:cNvPr id="9" name="TextBox 8"/>
-          <p:cNvSpPr txBox="1"/>
-          <p:nvPr/>
-        </p:nvSpPr>
-        <p:spPr>
-          <a:xfrm>
-            <a:off x="6217920" y="2560320"/>
-            <a:ext cx="5074920" cy="323165"/>
-          </a:xfrm>
-          <a:prstGeom prst="rect">
-            <a:avLst/>
-          </a:prstGeom>
-          <a:noFill/>
-        </p:spPr>
-        <p:txBody>
-          <a:bodyPr wrap="square" lIns="45720" rIns="45720" anchor="t">
-            <a:spAutoFit/>
-          </a:bodyPr>
-          <a:lstStyle/>
-          <a:p>
-            <a:pPr algn="r" rtl="1">
-              <a:spcAft>
-                <a:spcPts val="400"/>
-              </a:spcAft>
-            </a:pPr>
-            <a:r>
-              <a:rPr lang="he-IL" sz="1500" b="1" i="0" dirty="0">
-                <a:solidFill>
-                  <a:srgbClr val="C77700"/>
-                </a:solidFill>
-                <a:latin typeface="Arial"/>
-                <a:cs typeface="Arial"/>
-              </a:rPr>
-              <a:t>בתוך הפונקציה (משתנה מקומי)</a:t>
-            </a:r>
-          </a:p>
-        </p:txBody>
-      </p:sp>
-      <p:sp>
-        <p:nvSpPr>
-          <p:cNvPr id="10" name="code-bg"/>
-          <p:cNvSpPr/>
-          <p:nvPr/>
-        </p:nvSpPr>
-        <p:spPr>
-          <a:xfrm>
-            <a:off x="6217920" y="2971800"/>
-            <a:ext cx="5056632" cy="1691640"/>
-          </a:xfrm>
-          <a:prstGeom prst="roundRect">
-            <a:avLst>
-              <a:gd name="adj" fmla="val 4000"/>
-            </a:avLst>
-          </a:prstGeom>
-          <a:solidFill>
-            <a:srgbClr val="1E1E2E"/>
-          </a:solidFill>
-          <a:ln>
-            <a:noFill/>
-          </a:ln>
-          <a:effectLst>
-            <a:outerShdw blurRad="76200" dist="19050" dir="5400000" algn="t" rotWithShape="0">
-              <a:srgbClr val="000000">
-                <a:alpha val="16000"/>
-              </a:srgbClr>
-            </a:outerShdw>
-          </a:effectLst>
-        </p:spPr>
-        <p:style>
-          <a:lnRef idx="1">
-            <a:schemeClr val="accent1"/>
-          </a:lnRef>
-          <a:fillRef idx="3">
-            <a:schemeClr val="accent1"/>
-          </a:fillRef>
-          <a:effectRef idx="2">
-            <a:schemeClr val="accent1"/>
-          </a:effectRef>
-          <a:fontRef idx="minor">
-            <a:schemeClr val="lt1"/>
-          </a:fontRef>
-        </p:style>
-        <p:txBody>
-          <a:bodyPr rtlCol="0" anchor="ctr"/>
-          <a:lstStyle/>
-          <a:p>
-            <a:endParaRPr/>
-          </a:p>
-        </p:txBody>
-      </p:sp>
-      <p:sp>
-        <p:nvSpPr>
-          <p:cNvPr id="11" name="code"/>
-          <p:cNvSpPr txBox="1"/>
-          <p:nvPr/>
-        </p:nvSpPr>
-        <p:spPr>
-          <a:xfrm>
-            <a:off x="6355080" y="3067812"/>
-            <a:ext cx="4782312" cy="1499616"/>
-          </a:xfrm>
-          <a:prstGeom prst="rect">
-            <a:avLst/>
-          </a:prstGeom>
-          <a:noFill/>
-        </p:spPr>
-        <p:txBody>
-          <a:bodyPr wrap="none" lIns="0" tIns="0" rIns="0" bIns="0" anchor="t">
-            <a:spAutoFit/>
-          </a:bodyPr>
-          <a:lstStyle/>
-          <a:p>
-            <a:pPr algn="l" rtl="0">
-              <a:lnSpc>
-                <a:spcPct val="108000"/>
-              </a:lnSpc>
-            </a:pPr>
-            <a:r>
-              <a:rPr sz="1600">
-                <a:solidFill>
-                  <a:srgbClr val="FF9F1C"/>
-                </a:solidFill>
-                <a:latin typeface="Consolas"/>
-              </a:rPr>
-              <a:t>def</a:t>
-            </a:r>
-            <a:r>
-              <a:rPr sz="1600">
-                <a:solidFill>
-                  <a:srgbClr val="E6E6E6"/>
-                </a:solidFill>
-                <a:latin typeface="Consolas"/>
-              </a:rPr>
-              <a:t> </a:t>
-            </a:r>
-            <a:r>
-              <a:rPr sz="1600">
-                <a:solidFill>
-                  <a:srgbClr val="7FDBFF"/>
-                </a:solidFill>
-                <a:latin typeface="Consolas"/>
-              </a:rPr>
-              <a:t>add_point</a:t>
-            </a:r>
-            <a:r>
-              <a:rPr sz="1600">
-                <a:solidFill>
-                  <a:srgbClr val="E6E6E6"/>
-                </a:solidFill>
-                <a:latin typeface="Consolas"/>
-              </a:rPr>
-              <a:t>():</a:t>
-            </a:r>
-          </a:p>
-          <a:p>
-            <a:pPr algn="l" rtl="0">
-              <a:lnSpc>
-                <a:spcPct val="108000"/>
-              </a:lnSpc>
-            </a:pPr>
-            <a:r>
-              <a:rPr sz="1600">
-                <a:solidFill>
-                  <a:srgbClr val="E6E6E6"/>
-                </a:solidFill>
-                <a:latin typeface="Consolas"/>
-              </a:rPr>
-              <a:t>    </a:t>
-            </a:r>
-            <a:r>
-              <a:rPr sz="1600" b="1">
-                <a:solidFill>
-                  <a:srgbClr val="FF6B9A"/>
-                </a:solidFill>
-                <a:latin typeface="Consolas"/>
-              </a:rPr>
-              <a:t>global</a:t>
-            </a:r>
-            <a:r>
-              <a:rPr sz="1600">
-                <a:solidFill>
-                  <a:srgbClr val="E6E6E6"/>
-                </a:solidFill>
-                <a:latin typeface="Consolas"/>
-              </a:rPr>
-              <a:t> score</a:t>
-            </a:r>
-          </a:p>
-          <a:p>
-            <a:pPr algn="l" rtl="0">
-              <a:lnSpc>
-                <a:spcPct val="108000"/>
-              </a:lnSpc>
-            </a:pPr>
-            <a:r>
-              <a:rPr sz="1600">
-                <a:solidFill>
-                  <a:srgbClr val="E6E6E6"/>
-                </a:solidFill>
-                <a:latin typeface="Consolas"/>
-              </a:rPr>
-              <a:t>    score = score + </a:t>
-            </a:r>
-            <a:r>
-              <a:rPr sz="1600">
-                <a:solidFill>
-                  <a:srgbClr val="FFD166"/>
-                </a:solidFill>
-                <a:latin typeface="Consolas"/>
-              </a:rPr>
-              <a:t>1</a:t>
-            </a:r>
-          </a:p>
-          <a:p>
-            <a:pPr algn="l" rtl="0">
-              <a:lnSpc>
-                <a:spcPct val="108000"/>
-              </a:lnSpc>
-            </a:pPr>
-            <a:r>
-              <a:rPr sz="1600">
-                <a:solidFill>
-                  <a:srgbClr val="E6E6E6"/>
-                </a:solidFill>
-                <a:latin typeface="Consolas"/>
-              </a:rPr>
-              <a:t>    bonus = </a:t>
-            </a:r>
-            <a:r>
-              <a:rPr sz="1600">
-                <a:solidFill>
-                  <a:srgbClr val="FFD166"/>
-                </a:solidFill>
-                <a:latin typeface="Consolas"/>
-              </a:rPr>
-              <a:t>5</a:t>
-            </a:r>
-            <a:r>
-              <a:rPr sz="1600">
-                <a:solidFill>
-                  <a:srgbClr val="E6E6E6"/>
-                </a:solidFill>
-                <a:latin typeface="Consolas"/>
-              </a:rPr>
-              <a:t>  </a:t>
-            </a:r>
-            <a:r>
-              <a:rPr lang="he-IL" sz="1600">
-                <a:solidFill>
-                  <a:srgbClr val="8A93A6"/>
-                </a:solidFill>
-                <a:latin typeface="Consolas"/>
-                <a:cs typeface="Arial"/>
-              </a:rPr>
-              <a:t># מקומי</a:t>
-            </a:r>
-          </a:p>
-        </p:txBody>
-      </p:sp>
-      <p:sp>
-        <p:nvSpPr>
-          <p:cNvPr id="12" name="Rounded Rectangle 11"/>
-          <p:cNvSpPr/>
-          <p:nvPr/>
-        </p:nvSpPr>
-        <p:spPr>
-          <a:xfrm>
-            <a:off x="548640" y="1234440"/>
-            <a:ext cx="5029200" cy="1097280"/>
-          </a:xfrm>
-          <a:prstGeom prst="roundRect">
-            <a:avLst>
-              <a:gd name="adj" fmla="val 10000"/>
+              <a:gd name="adj" fmla="val 15000"/>
             </a:avLst>
           </a:prstGeom>
           <a:solidFill>
@@ -12627,14 +12210,14 @@
       </p:sp>
       <p:sp>
         <p:nvSpPr>
-          <p:cNvPr id="13" name="Oval 12"/>
+          <p:cNvPr id="7" name="Oval 6"/>
           <p:cNvSpPr/>
           <p:nvPr/>
         </p:nvSpPr>
         <p:spPr>
           <a:xfrm>
-            <a:off x="5029200" y="1600200"/>
-            <a:ext cx="365760" cy="365760"/>
+            <a:off x="10972800" y="1444752"/>
+            <a:ext cx="548640" cy="548640"/>
           </a:xfrm>
           <a:prstGeom prst="ellipse">
             <a:avLst/>
@@ -12661,23 +12244,36 @@
           </a:fontRef>
         </p:style>
         <p:txBody>
-          <a:bodyPr rtlCol="0" anchor="ctr"/>
-          <a:lstStyle/>
-          <a:p>
-            <a:endParaRPr/>
-          </a:p>
-        </p:txBody>
-      </p:sp>
-      <p:sp>
-        <p:nvSpPr>
-          <p:cNvPr id="14" name="TextBox 13"/>
+          <a:bodyPr wrap="square" lIns="0" tIns="0" rIns="0" bIns="0" rtlCol="0" anchor="ctr"/>
+          <a:lstStyle/>
+          <a:p>
+            <a:pPr algn="ctr" rtl="0">
+              <a:spcAft>
+                <a:spcPts val="0"/>
+              </a:spcAft>
+            </a:pPr>
+            <a:r>
+              <a:rPr sz="2000" b="1" i="0">
+                <a:solidFill>
+                  <a:srgbClr val="FFFFFF"/>
+                </a:solidFill>
+                <a:latin typeface="Arial"/>
+              </a:rPr>
+              <a:t>1</a:t>
+            </a:r>
+          </a:p>
+        </p:txBody>
+      </p:sp>
+      <p:sp>
+        <p:nvSpPr>
+          <p:cNvPr id="8" name="TextBox 7"/>
           <p:cNvSpPr txBox="1"/>
           <p:nvPr/>
         </p:nvSpPr>
         <p:spPr>
           <a:xfrm>
-            <a:off x="731520" y="1234440"/>
-            <a:ext cx="4160520" cy="1097280"/>
+            <a:off x="5669280" y="1537528"/>
+            <a:ext cx="5166360" cy="353943"/>
           </a:xfrm>
           <a:prstGeom prst="rect">
             <a:avLst/>
@@ -12696,42 +12292,32 @@
               </a:spcAft>
             </a:pPr>
             <a:r>
-              <a:rPr lang="he-IL" sz="1600" b="1" i="0">
+              <a:rPr lang="he-IL" sz="1700" b="0" i="0" dirty="0">
                 <a:solidFill>
                   <a:srgbClr val="1B2B34"/>
                 </a:solidFill>
                 <a:latin typeface="Arial"/>
                 <a:cs typeface="Arial"/>
               </a:rPr>
-              <a:t>מקומי: </a:t>
-            </a:r>
-            <a:r>
-              <a:rPr lang="he-IL" sz="1600" b="0" i="0">
-                <a:solidFill>
-                  <a:srgbClr val="1B2B34"/>
-                </a:solidFill>
-                <a:latin typeface="Arial"/>
-                <a:cs typeface="Arial"/>
-              </a:rPr>
-              <a:t>משתנה שנוצר בתוך פונקציה קיים רק בתוכה, ונמחק כשהיא נגמרת</a:t>
-            </a:r>
-          </a:p>
-        </p:txBody>
-      </p:sp>
-      <p:sp>
-        <p:nvSpPr>
-          <p:cNvPr id="15" name="Rounded Rectangle 14"/>
+              <a:t>הוסיפו בית רביעי בצבע צהוב - בשורה אחת בלבד!</a:t>
+            </a:r>
+          </a:p>
+        </p:txBody>
+      </p:sp>
+      <p:sp>
+        <p:nvSpPr>
+          <p:cNvPr id="9" name="Rounded Rectangle 8"/>
           <p:cNvSpPr/>
           <p:nvPr/>
         </p:nvSpPr>
         <p:spPr>
           <a:xfrm>
-            <a:off x="548640" y="2514600"/>
-            <a:ext cx="5029200" cy="1097280"/>
+            <a:off x="5486400" y="2258568"/>
+            <a:ext cx="6153912" cy="777240"/>
           </a:xfrm>
           <a:prstGeom prst="roundRect">
             <a:avLst>
-              <a:gd name="adj" fmla="val 10000"/>
+              <a:gd name="adj" fmla="val 15000"/>
             </a:avLst>
           </a:prstGeom>
           <a:solidFill>
@@ -12774,14 +12360,14 @@
       </p:sp>
       <p:sp>
         <p:nvSpPr>
-          <p:cNvPr id="16" name="Oval 15"/>
+          <p:cNvPr id="10" name="Oval 9"/>
           <p:cNvSpPr/>
           <p:nvPr/>
         </p:nvSpPr>
         <p:spPr>
           <a:xfrm>
-            <a:off x="5029200" y="2880360"/>
-            <a:ext cx="365760" cy="365760"/>
+            <a:off x="10972800" y="2377439"/>
+            <a:ext cx="548640" cy="548640"/>
           </a:xfrm>
           <a:prstGeom prst="ellipse">
             <a:avLst/>
@@ -12808,23 +12394,36 @@
           </a:fontRef>
         </p:style>
         <p:txBody>
-          <a:bodyPr rtlCol="0" anchor="ctr"/>
-          <a:lstStyle/>
-          <a:p>
-            <a:endParaRPr/>
-          </a:p>
-        </p:txBody>
-      </p:sp>
-      <p:sp>
-        <p:nvSpPr>
-          <p:cNvPr id="17" name="TextBox 16"/>
+          <a:bodyPr wrap="square" lIns="0" tIns="0" rIns="0" bIns="0" rtlCol="0" anchor="ctr"/>
+          <a:lstStyle/>
+          <a:p>
+            <a:pPr algn="ctr" rtl="0">
+              <a:spcAft>
+                <a:spcPts val="0"/>
+              </a:spcAft>
+            </a:pPr>
+            <a:r>
+              <a:rPr sz="2000" b="1" i="0">
+                <a:solidFill>
+                  <a:srgbClr val="FFFFFF"/>
+                </a:solidFill>
+                <a:latin typeface="Arial"/>
+              </a:rPr>
+              <a:t>2</a:t>
+            </a:r>
+          </a:p>
+        </p:txBody>
+      </p:sp>
+      <p:sp>
+        <p:nvSpPr>
+          <p:cNvPr id="11" name="TextBox 10"/>
           <p:cNvSpPr txBox="1"/>
           <p:nvPr/>
         </p:nvSpPr>
         <p:spPr>
           <a:xfrm>
-            <a:off x="731520" y="2514600"/>
-            <a:ext cx="4160520" cy="1097280"/>
+            <a:off x="5669280" y="2339411"/>
+            <a:ext cx="5166360" cy="615553"/>
           </a:xfrm>
           <a:prstGeom prst="rect">
             <a:avLst/>
@@ -12843,42 +12442,72 @@
               </a:spcAft>
             </a:pPr>
             <a:r>
-              <a:rPr lang="he-IL" sz="1600" b="1" i="0">
+              <a:rPr lang="he-IL" sz="1700" b="0" i="0" dirty="0">
                 <a:solidFill>
                   <a:srgbClr val="1B2B34"/>
                 </a:solidFill>
                 <a:latin typeface="Arial"/>
                 <a:cs typeface="Arial"/>
               </a:rPr>
-              <a:t>גלובלי: </a:t>
-            </a:r>
-            <a:r>
-              <a:rPr lang="he-IL" sz="1600" b="0" i="0">
+              <a:t>הוסיפו פרמטר </a:t>
+            </a:r>
+            <a:r>
+              <a:rPr lang="en-US" sz="1700" b="0" i="0" dirty="0">
                 <a:solidFill>
                   <a:srgbClr val="1B2B34"/>
                 </a:solidFill>
                 <a:latin typeface="Arial"/>
                 <a:cs typeface="Arial"/>
               </a:rPr>
-              <a:t>משתנה של כל התוכנית - כל פונקציה יכולה לקרוא אותו</a:t>
-            </a:r>
-          </a:p>
-        </p:txBody>
-      </p:sp>
-      <p:sp>
-        <p:nvSpPr>
-          <p:cNvPr id="18" name="Rounded Rectangle 17"/>
+              <a:t>size</a:t>
+            </a:r>
+            <a:r>
+              <a:rPr lang="he-IL" sz="1700" b="0" i="0" dirty="0">
+                <a:solidFill>
+                  <a:srgbClr val="1B2B34"/>
+                </a:solidFill>
+                <a:latin typeface="Arial"/>
+                <a:cs typeface="Arial"/>
+              </a:rPr>
+              <a:t> לפונקציה </a:t>
+            </a:r>
+            <a:r>
+              <a:rPr lang="en-US" sz="1700" b="0" i="0" dirty="0" err="1">
+                <a:solidFill>
+                  <a:srgbClr val="1B2B34"/>
+                </a:solidFill>
+                <a:latin typeface="Arial"/>
+                <a:cs typeface="Arial"/>
+              </a:rPr>
+              <a:t>draw_house</a:t>
+            </a:r>
+            <a:r>
+              <a:rPr lang="he-IL" sz="1700" b="0" i="0" dirty="0">
+                <a:solidFill>
+                  <a:srgbClr val="1B2B34"/>
+                </a:solidFill>
+                <a:latin typeface="Arial"/>
+                <a:cs typeface="Arial"/>
+              </a:rPr>
+              <a:t> וקראו אותו מהמשתמש</a:t>
+            </a:r>
+          </a:p>
+        </p:txBody>
+      </p:sp>
+      <p:sp>
+        <p:nvSpPr>
+          <p:cNvPr id="12" name="Rounded Rectangle 11"/>
           <p:cNvSpPr/>
           <p:nvPr/>
         </p:nvSpPr>
         <p:spPr>
           <a:xfrm>
-            <a:off x="548640" y="3794760"/>
-            <a:ext cx="5029200" cy="1097280"/>
+            <a:off x="5486400" y="3191256"/>
+            <a:ext cx="6153912" cy="777240"/>
           </a:xfrm>
           <a:prstGeom prst="roundRect">
             <a:avLst>
-              <a:gd name="adj" fmla="val 10000"/>
+              <a:gd name="adj" fmla="val 15000"/>
             </a:avLst>
           </a:prstGeom>
           <a:solidFill>
@@ -12921,20 +12550,20 @@
       </p:sp>
       <p:sp>
         <p:nvSpPr>
-          <p:cNvPr id="19" name="Oval 18"/>
+          <p:cNvPr id="13" name="Oval 12"/>
           <p:cNvSpPr/>
           <p:nvPr/>
         </p:nvSpPr>
         <p:spPr>
           <a:xfrm>
-            <a:off x="5029200" y="4160520"/>
-            <a:ext cx="365760" cy="365760"/>
+            <a:off x="10972800" y="3310128"/>
+            <a:ext cx="548640" cy="548640"/>
           </a:xfrm>
           <a:prstGeom prst="ellipse">
             <a:avLst/>
           </a:prstGeom>
           <a:solidFill>
-            <a:srgbClr val="EF476F"/>
+            <a:srgbClr val="118AB2"/>
           </a:solidFill>
           <a:ln>
             <a:noFill/>
@@ -12955,23 +12584,36 @@
           </a:fontRef>
         </p:style>
         <p:txBody>
-          <a:bodyPr rtlCol="0" anchor="ctr"/>
-          <a:lstStyle/>
-          <a:p>
-            <a:endParaRPr/>
-          </a:p>
-        </p:txBody>
-      </p:sp>
-      <p:sp>
-        <p:nvSpPr>
-          <p:cNvPr id="20" name="TextBox 19"/>
+          <a:bodyPr wrap="square" lIns="0" tIns="0" rIns="0" bIns="0" rtlCol="0" anchor="ctr"/>
+          <a:lstStyle/>
+          <a:p>
+            <a:pPr algn="ctr" rtl="0">
+              <a:spcAft>
+                <a:spcPts val="0"/>
+              </a:spcAft>
+            </a:pPr>
+            <a:r>
+              <a:rPr sz="2000" b="1" i="0">
+                <a:solidFill>
+                  <a:srgbClr val="FFFFFF"/>
+                </a:solidFill>
+                <a:latin typeface="Arial"/>
+              </a:rPr>
+              <a:t>3</a:t>
+            </a:r>
+          </a:p>
+        </p:txBody>
+      </p:sp>
+      <p:sp>
+        <p:nvSpPr>
+          <p:cNvPr id="14" name="TextBox 13"/>
           <p:cNvSpPr txBox="1"/>
           <p:nvPr/>
         </p:nvSpPr>
         <p:spPr>
           <a:xfrm>
-            <a:off x="731520" y="3794760"/>
-            <a:ext cx="4160520" cy="1097280"/>
+            <a:off x="5669280" y="3402904"/>
+            <a:ext cx="5166360" cy="353943"/>
           </a:xfrm>
           <a:prstGeom prst="rect">
             <a:avLst/>
@@ -12990,65 +12632,76 @@
               </a:spcAft>
             </a:pPr>
             <a:r>
-              <a:rPr lang="he-IL" sz="1600" b="1" i="0">
+              <a:rPr lang="he-IL" sz="1700" b="0" i="0" dirty="0">
                 <a:solidFill>
                   <a:srgbClr val="1B2B34"/>
                 </a:solidFill>
                 <a:latin typeface="Arial"/>
                 <a:cs typeface="Arial"/>
               </a:rPr>
-              <a:t>כדי לשנות</a:t>
-            </a:r>
-            <a:r>
-              <a:rPr lang="he-IL" sz="1600" b="0" i="0">
+              <a:t>כתבו פונקציה </a:t>
+            </a:r>
+            <a:r>
+              <a:rPr lang="he-IL" sz="1700" b="0" i="0" dirty="0" err="1">
                 <a:solidFill>
                   <a:srgbClr val="1B2B34"/>
                 </a:solidFill>
                 <a:latin typeface="Arial"/>
                 <a:cs typeface="Arial"/>
               </a:rPr>
-              <a:t> משתנה גלובלי מתוך פונקציה - כותבים </a:t>
-            </a:r>
-            <a:r>
-              <a:rPr sz="1600" b="1" i="0">
-                <a:solidFill>
-                  <a:srgbClr val="1B2B34"/>
-                </a:solidFill>
-                <a:latin typeface="Consolas"/>
-              </a:rPr>
-              <a:t>‎global‎</a:t>
-            </a:r>
-            <a:r>
-              <a:rPr lang="he-IL" sz="1600" b="0" i="0">
+              <a:t>draw_sun</a:t>
+            </a:r>
+            <a:r>
+              <a:rPr lang="he-IL" sz="1700" b="0" i="0" dirty="0">
                 <a:solidFill>
                   <a:srgbClr val="1B2B34"/>
                 </a:solidFill>
                 <a:latin typeface="Arial"/>
                 <a:cs typeface="Arial"/>
               </a:rPr>
-              <a:t> בהתחלה</a:t>
-            </a:r>
-          </a:p>
-        </p:txBody>
-      </p:sp>
-      <p:sp>
-        <p:nvSpPr>
-          <p:cNvPr id="21" name="Rounded Rectangle 20"/>
+              <a:t>(x, y, </a:t>
+            </a:r>
+            <a:r>
+              <a:rPr lang="he-IL" sz="1700" b="0" i="0" dirty="0" err="1">
+                <a:solidFill>
+                  <a:srgbClr val="1B2B34"/>
+                </a:solidFill>
+                <a:latin typeface="Arial"/>
+                <a:cs typeface="Arial"/>
+              </a:rPr>
+              <a:t>size</a:t>
+            </a:r>
+            <a:r>
+              <a:rPr lang="he-IL" sz="1700" b="0" i="0" dirty="0">
+                <a:solidFill>
+                  <a:srgbClr val="1B2B34"/>
+                </a:solidFill>
+                <a:latin typeface="Arial"/>
+                <a:cs typeface="Arial"/>
+              </a:rPr>
+              <a:t>) לצייר שמש</a:t>
+            </a:r>
+          </a:p>
+        </p:txBody>
+      </p:sp>
+      <p:sp>
+        <p:nvSpPr>
+          <p:cNvPr id="18" name="file-tag"/>
           <p:cNvSpPr/>
           <p:nvPr/>
         </p:nvSpPr>
         <p:spPr>
           <a:xfrm>
-            <a:off x="548640" y="5257800"/>
-            <a:ext cx="11091672" cy="822960"/>
+            <a:off x="548640" y="5623560"/>
+            <a:ext cx="2926080" cy="502920"/>
           </a:xfrm>
           <a:prstGeom prst="roundRect">
             <a:avLst>
-              <a:gd name="adj" fmla="val 12000"/>
+              <a:gd name="adj" fmla="val 50000"/>
             </a:avLst>
           </a:prstGeom>
           <a:solidFill>
-            <a:srgbClr val="FDE8EE"/>
+            <a:srgbClr val="FF9F1C"/>
           </a:solidFill>
           <a:ln>
             <a:noFill/>
@@ -13069,49 +12722,6 @@
           </a:fontRef>
         </p:style>
         <p:txBody>
-          <a:bodyPr rtlCol="0" anchor="ctr"/>
-          <a:lstStyle/>
-          <a:p>
-            <a:endParaRPr/>
-          </a:p>
-        </p:txBody>
-      </p:sp>
-      <p:sp>
-        <p:nvSpPr>
-          <p:cNvPr id="22" name="Oval 21"/>
-          <p:cNvSpPr/>
-          <p:nvPr/>
-        </p:nvSpPr>
-        <p:spPr>
-          <a:xfrm>
-            <a:off x="10908792" y="5394960"/>
-            <a:ext cx="548640" cy="548640"/>
-          </a:xfrm>
-          <a:prstGeom prst="ellipse">
-            <a:avLst/>
-          </a:prstGeom>
-          <a:solidFill>
-            <a:srgbClr val="EF476F"/>
-          </a:solidFill>
-          <a:ln>
-            <a:noFill/>
-          </a:ln>
-        </p:spPr>
-        <p:style>
-          <a:lnRef idx="1">
-            <a:schemeClr val="accent1"/>
-          </a:lnRef>
-          <a:fillRef idx="3">
-            <a:schemeClr val="accent1"/>
-          </a:fillRef>
-          <a:effectRef idx="2">
-            <a:schemeClr val="accent1"/>
-          </a:effectRef>
-          <a:fontRef idx="minor">
-            <a:schemeClr val="lt1"/>
-          </a:fontRef>
-        </p:style>
-        <p:txBody>
           <a:bodyPr wrap="square" lIns="0" tIns="0" rIns="0" bIns="0" rtlCol="0" anchor="ctr"/>
           <a:lstStyle/>
           <a:p>
@@ -13121,82 +12731,22 @@
               </a:spcAft>
             </a:pPr>
             <a:r>
-              <a:rPr sz="2400" b="1" i="0">
+              <a:rPr sz="1700" b="1" i="0">
                 <a:solidFill>
                   <a:srgbClr val="FFFFFF"/>
                 </a:solidFill>
+                <a:latin typeface="Consolas"/>
+              </a:rPr>
+              <a:t>&lt;/&gt;  </a:t>
+            </a:r>
+            <a:r>
+              <a:rPr sz="1700" b="1" i="0">
+                <a:solidFill>
+                  <a:srgbClr val="FFFFFF"/>
+                </a:solidFill>
                 <a:latin typeface="Arial"/>
               </a:rPr>
-              <a:t>!</a:t>
-            </a:r>
-          </a:p>
-        </p:txBody>
-      </p:sp>
-      <p:sp>
-        <p:nvSpPr>
-          <p:cNvPr id="23" name="TextBox 22"/>
-          <p:cNvSpPr txBox="1"/>
-          <p:nvPr/>
-        </p:nvSpPr>
-        <p:spPr>
-          <a:xfrm>
-            <a:off x="822959" y="5349240"/>
-            <a:ext cx="9902952" cy="640080"/>
-          </a:xfrm>
-          <a:prstGeom prst="rect">
-            <a:avLst/>
-          </a:prstGeom>
-          <a:noFill/>
-        </p:spPr>
-        <p:txBody>
-          <a:bodyPr wrap="square" lIns="45720" rIns="45720" anchor="ctr">
-            <a:spAutoFit/>
-          </a:bodyPr>
-          <a:lstStyle/>
-          <a:p>
-            <a:pPr algn="r" rtl="1">
-              <a:spcAft>
-                <a:spcPts val="200"/>
-              </a:spcAft>
-            </a:pPr>
-            <a:r>
-              <a:rPr lang="he-IL" sz="1600" b="1" i="0">
-                <a:solidFill>
-                  <a:srgbClr val="1B2B34"/>
-                </a:solidFill>
-                <a:latin typeface="Arial"/>
-                <a:cs typeface="Arial"/>
-              </a:rPr>
-              <a:t>שכחתם global? </a:t>
-            </a:r>
-            <a:r>
-              <a:rPr lang="he-IL" sz="1600" b="0" i="0">
-                <a:solidFill>
-                  <a:srgbClr val="1B2B34"/>
-                </a:solidFill>
-                <a:latin typeface="Arial"/>
-                <a:cs typeface="Arial"/>
-              </a:rPr>
-              <a:t>תקבלו שגיאה </a:t>
-            </a:r>
-            <a:r>
-              <a:rPr sz="1600" b="1" i="0">
-                <a:solidFill>
-                  <a:srgbClr val="1B2B34"/>
-                </a:solidFill>
-                <a:latin typeface="Consolas"/>
-              </a:rPr>
-              <a:t>‎UnboundLocalError‎</a:t>
-            </a:r>
-            <a:r>
-              <a:rPr lang="he-IL" sz="1600" b="0" i="0">
-                <a:solidFill>
-                  <a:srgbClr val="1B2B34"/>
-                </a:solidFill>
-                <a:latin typeface="Arial"/>
-                <a:cs typeface="Arial"/>
-              </a:rPr>
-              <a:t> - עכשיו אתם יודעים למה!</a:t>
+              <a:t>functions_demo.py</a:t>
             </a:r>
           </a:p>
         </p:txBody>
@@ -13269,7 +12819,7 @@
                 <a:latin typeface="Arial"/>
                 <a:cs typeface="Arial"/>
               </a:rPr>
-              <a:t>תורכם: מתרגלים פונקציות</a:t>
+              <a:t>משתנים מקומיים וגלובליים</a:t>
             </a:r>
           </a:p>
         </p:txBody>
@@ -13308,21 +12858,21 @@
                 </a:solidFill>
                 <a:latin typeface="Arial"/>
               </a:rPr>
-              <a:t>16</a:t>
-            </a:r>
-          </a:p>
-        </p:txBody>
-      </p:sp>
-      <p:sp>
-        <p:nvSpPr>
-          <p:cNvPr id="4" name="pic-card"/>
+              <a:t>15</a:t>
+            </a:r>
+          </a:p>
+        </p:txBody>
+      </p:sp>
+      <p:sp>
+        <p:nvSpPr>
+          <p:cNvPr id="4" name="Rounded Rectangle 3"/>
           <p:cNvSpPr/>
           <p:nvPr/>
         </p:nvSpPr>
         <p:spPr>
           <a:xfrm>
-            <a:off x="576072" y="1307592"/>
-            <a:ext cx="4425696" cy="2144654"/>
+            <a:off x="5852160" y="1234440"/>
+            <a:ext cx="5788152" cy="3794760"/>
           </a:xfrm>
           <a:prstGeom prst="roundRect">
             <a:avLst>
@@ -13330,12 +12880,97 @@
             </a:avLst>
           </a:prstGeom>
           <a:solidFill>
-            <a:srgbClr val="FFFFFF"/>
+            <a:srgbClr val="E9F7EF"/>
           </a:solidFill>
-          <a:ln w="9525">
+          <a:ln w="19050">
             <a:solidFill>
-              <a:srgbClr val="D5DDE0"/>
+              <a:srgbClr val="9FD3B2"/>
             </a:solidFill>
+          </a:ln>
+        </p:spPr>
+        <p:style>
+          <a:lnRef idx="1">
+            <a:schemeClr val="accent1"/>
+          </a:lnRef>
+          <a:fillRef idx="3">
+            <a:schemeClr val="accent1"/>
+          </a:fillRef>
+          <a:effectRef idx="2">
+            <a:schemeClr val="accent1"/>
+          </a:effectRef>
+          <a:fontRef idx="minor">
+            <a:schemeClr val="lt1"/>
+          </a:fontRef>
+        </p:style>
+        <p:txBody>
+          <a:bodyPr rtlCol="0" anchor="ctr"/>
+          <a:lstStyle/>
+          <a:p>
+            <a:endParaRPr/>
+          </a:p>
+        </p:txBody>
+      </p:sp>
+      <p:sp>
+        <p:nvSpPr>
+          <p:cNvPr id="5" name="TextBox 4"/>
+          <p:cNvSpPr txBox="1"/>
+          <p:nvPr/>
+        </p:nvSpPr>
+        <p:spPr>
+          <a:xfrm>
+            <a:off x="6035040" y="1298448"/>
+            <a:ext cx="5486400" cy="323165"/>
+          </a:xfrm>
+          <a:prstGeom prst="rect">
+            <a:avLst/>
+          </a:prstGeom>
+          <a:noFill/>
+        </p:spPr>
+        <p:txBody>
+          <a:bodyPr wrap="square" lIns="45720" rIns="45720" anchor="t">
+            <a:spAutoFit/>
+          </a:bodyPr>
+          <a:lstStyle/>
+          <a:p>
+            <a:pPr algn="r" rtl="1">
+              <a:spcAft>
+                <a:spcPts val="400"/>
+              </a:spcAft>
+            </a:pPr>
+            <a:r>
+              <a:rPr lang="he-IL" sz="1500" b="1" i="0" dirty="0">
+                <a:solidFill>
+                  <a:srgbClr val="2D9F5C"/>
+                </a:solidFill>
+                <a:latin typeface="Arial"/>
+                <a:cs typeface="Arial"/>
+              </a:rPr>
+              <a:t>התוכנית (משתנה גלובלי)</a:t>
+            </a:r>
+          </a:p>
+        </p:txBody>
+      </p:sp>
+      <p:sp>
+        <p:nvSpPr>
+          <p:cNvPr id="6" name="code-bg"/>
+          <p:cNvSpPr/>
+          <p:nvPr/>
+        </p:nvSpPr>
+        <p:spPr>
+          <a:xfrm>
+            <a:off x="6080760" y="1737360"/>
+            <a:ext cx="5330952" cy="548640"/>
+          </a:xfrm>
+          <a:prstGeom prst="roundRect">
+            <a:avLst>
+              <a:gd name="adj" fmla="val 4000"/>
+            </a:avLst>
+          </a:prstGeom>
+          <a:solidFill>
+            <a:srgbClr val="1E1E2E"/>
+          </a:solidFill>
+          <a:ln>
+            <a:noFill/>
           </a:ln>
           <a:effectLst>
             <a:outerShdw blurRad="76200" dist="19050" dir="5400000" algn="t" rotWithShape="0">
@@ -13367,44 +13002,376 @@
           </a:p>
         </p:txBody>
       </p:sp>
-      <p:pic>
-        <p:nvPicPr>
-          <p:cNvPr id="5" name="Picture 4" descr="funcs_c.png"/>
-          <p:cNvPicPr>
-            <a:picLocks noChangeAspect="1"/>
-          </p:cNvPicPr>
-          <p:nvPr/>
-        </p:nvPicPr>
-        <p:blipFill>
-          <a:blip r:embed="rId3"/>
-          <a:stretch>
-            <a:fillRect/>
-          </a:stretch>
-        </p:blipFill>
-        <p:spPr>
-          <a:xfrm>
-            <a:off x="685800" y="1417320"/>
-            <a:ext cx="4206240" cy="1925198"/>
+      <p:sp>
+        <p:nvSpPr>
+          <p:cNvPr id="7" name="code"/>
+          <p:cNvSpPr txBox="1"/>
+          <p:nvPr/>
+        </p:nvSpPr>
+        <p:spPr>
+          <a:xfrm>
+            <a:off x="6217920" y="1833372"/>
+            <a:ext cx="5056632" cy="356616"/>
           </a:xfrm>
           <a:prstGeom prst="rect">
             <a:avLst/>
           </a:prstGeom>
-        </p:spPr>
-      </p:pic>
-      <p:sp>
-        <p:nvSpPr>
-          <p:cNvPr id="6" name="Rounded Rectangle 5"/>
+          <a:noFill/>
+        </p:spPr>
+        <p:txBody>
+          <a:bodyPr wrap="none" lIns="0" tIns="0" rIns="0" bIns="0" anchor="ctr">
+            <a:spAutoFit/>
+          </a:bodyPr>
+          <a:lstStyle/>
+          <a:p>
+            <a:pPr algn="l" rtl="0">
+              <a:lnSpc>
+                <a:spcPct val="108000"/>
+              </a:lnSpc>
+            </a:pPr>
+            <a:r>
+              <a:rPr sz="1700">
+                <a:solidFill>
+                  <a:srgbClr val="E6E6E6"/>
+                </a:solidFill>
+                <a:latin typeface="Consolas"/>
+              </a:rPr>
+              <a:t>score = </a:t>
+            </a:r>
+            <a:r>
+              <a:rPr sz="1700">
+                <a:solidFill>
+                  <a:srgbClr val="FFD166"/>
+                </a:solidFill>
+                <a:latin typeface="Consolas"/>
+              </a:rPr>
+              <a:t>0</a:t>
+            </a:r>
+          </a:p>
+        </p:txBody>
+      </p:sp>
+      <p:sp>
+        <p:nvSpPr>
+          <p:cNvPr id="8" name="Rounded Rectangle 7"/>
           <p:cNvSpPr/>
           <p:nvPr/>
         </p:nvSpPr>
         <p:spPr>
           <a:xfrm>
-            <a:off x="5486400" y="1325880"/>
-            <a:ext cx="6153912" cy="777240"/>
+            <a:off x="6080760" y="2514600"/>
+            <a:ext cx="5330952" cy="2331720"/>
           </a:xfrm>
           <a:prstGeom prst="roundRect">
             <a:avLst>
-              <a:gd name="adj" fmla="val 15000"/>
+              <a:gd name="adj" fmla="val 5000"/>
+            </a:avLst>
+          </a:prstGeom>
+          <a:solidFill>
+            <a:srgbClr val="FFF3E0"/>
+          </a:solidFill>
+          <a:ln w="19050">
+            <a:solidFill>
+              <a:srgbClr val="F5C27A"/>
+            </a:solidFill>
+          </a:ln>
+        </p:spPr>
+        <p:style>
+          <a:lnRef idx="1">
+            <a:schemeClr val="accent1"/>
+          </a:lnRef>
+          <a:fillRef idx="3">
+            <a:schemeClr val="accent1"/>
+          </a:fillRef>
+          <a:effectRef idx="2">
+            <a:schemeClr val="accent1"/>
+          </a:effectRef>
+          <a:fontRef idx="minor">
+            <a:schemeClr val="lt1"/>
+          </a:fontRef>
+        </p:style>
+        <p:txBody>
+          <a:bodyPr rtlCol="0" anchor="ctr"/>
+          <a:lstStyle/>
+          <a:p>
+            <a:endParaRPr/>
+          </a:p>
+        </p:txBody>
+      </p:sp>
+      <p:sp>
+        <p:nvSpPr>
+          <p:cNvPr id="9" name="TextBox 8"/>
+          <p:cNvSpPr txBox="1"/>
+          <p:nvPr/>
+        </p:nvSpPr>
+        <p:spPr>
+          <a:xfrm>
+            <a:off x="6217920" y="2560320"/>
+            <a:ext cx="5074920" cy="323165"/>
+          </a:xfrm>
+          <a:prstGeom prst="rect">
+            <a:avLst/>
+          </a:prstGeom>
+          <a:noFill/>
+        </p:spPr>
+        <p:txBody>
+          <a:bodyPr wrap="square" lIns="45720" rIns="45720" anchor="t">
+            <a:spAutoFit/>
+          </a:bodyPr>
+          <a:lstStyle/>
+          <a:p>
+            <a:pPr algn="r" rtl="1">
+              <a:spcAft>
+                <a:spcPts val="400"/>
+              </a:spcAft>
+            </a:pPr>
+            <a:r>
+              <a:rPr lang="he-IL" sz="1500" b="1" i="0" dirty="0">
+                <a:solidFill>
+                  <a:srgbClr val="C77700"/>
+                </a:solidFill>
+                <a:latin typeface="Arial"/>
+                <a:cs typeface="Arial"/>
+              </a:rPr>
+              <a:t>בתוך הפונקציה (משתנה מקומי)</a:t>
+            </a:r>
+          </a:p>
+        </p:txBody>
+      </p:sp>
+      <p:sp>
+        <p:nvSpPr>
+          <p:cNvPr id="10" name="code-bg"/>
+          <p:cNvSpPr/>
+          <p:nvPr/>
+        </p:nvSpPr>
+        <p:spPr>
+          <a:xfrm>
+            <a:off x="6217920" y="2971800"/>
+            <a:ext cx="5056632" cy="1691640"/>
+          </a:xfrm>
+          <a:prstGeom prst="roundRect">
+            <a:avLst>
+              <a:gd name="adj" fmla="val 4000"/>
+            </a:avLst>
+          </a:prstGeom>
+          <a:solidFill>
+            <a:srgbClr val="1E1E2E"/>
+          </a:solidFill>
+          <a:ln>
+            <a:noFill/>
+          </a:ln>
+          <a:effectLst>
+            <a:outerShdw blurRad="76200" dist="19050" dir="5400000" algn="t" rotWithShape="0">
+              <a:srgbClr val="000000">
+                <a:alpha val="16000"/>
+              </a:srgbClr>
+            </a:outerShdw>
+          </a:effectLst>
+        </p:spPr>
+        <p:style>
+          <a:lnRef idx="1">
+            <a:schemeClr val="accent1"/>
+          </a:lnRef>
+          <a:fillRef idx="3">
+            <a:schemeClr val="accent1"/>
+          </a:fillRef>
+          <a:effectRef idx="2">
+            <a:schemeClr val="accent1"/>
+          </a:effectRef>
+          <a:fontRef idx="minor">
+            <a:schemeClr val="lt1"/>
+          </a:fontRef>
+        </p:style>
+        <p:txBody>
+          <a:bodyPr rtlCol="0" anchor="ctr"/>
+          <a:lstStyle/>
+          <a:p>
+            <a:endParaRPr/>
+          </a:p>
+        </p:txBody>
+      </p:sp>
+      <p:sp>
+        <p:nvSpPr>
+          <p:cNvPr id="11" name="code"/>
+          <p:cNvSpPr txBox="1"/>
+          <p:nvPr/>
+        </p:nvSpPr>
+        <p:spPr>
+          <a:xfrm>
+            <a:off x="6355080" y="3067812"/>
+            <a:ext cx="4782312" cy="1499616"/>
+          </a:xfrm>
+          <a:prstGeom prst="rect">
+            <a:avLst/>
+          </a:prstGeom>
+          <a:noFill/>
+        </p:spPr>
+        <p:txBody>
+          <a:bodyPr wrap="none" lIns="0" tIns="0" rIns="0" bIns="0" anchor="t">
+            <a:spAutoFit/>
+          </a:bodyPr>
+          <a:lstStyle/>
+          <a:p>
+            <a:pPr algn="l" rtl="0">
+              <a:lnSpc>
+                <a:spcPct val="108000"/>
+              </a:lnSpc>
+            </a:pPr>
+            <a:r>
+              <a:rPr sz="1600">
+                <a:solidFill>
+                  <a:srgbClr val="FF9F1C"/>
+                </a:solidFill>
+                <a:latin typeface="Consolas"/>
+              </a:rPr>
+              <a:t>def</a:t>
+            </a:r>
+            <a:r>
+              <a:rPr sz="1600">
+                <a:solidFill>
+                  <a:srgbClr val="E6E6E6"/>
+                </a:solidFill>
+                <a:latin typeface="Consolas"/>
+              </a:rPr>
+              <a:t> </a:t>
+            </a:r>
+            <a:r>
+              <a:rPr sz="1600">
+                <a:solidFill>
+                  <a:srgbClr val="7FDBFF"/>
+                </a:solidFill>
+                <a:latin typeface="Consolas"/>
+              </a:rPr>
+              <a:t>add_point</a:t>
+            </a:r>
+            <a:r>
+              <a:rPr sz="1600">
+                <a:solidFill>
+                  <a:srgbClr val="E6E6E6"/>
+                </a:solidFill>
+                <a:latin typeface="Consolas"/>
+              </a:rPr>
+              <a:t>():</a:t>
+            </a:r>
+          </a:p>
+          <a:p>
+            <a:pPr algn="l" rtl="0">
+              <a:lnSpc>
+                <a:spcPct val="108000"/>
+              </a:lnSpc>
+            </a:pPr>
+            <a:r>
+              <a:rPr sz="1600">
+                <a:solidFill>
+                  <a:srgbClr val="E6E6E6"/>
+                </a:solidFill>
+                <a:latin typeface="Consolas"/>
+              </a:rPr>
+              <a:t>    </a:t>
+            </a:r>
+            <a:r>
+              <a:rPr sz="1600" b="1">
+                <a:solidFill>
+                  <a:srgbClr val="FF6B9A"/>
+                </a:solidFill>
+                <a:latin typeface="Consolas"/>
+              </a:rPr>
+              <a:t>global</a:t>
+            </a:r>
+            <a:r>
+              <a:rPr sz="1600">
+                <a:solidFill>
+                  <a:srgbClr val="E6E6E6"/>
+                </a:solidFill>
+                <a:latin typeface="Consolas"/>
+              </a:rPr>
+              <a:t> score</a:t>
+            </a:r>
+          </a:p>
+          <a:p>
+            <a:pPr algn="l" rtl="0">
+              <a:lnSpc>
+                <a:spcPct val="108000"/>
+              </a:lnSpc>
+            </a:pPr>
+            <a:r>
+              <a:rPr sz="1600">
+                <a:solidFill>
+                  <a:srgbClr val="E6E6E6"/>
+                </a:solidFill>
+                <a:latin typeface="Consolas"/>
+              </a:rPr>
+              <a:t>    score = score + </a:t>
+            </a:r>
+            <a:r>
+              <a:rPr sz="1600">
+                <a:solidFill>
+                  <a:srgbClr val="FFD166"/>
+                </a:solidFill>
+                <a:latin typeface="Consolas"/>
+              </a:rPr>
+              <a:t>1</a:t>
+            </a:r>
+          </a:p>
+          <a:p>
+            <a:pPr algn="l" rtl="0">
+              <a:lnSpc>
+                <a:spcPct val="108000"/>
+              </a:lnSpc>
+            </a:pPr>
+            <a:r>
+              <a:rPr sz="1600">
+                <a:solidFill>
+                  <a:srgbClr val="E6E6E6"/>
+                </a:solidFill>
+                <a:latin typeface="Consolas"/>
+              </a:rPr>
+              <a:t>    bonus = </a:t>
+            </a:r>
+            <a:r>
+              <a:rPr sz="1600">
+                <a:solidFill>
+                  <a:srgbClr val="FFD166"/>
+                </a:solidFill>
+                <a:latin typeface="Consolas"/>
+              </a:rPr>
+              <a:t>5</a:t>
+            </a:r>
+            <a:r>
+              <a:rPr sz="1600">
+                <a:solidFill>
+                  <a:srgbClr val="E6E6E6"/>
+                </a:solidFill>
+                <a:latin typeface="Consolas"/>
+              </a:rPr>
+              <a:t>  </a:t>
+            </a:r>
+            <a:r>
+              <a:rPr lang="he-IL" sz="1600">
+                <a:solidFill>
+                  <a:srgbClr val="8A93A6"/>
+                </a:solidFill>
+                <a:latin typeface="Consolas"/>
+                <a:cs typeface="Arial"/>
+              </a:rPr>
+              <a:t># מקומי</a:t>
+            </a:r>
+          </a:p>
+        </p:txBody>
+      </p:sp>
+      <p:sp>
+        <p:nvSpPr>
+          <p:cNvPr id="12" name="Rounded Rectangle 11"/>
+          <p:cNvSpPr/>
+          <p:nvPr/>
+        </p:nvSpPr>
+        <p:spPr>
+          <a:xfrm>
+            <a:off x="548640" y="1234440"/>
+            <a:ext cx="5029200" cy="1097280"/>
+          </a:xfrm>
+          <a:prstGeom prst="roundRect">
+            <a:avLst>
+              <a:gd name="adj" fmla="val 10000"/>
             </a:avLst>
           </a:prstGeom>
           <a:solidFill>
@@ -13447,14 +13414,14 @@
       </p:sp>
       <p:sp>
         <p:nvSpPr>
-          <p:cNvPr id="7" name="Oval 6"/>
+          <p:cNvPr id="13" name="Oval 12"/>
           <p:cNvSpPr/>
           <p:nvPr/>
         </p:nvSpPr>
         <p:spPr>
           <a:xfrm>
-            <a:off x="10972800" y="1444752"/>
-            <a:ext cx="548640" cy="548640"/>
+            <a:off x="5029200" y="1600200"/>
+            <a:ext cx="365760" cy="365760"/>
           </a:xfrm>
           <a:prstGeom prst="ellipse">
             <a:avLst/>
@@ -13481,36 +13448,23 @@
           </a:fontRef>
         </p:style>
         <p:txBody>
-          <a:bodyPr wrap="square" lIns="0" tIns="0" rIns="0" bIns="0" rtlCol="0" anchor="ctr"/>
-          <a:lstStyle/>
-          <a:p>
-            <a:pPr algn="ctr" rtl="0">
-              <a:spcAft>
-                <a:spcPts val="0"/>
-              </a:spcAft>
-            </a:pPr>
-            <a:r>
-              <a:rPr sz="2000" b="1" i="0">
-                <a:solidFill>
-                  <a:srgbClr val="FFFFFF"/>
-                </a:solidFill>
-                <a:latin typeface="Arial"/>
-              </a:rPr>
-              <a:t>1</a:t>
-            </a:r>
-          </a:p>
-        </p:txBody>
-      </p:sp>
-      <p:sp>
-        <p:nvSpPr>
-          <p:cNvPr id="8" name="TextBox 7"/>
+          <a:bodyPr rtlCol="0" anchor="ctr"/>
+          <a:lstStyle/>
+          <a:p>
+            <a:endParaRPr/>
+          </a:p>
+        </p:txBody>
+      </p:sp>
+      <p:sp>
+        <p:nvSpPr>
+          <p:cNvPr id="14" name="TextBox 13"/>
           <p:cNvSpPr txBox="1"/>
           <p:nvPr/>
         </p:nvSpPr>
         <p:spPr>
           <a:xfrm>
-            <a:off x="5669280" y="1537528"/>
-            <a:ext cx="5166360" cy="353943"/>
+            <a:off x="731520" y="1234440"/>
+            <a:ext cx="4160520" cy="1097280"/>
           </a:xfrm>
           <a:prstGeom prst="rect">
             <a:avLst/>
@@ -13529,32 +13483,42 @@
               </a:spcAft>
             </a:pPr>
             <a:r>
-              <a:rPr lang="he-IL" sz="1700" b="0" i="0" dirty="0">
+              <a:rPr lang="he-IL" sz="1600" b="1" i="0">
                 <a:solidFill>
                   <a:srgbClr val="1B2B34"/>
                 </a:solidFill>
                 <a:latin typeface="Arial"/>
                 <a:cs typeface="Arial"/>
               </a:rPr>
-              <a:t>הוסיפו בית רביעי בצבע צהוב - בשורה אחת בלבד!</a:t>
-            </a:r>
-          </a:p>
-        </p:txBody>
-      </p:sp>
-      <p:sp>
-        <p:nvSpPr>
-          <p:cNvPr id="9" name="Rounded Rectangle 8"/>
+              <a:t>מקומי: </a:t>
+            </a:r>
+            <a:r>
+              <a:rPr lang="he-IL" sz="1600" b="0" i="0">
+                <a:solidFill>
+                  <a:srgbClr val="1B2B34"/>
+                </a:solidFill>
+                <a:latin typeface="Arial"/>
+                <a:cs typeface="Arial"/>
+              </a:rPr>
+              <a:t>משתנה שנוצר בתוך פונקציה קיים רק בתוכה, ונמחק כשהיא נגמרת</a:t>
+            </a:r>
+          </a:p>
+        </p:txBody>
+      </p:sp>
+      <p:sp>
+        <p:nvSpPr>
+          <p:cNvPr id="15" name="Rounded Rectangle 14"/>
           <p:cNvSpPr/>
           <p:nvPr/>
         </p:nvSpPr>
         <p:spPr>
           <a:xfrm>
-            <a:off x="5486400" y="2258568"/>
-            <a:ext cx="6153912" cy="777240"/>
+            <a:off x="548640" y="2514600"/>
+            <a:ext cx="5029200" cy="1097280"/>
           </a:xfrm>
           <a:prstGeom prst="roundRect">
             <a:avLst>
-              <a:gd name="adj" fmla="val 15000"/>
+              <a:gd name="adj" fmla="val 10000"/>
             </a:avLst>
           </a:prstGeom>
           <a:solidFill>
@@ -13597,14 +13561,14 @@
       </p:sp>
       <p:sp>
         <p:nvSpPr>
-          <p:cNvPr id="10" name="Oval 9"/>
+          <p:cNvPr id="16" name="Oval 15"/>
           <p:cNvSpPr/>
           <p:nvPr/>
         </p:nvSpPr>
         <p:spPr>
           <a:xfrm>
-            <a:off x="10972800" y="2377439"/>
-            <a:ext cx="548640" cy="548640"/>
+            <a:off x="5029200" y="2880360"/>
+            <a:ext cx="365760" cy="365760"/>
           </a:xfrm>
           <a:prstGeom prst="ellipse">
             <a:avLst/>
@@ -13631,36 +13595,23 @@
           </a:fontRef>
         </p:style>
         <p:txBody>
-          <a:bodyPr wrap="square" lIns="0" tIns="0" rIns="0" bIns="0" rtlCol="0" anchor="ctr"/>
-          <a:lstStyle/>
-          <a:p>
-            <a:pPr algn="ctr" rtl="0">
-              <a:spcAft>
-                <a:spcPts val="0"/>
-              </a:spcAft>
-            </a:pPr>
-            <a:r>
-              <a:rPr sz="2000" b="1" i="0">
-                <a:solidFill>
-                  <a:srgbClr val="FFFFFF"/>
-                </a:solidFill>
-                <a:latin typeface="Arial"/>
-              </a:rPr>
-              <a:t>2</a:t>
-            </a:r>
-          </a:p>
-        </p:txBody>
-      </p:sp>
-      <p:sp>
-        <p:nvSpPr>
-          <p:cNvPr id="11" name="TextBox 10"/>
+          <a:bodyPr rtlCol="0" anchor="ctr"/>
+          <a:lstStyle/>
+          <a:p>
+            <a:endParaRPr/>
+          </a:p>
+        </p:txBody>
+      </p:sp>
+      <p:sp>
+        <p:nvSpPr>
+          <p:cNvPr id="17" name="TextBox 16"/>
           <p:cNvSpPr txBox="1"/>
           <p:nvPr/>
         </p:nvSpPr>
         <p:spPr>
           <a:xfrm>
-            <a:off x="5669280" y="2339411"/>
-            <a:ext cx="5166360" cy="615553"/>
+            <a:off x="731520" y="2514600"/>
+            <a:ext cx="4160520" cy="1097280"/>
           </a:xfrm>
           <a:prstGeom prst="rect">
             <a:avLst/>
@@ -13679,72 +13630,42 @@
               </a:spcAft>
             </a:pPr>
             <a:r>
-              <a:rPr lang="he-IL" sz="1700" b="0" i="0" dirty="0">
+              <a:rPr lang="he-IL" sz="1600" b="1" i="0">
                 <a:solidFill>
                   <a:srgbClr val="1B2B34"/>
                 </a:solidFill>
                 <a:latin typeface="Arial"/>
                 <a:cs typeface="Arial"/>
               </a:rPr>
-              <a:t>הוסיפו פרמטר </a:t>
-            </a:r>
-            <a:r>
-              <a:rPr lang="en-US" sz="1700" b="0" i="0" dirty="0">
+              <a:t>גלובלי: </a:t>
+            </a:r>
+            <a:r>
+              <a:rPr lang="he-IL" sz="1600" b="0" i="0">
                 <a:solidFill>
                   <a:srgbClr val="1B2B34"/>
                 </a:solidFill>
                 <a:latin typeface="Arial"/>
                 <a:cs typeface="Arial"/>
               </a:rPr>
-              <a:t>size</a:t>
-            </a:r>
-            <a:r>
-              <a:rPr lang="he-IL" sz="1700" b="0" i="0" dirty="0">
-                <a:solidFill>
-                  <a:srgbClr val="1B2B34"/>
-                </a:solidFill>
-                <a:latin typeface="Arial"/>
-                <a:cs typeface="Arial"/>
-              </a:rPr>
-              <a:t> לפונקציה </a:t>
-            </a:r>
-            <a:r>
-              <a:rPr lang="en-US" sz="1700" b="0" i="0" dirty="0" err="1">
-                <a:solidFill>
-                  <a:srgbClr val="1B2B34"/>
-                </a:solidFill>
-                <a:latin typeface="Arial"/>
-                <a:cs typeface="Arial"/>
-              </a:rPr>
-              <a:t>draw_house</a:t>
-            </a:r>
-            <a:r>
-              <a:rPr lang="he-IL" sz="1700" b="0" i="0" dirty="0">
-                <a:solidFill>
-                  <a:srgbClr val="1B2B34"/>
-                </a:solidFill>
-                <a:latin typeface="Arial"/>
-                <a:cs typeface="Arial"/>
-              </a:rPr>
-              <a:t> וקראו אותו מהמשתמש</a:t>
-            </a:r>
-          </a:p>
-        </p:txBody>
-      </p:sp>
-      <p:sp>
-        <p:nvSpPr>
-          <p:cNvPr id="12" name="Rounded Rectangle 11"/>
+              <a:t>משתנה של כל התוכנית - כל פונקציה יכולה לקרוא אותו</a:t>
+            </a:r>
+          </a:p>
+        </p:txBody>
+      </p:sp>
+      <p:sp>
+        <p:nvSpPr>
+          <p:cNvPr id="18" name="Rounded Rectangle 17"/>
           <p:cNvSpPr/>
           <p:nvPr/>
         </p:nvSpPr>
         <p:spPr>
           <a:xfrm>
-            <a:off x="5486400" y="3191256"/>
-            <a:ext cx="6153912" cy="777240"/>
+            <a:off x="548640" y="3794760"/>
+            <a:ext cx="5029200" cy="1097280"/>
           </a:xfrm>
           <a:prstGeom prst="roundRect">
             <a:avLst>
-              <a:gd name="adj" fmla="val 15000"/>
+              <a:gd name="adj" fmla="val 10000"/>
             </a:avLst>
           </a:prstGeom>
           <a:solidFill>
@@ -13787,20 +13708,20 @@
       </p:sp>
       <p:sp>
         <p:nvSpPr>
-          <p:cNvPr id="13" name="Oval 12"/>
+          <p:cNvPr id="19" name="Oval 18"/>
           <p:cNvSpPr/>
           <p:nvPr/>
         </p:nvSpPr>
         <p:spPr>
           <a:xfrm>
-            <a:off x="10972800" y="3310128"/>
-            <a:ext cx="548640" cy="548640"/>
+            <a:off x="5029200" y="4160520"/>
+            <a:ext cx="365760" cy="365760"/>
           </a:xfrm>
           <a:prstGeom prst="ellipse">
             <a:avLst/>
           </a:prstGeom>
           <a:solidFill>
-            <a:srgbClr val="118AB2"/>
+            <a:srgbClr val="EF476F"/>
           </a:solidFill>
           <a:ln>
             <a:noFill/>
@@ -13821,36 +13742,23 @@
           </a:fontRef>
         </p:style>
         <p:txBody>
-          <a:bodyPr wrap="square" lIns="0" tIns="0" rIns="0" bIns="0" rtlCol="0" anchor="ctr"/>
-          <a:lstStyle/>
-          <a:p>
-            <a:pPr algn="ctr" rtl="0">
-              <a:spcAft>
-                <a:spcPts val="0"/>
-              </a:spcAft>
-            </a:pPr>
-            <a:r>
-              <a:rPr sz="2000" b="1" i="0">
-                <a:solidFill>
-                  <a:srgbClr val="FFFFFF"/>
-                </a:solidFill>
-                <a:latin typeface="Arial"/>
-              </a:rPr>
-              <a:t>3</a:t>
-            </a:r>
-          </a:p>
-        </p:txBody>
-      </p:sp>
-      <p:sp>
-        <p:nvSpPr>
-          <p:cNvPr id="14" name="TextBox 13"/>
+          <a:bodyPr rtlCol="0" anchor="ctr"/>
+          <a:lstStyle/>
+          <a:p>
+            <a:endParaRPr/>
+          </a:p>
+        </p:txBody>
+      </p:sp>
+      <p:sp>
+        <p:nvSpPr>
+          <p:cNvPr id="20" name="TextBox 19"/>
           <p:cNvSpPr txBox="1"/>
           <p:nvPr/>
         </p:nvSpPr>
         <p:spPr>
           <a:xfrm>
-            <a:off x="5669280" y="3402904"/>
-            <a:ext cx="5166360" cy="353943"/>
+            <a:off x="731520" y="3794760"/>
+            <a:ext cx="4160520" cy="1097280"/>
           </a:xfrm>
           <a:prstGeom prst="rect">
             <a:avLst/>
@@ -13869,76 +13777,65 @@
               </a:spcAft>
             </a:pPr>
             <a:r>
-              <a:rPr lang="he-IL" sz="1700" b="0" i="0" dirty="0">
+              <a:rPr lang="he-IL" sz="1600" b="1" i="0">
                 <a:solidFill>
                   <a:srgbClr val="1B2B34"/>
                 </a:solidFill>
                 <a:latin typeface="Arial"/>
                 <a:cs typeface="Arial"/>
               </a:rPr>
-              <a:t>כתבו פונקציה </a:t>
-            </a:r>
-            <a:r>
-              <a:rPr lang="he-IL" sz="1700" b="0" i="0" dirty="0" err="1">
+              <a:t>כדי לשנות</a:t>
+            </a:r>
+            <a:r>
+              <a:rPr lang="he-IL" sz="1600" b="0" i="0">
                 <a:solidFill>
                   <a:srgbClr val="1B2B34"/>
                 </a:solidFill>
                 <a:latin typeface="Arial"/>
                 <a:cs typeface="Arial"/>
               </a:rPr>
-              <a:t>draw_sun</a:t>
-            </a:r>
-            <a:r>
-              <a:rPr lang="he-IL" sz="1700" b="0" i="0" dirty="0">
+              <a:t> משתנה גלובלי מתוך פונקציה - כותבים </a:t>
+            </a:r>
+            <a:r>
+              <a:rPr sz="1600" b="1" i="0">
+                <a:solidFill>
+                  <a:srgbClr val="1B2B34"/>
+                </a:solidFill>
+                <a:latin typeface="Consolas"/>
+              </a:rPr>
+              <a:t>‎global‎</a:t>
+            </a:r>
+            <a:r>
+              <a:rPr lang="he-IL" sz="1600" b="0" i="0">
                 <a:solidFill>
                   <a:srgbClr val="1B2B34"/>
                 </a:solidFill>
                 <a:latin typeface="Arial"/>
                 <a:cs typeface="Arial"/>
               </a:rPr>
-              <a:t>(x, y, </a:t>
-            </a:r>
-            <a:r>
-              <a:rPr lang="he-IL" sz="1700" b="0" i="0" dirty="0" err="1">
-                <a:solidFill>
-                  <a:srgbClr val="1B2B34"/>
-                </a:solidFill>
-                <a:latin typeface="Arial"/>
-                <a:cs typeface="Arial"/>
-              </a:rPr>
-              <a:t>size</a:t>
-            </a:r>
-            <a:r>
-              <a:rPr lang="he-IL" sz="1700" b="0" i="0" dirty="0">
-                <a:solidFill>
-                  <a:srgbClr val="1B2B34"/>
-                </a:solidFill>
-                <a:latin typeface="Arial"/>
-                <a:cs typeface="Arial"/>
-              </a:rPr>
-              <a:t>) לצייר שמש</a:t>
-            </a:r>
-          </a:p>
-        </p:txBody>
-      </p:sp>
-      <p:sp>
-        <p:nvSpPr>
-          <p:cNvPr id="18" name="file-tag"/>
+              <a:t> בהתחלה</a:t>
+            </a:r>
+          </a:p>
+        </p:txBody>
+      </p:sp>
+      <p:sp>
+        <p:nvSpPr>
+          <p:cNvPr id="21" name="Rounded Rectangle 20"/>
           <p:cNvSpPr/>
           <p:nvPr/>
         </p:nvSpPr>
         <p:spPr>
           <a:xfrm>
-            <a:off x="548640" y="5623560"/>
-            <a:ext cx="2926080" cy="502920"/>
+            <a:off x="548640" y="5257800"/>
+            <a:ext cx="11091672" cy="822960"/>
           </a:xfrm>
           <a:prstGeom prst="roundRect">
             <a:avLst>
-              <a:gd name="adj" fmla="val 50000"/>
+              <a:gd name="adj" fmla="val 12000"/>
             </a:avLst>
           </a:prstGeom>
           <a:solidFill>
-            <a:srgbClr val="FF9F1C"/>
+            <a:srgbClr val="FDE8EE"/>
           </a:solidFill>
           <a:ln>
             <a:noFill/>
@@ -13959,6 +13856,49 @@
           </a:fontRef>
         </p:style>
         <p:txBody>
+          <a:bodyPr rtlCol="0" anchor="ctr"/>
+          <a:lstStyle/>
+          <a:p>
+            <a:endParaRPr/>
+          </a:p>
+        </p:txBody>
+      </p:sp>
+      <p:sp>
+        <p:nvSpPr>
+          <p:cNvPr id="22" name="Oval 21"/>
+          <p:cNvSpPr/>
+          <p:nvPr/>
+        </p:nvSpPr>
+        <p:spPr>
+          <a:xfrm>
+            <a:off x="10908792" y="5394960"/>
+            <a:ext cx="548640" cy="548640"/>
+          </a:xfrm>
+          <a:prstGeom prst="ellipse">
+            <a:avLst/>
+          </a:prstGeom>
+          <a:solidFill>
+            <a:srgbClr val="EF476F"/>
+          </a:solidFill>
+          <a:ln>
+            <a:noFill/>
+          </a:ln>
+        </p:spPr>
+        <p:style>
+          <a:lnRef idx="1">
+            <a:schemeClr val="accent1"/>
+          </a:lnRef>
+          <a:fillRef idx="3">
+            <a:schemeClr val="accent1"/>
+          </a:fillRef>
+          <a:effectRef idx="2">
+            <a:schemeClr val="accent1"/>
+          </a:effectRef>
+          <a:fontRef idx="minor">
+            <a:schemeClr val="lt1"/>
+          </a:fontRef>
+        </p:style>
+        <p:txBody>
           <a:bodyPr wrap="square" lIns="0" tIns="0" rIns="0" bIns="0" rtlCol="0" anchor="ctr"/>
           <a:lstStyle/>
           <a:p>
@@ -13968,22 +13908,82 @@
               </a:spcAft>
             </a:pPr>
             <a:r>
-              <a:rPr sz="1700" b="1" i="0">
+              <a:rPr sz="2400" b="1" i="0">
                 <a:solidFill>
                   <a:srgbClr val="FFFFFF"/>
                 </a:solidFill>
-                <a:latin typeface="Consolas"/>
-              </a:rPr>
-              <a:t>&lt;/&gt;  </a:t>
-            </a:r>
-            <a:r>
-              <a:rPr sz="1700" b="1" i="0">
-                <a:solidFill>
-                  <a:srgbClr val="FFFFFF"/>
-                </a:solidFill>
                 <a:latin typeface="Arial"/>
               </a:rPr>
-              <a:t>functions_demo.py</a:t>
+              <a:t>!</a:t>
+            </a:r>
+          </a:p>
+        </p:txBody>
+      </p:sp>
+      <p:sp>
+        <p:nvSpPr>
+          <p:cNvPr id="23" name="TextBox 22"/>
+          <p:cNvSpPr txBox="1"/>
+          <p:nvPr/>
+        </p:nvSpPr>
+        <p:spPr>
+          <a:xfrm>
+            <a:off x="822959" y="5349240"/>
+            <a:ext cx="9902952" cy="640080"/>
+          </a:xfrm>
+          <a:prstGeom prst="rect">
+            <a:avLst/>
+          </a:prstGeom>
+          <a:noFill/>
+        </p:spPr>
+        <p:txBody>
+          <a:bodyPr wrap="square" lIns="45720" rIns="45720" anchor="ctr">
+            <a:spAutoFit/>
+          </a:bodyPr>
+          <a:lstStyle/>
+          <a:p>
+            <a:pPr algn="r" rtl="1">
+              <a:spcAft>
+                <a:spcPts val="200"/>
+              </a:spcAft>
+            </a:pPr>
+            <a:r>
+              <a:rPr lang="he-IL" sz="1600" b="1" i="0">
+                <a:solidFill>
+                  <a:srgbClr val="1B2B34"/>
+                </a:solidFill>
+                <a:latin typeface="Arial"/>
+                <a:cs typeface="Arial"/>
+              </a:rPr>
+              <a:t>שכחתם global? </a:t>
+            </a:r>
+            <a:r>
+              <a:rPr lang="he-IL" sz="1600" b="0" i="0">
+                <a:solidFill>
+                  <a:srgbClr val="1B2B34"/>
+                </a:solidFill>
+                <a:latin typeface="Arial"/>
+                <a:cs typeface="Arial"/>
+              </a:rPr>
+              <a:t>תקבלו שגיאה </a:t>
+            </a:r>
+            <a:r>
+              <a:rPr sz="1600" b="1" i="0">
+                <a:solidFill>
+                  <a:srgbClr val="1B2B34"/>
+                </a:solidFill>
+                <a:latin typeface="Consolas"/>
+              </a:rPr>
+              <a:t>‎UnboundLocalError‎</a:t>
+            </a:r>
+            <a:r>
+              <a:rPr lang="he-IL" sz="1600" b="0" i="0">
+                <a:solidFill>
+                  <a:srgbClr val="1B2B34"/>
+                </a:solidFill>
+                <a:latin typeface="Arial"/>
+                <a:cs typeface="Arial"/>
+              </a:rPr>
+              <a:t> - עכשיו אתם יודעים למה!</a:t>
             </a:r>
           </a:p>
         </p:txBody>
